--- a/Week_1/004-JavaScript/JavaScript.pptx
+++ b/Week_1/004-JavaScript/JavaScript.pptx
@@ -31,6 +31,27 @@
     <p:sldId id="284" r:id="rId25"/>
     <p:sldId id="285" r:id="rId26"/>
     <p:sldId id="286" r:id="rId27"/>
+    <p:sldId id="288" r:id="rId28"/>
+    <p:sldId id="287" r:id="rId29"/>
+    <p:sldId id="290" r:id="rId30"/>
+    <p:sldId id="298" r:id="rId31"/>
+    <p:sldId id="291" r:id="rId32"/>
+    <p:sldId id="292" r:id="rId33"/>
+    <p:sldId id="293" r:id="rId34"/>
+    <p:sldId id="294" r:id="rId35"/>
+    <p:sldId id="295" r:id="rId36"/>
+    <p:sldId id="296" r:id="rId37"/>
+    <p:sldId id="297" r:id="rId38"/>
+    <p:sldId id="299" r:id="rId39"/>
+    <p:sldId id="300" r:id="rId40"/>
+    <p:sldId id="301" r:id="rId41"/>
+    <p:sldId id="302" r:id="rId42"/>
+    <p:sldId id="303" r:id="rId43"/>
+    <p:sldId id="304" r:id="rId44"/>
+    <p:sldId id="305" r:id="rId45"/>
+    <p:sldId id="306" r:id="rId46"/>
+    <p:sldId id="307" r:id="rId47"/>
+    <p:sldId id="308" r:id="rId48"/>
   </p:sldIdLst>
   <p:sldSz cx="12192000" cy="6858000"/>
   <p:notesSz cx="6858000" cy="9144000"/>
@@ -5648,7 +5669,7 @@
         </p:nvSpPr>
         <p:spPr>
           <a:xfrm>
-            <a:off x="1381293" y="2075832"/>
+            <a:off x="732266" y="2075832"/>
             <a:ext cx="4032372" cy="3678303"/>
           </a:xfrm>
         </p:spPr>
@@ -5692,7 +5713,7 @@
             </a:r>
             <a:r>
               <a:rPr lang="en-US" dirty="0"/>
-              <a:t> </a:t>
+              <a:t> – not a number </a:t>
             </a:r>
           </a:p>
         </p:txBody>
@@ -8254,6 +8275,588 @@
 </p:sld>
 </file>
 
+<file path=ppt/slides/slide27.xml><?xml version="1.0" encoding="utf-8"?>
+<p:sld xmlns:a="http://schemas.openxmlformats.org/drawingml/2006/main" xmlns:r="http://schemas.openxmlformats.org/officeDocument/2006/relationships" xmlns:p="http://schemas.openxmlformats.org/presentationml/2006/main">
+  <p:cSld>
+    <p:spTree>
+      <p:nvGrpSpPr>
+        <p:cNvPr id="1" name=""/>
+        <p:cNvGrpSpPr/>
+        <p:nvPr/>
+      </p:nvGrpSpPr>
+      <p:grpSpPr>
+        <a:xfrm>
+          <a:off x="0" y="0"/>
+          <a:ext cx="0" cy="0"/>
+          <a:chOff x="0" y="0"/>
+          <a:chExt cx="0" cy="0"/>
+        </a:xfrm>
+      </p:grpSpPr>
+      <p:sp>
+        <p:nvSpPr>
+          <p:cNvPr id="2" name="Title 1">
+            <a:extLst>
+              <a:ext uri="{FF2B5EF4-FFF2-40B4-BE49-F238E27FC236}">
+                <a16:creationId xmlns:a16="http://schemas.microsoft.com/office/drawing/2014/main" id="{BE494ED6-05A6-FAE6-60C7-67F8CF862446}"/>
+              </a:ext>
+            </a:extLst>
+          </p:cNvPr>
+          <p:cNvSpPr>
+            <a:spLocks noGrp="1"/>
+          </p:cNvSpPr>
+          <p:nvPr>
+            <p:ph type="title"/>
+          </p:nvPr>
+        </p:nvSpPr>
+        <p:spPr/>
+        <p:txBody>
+          <a:bodyPr/>
+          <a:lstStyle/>
+          <a:p>
+            <a:r>
+              <a:rPr lang="en-US" dirty="0"/>
+              <a:t>Strict Mode</a:t>
+            </a:r>
+          </a:p>
+        </p:txBody>
+      </p:sp>
+      <p:sp>
+        <p:nvSpPr>
+          <p:cNvPr id="3" name="Content Placeholder 2">
+            <a:extLst>
+              <a:ext uri="{FF2B5EF4-FFF2-40B4-BE49-F238E27FC236}">
+                <a16:creationId xmlns:a16="http://schemas.microsoft.com/office/drawing/2014/main" id="{45B21C7C-C2B9-6ECD-E16F-C2BA0032FAAE}"/>
+              </a:ext>
+            </a:extLst>
+          </p:cNvPr>
+          <p:cNvSpPr>
+            <a:spLocks noGrp="1"/>
+          </p:cNvSpPr>
+          <p:nvPr>
+            <p:ph idx="1"/>
+          </p:nvPr>
+        </p:nvSpPr>
+        <p:spPr>
+          <a:xfrm>
+            <a:off x="581194" y="2180497"/>
+            <a:ext cx="5032797" cy="1859876"/>
+          </a:xfrm>
+        </p:spPr>
+        <p:txBody>
+          <a:bodyPr/>
+          <a:lstStyle/>
+          <a:p>
+            <a:r>
+              <a:rPr lang="en-US" dirty="0"/>
+              <a:t>Strict Mode is a way to opt in to a stricter set of rules that help us write cleaner and safer code. </a:t>
+            </a:r>
+          </a:p>
+          <a:p>
+            <a:pPr lvl="1"/>
+            <a:r>
+              <a:rPr lang="en-US" dirty="0"/>
+              <a:t>Can be used at the top of a JS file </a:t>
+            </a:r>
+          </a:p>
+          <a:p>
+            <a:pPr lvl="1"/>
+            <a:r>
+              <a:rPr lang="en-US" dirty="0"/>
+              <a:t>Can be used at the top of a function to only apply to a single function</a:t>
+            </a:r>
+          </a:p>
+        </p:txBody>
+      </p:sp>
+      <p:pic>
+        <p:nvPicPr>
+          <p:cNvPr id="5" name="Picture 4">
+            <a:extLst>
+              <a:ext uri="{FF2B5EF4-FFF2-40B4-BE49-F238E27FC236}">
+                <a16:creationId xmlns:a16="http://schemas.microsoft.com/office/drawing/2014/main" id="{1FF2F76E-9BDE-DD08-7002-A48C94CAC20A}"/>
+              </a:ext>
+            </a:extLst>
+          </p:cNvPr>
+          <p:cNvPicPr>
+            <a:picLocks noChangeAspect="1"/>
+          </p:cNvPicPr>
+          <p:nvPr/>
+        </p:nvPicPr>
+        <p:blipFill>
+          <a:blip r:embed="rId2"/>
+          <a:stretch>
+            <a:fillRect/>
+          </a:stretch>
+        </p:blipFill>
+        <p:spPr>
+          <a:xfrm>
+            <a:off x="6500148" y="2025943"/>
+            <a:ext cx="4764704" cy="666565"/>
+          </a:xfrm>
+          <a:prstGeom prst="rect">
+            <a:avLst/>
+          </a:prstGeom>
+        </p:spPr>
+      </p:pic>
+      <p:pic>
+        <p:nvPicPr>
+          <p:cNvPr id="7" name="Picture 6">
+            <a:extLst>
+              <a:ext uri="{FF2B5EF4-FFF2-40B4-BE49-F238E27FC236}">
+                <a16:creationId xmlns:a16="http://schemas.microsoft.com/office/drawing/2014/main" id="{3BEA1B98-0B63-0349-5976-EDE6E9E1E0BE}"/>
+              </a:ext>
+            </a:extLst>
+          </p:cNvPr>
+          <p:cNvPicPr>
+            <a:picLocks noChangeAspect="1"/>
+          </p:cNvPicPr>
+          <p:nvPr/>
+        </p:nvPicPr>
+        <p:blipFill>
+          <a:blip r:embed="rId3"/>
+          <a:stretch>
+            <a:fillRect/>
+          </a:stretch>
+        </p:blipFill>
+        <p:spPr>
+          <a:xfrm>
+            <a:off x="6890745" y="3429000"/>
+            <a:ext cx="3983507" cy="903721"/>
+          </a:xfrm>
+          <a:prstGeom prst="rect">
+            <a:avLst/>
+          </a:prstGeom>
+        </p:spPr>
+      </p:pic>
+      <p:pic>
+        <p:nvPicPr>
+          <p:cNvPr id="9" name="Picture 8">
+            <a:extLst>
+              <a:ext uri="{FF2B5EF4-FFF2-40B4-BE49-F238E27FC236}">
+                <a16:creationId xmlns:a16="http://schemas.microsoft.com/office/drawing/2014/main" id="{BB349416-A9E0-9ADE-75DC-CC320AAA1113}"/>
+              </a:ext>
+            </a:extLst>
+          </p:cNvPr>
+          <p:cNvPicPr>
+            <a:picLocks noChangeAspect="1"/>
+          </p:cNvPicPr>
+          <p:nvPr/>
+        </p:nvPicPr>
+        <p:blipFill>
+          <a:blip r:embed="rId4"/>
+          <a:stretch>
+            <a:fillRect/>
+          </a:stretch>
+        </p:blipFill>
+        <p:spPr>
+          <a:xfrm>
+            <a:off x="7264367" y="4986623"/>
+            <a:ext cx="3236265" cy="1078755"/>
+          </a:xfrm>
+          <a:prstGeom prst="rect">
+            <a:avLst/>
+          </a:prstGeom>
+        </p:spPr>
+      </p:pic>
+      <p:pic>
+        <p:nvPicPr>
+          <p:cNvPr id="11" name="Picture 10">
+            <a:extLst>
+              <a:ext uri="{FF2B5EF4-FFF2-40B4-BE49-F238E27FC236}">
+                <a16:creationId xmlns:a16="http://schemas.microsoft.com/office/drawing/2014/main" id="{51864EF8-FF0C-505B-8E8A-A26802518B2A}"/>
+              </a:ext>
+            </a:extLst>
+          </p:cNvPr>
+          <p:cNvPicPr>
+            <a:picLocks noChangeAspect="1"/>
+          </p:cNvPicPr>
+          <p:nvPr/>
+        </p:nvPicPr>
+        <p:blipFill>
+          <a:blip r:embed="rId5"/>
+          <a:stretch>
+            <a:fillRect/>
+          </a:stretch>
+        </p:blipFill>
+        <p:spPr>
+          <a:xfrm>
+            <a:off x="942256" y="4040373"/>
+            <a:ext cx="5153744" cy="2343477"/>
+          </a:xfrm>
+          <a:prstGeom prst="rect">
+            <a:avLst/>
+          </a:prstGeom>
+        </p:spPr>
+      </p:pic>
+    </p:spTree>
+    <p:extLst>
+      <p:ext uri="{BB962C8B-B14F-4D97-AF65-F5344CB8AC3E}">
+        <p14:creationId xmlns:p14="http://schemas.microsoft.com/office/powerpoint/2010/main" val="4184427664"/>
+      </p:ext>
+    </p:extLst>
+  </p:cSld>
+  <p:clrMapOvr>
+    <a:masterClrMapping/>
+  </p:clrMapOvr>
+</p:sld>
+</file>
+
+<file path=ppt/slides/slide28.xml><?xml version="1.0" encoding="utf-8"?>
+<p:sld xmlns:a="http://schemas.openxmlformats.org/drawingml/2006/main" xmlns:r="http://schemas.openxmlformats.org/officeDocument/2006/relationships" xmlns:p="http://schemas.openxmlformats.org/presentationml/2006/main">
+  <p:cSld>
+    <p:spTree>
+      <p:nvGrpSpPr>
+        <p:cNvPr id="1" name=""/>
+        <p:cNvGrpSpPr/>
+        <p:nvPr/>
+      </p:nvGrpSpPr>
+      <p:grpSpPr>
+        <a:xfrm>
+          <a:off x="0" y="0"/>
+          <a:ext cx="0" cy="0"/>
+          <a:chOff x="0" y="0"/>
+          <a:chExt cx="0" cy="0"/>
+        </a:xfrm>
+      </p:grpSpPr>
+      <p:sp>
+        <p:nvSpPr>
+          <p:cNvPr id="2" name="Title 1">
+            <a:extLst>
+              <a:ext uri="{FF2B5EF4-FFF2-40B4-BE49-F238E27FC236}">
+                <a16:creationId xmlns:a16="http://schemas.microsoft.com/office/drawing/2014/main" id="{1C379506-E9F1-92B2-E882-F7C14CC3FE3F}"/>
+              </a:ext>
+            </a:extLst>
+          </p:cNvPr>
+          <p:cNvSpPr>
+            <a:spLocks noGrp="1"/>
+          </p:cNvSpPr>
+          <p:nvPr>
+            <p:ph type="title"/>
+          </p:nvPr>
+        </p:nvSpPr>
+        <p:spPr/>
+        <p:txBody>
+          <a:bodyPr/>
+          <a:lstStyle/>
+          <a:p>
+            <a:r>
+              <a:rPr lang="en-US" dirty="0"/>
+              <a:t>JavaScript Modules</a:t>
+            </a:r>
+          </a:p>
+        </p:txBody>
+      </p:sp>
+      <p:sp>
+        <p:nvSpPr>
+          <p:cNvPr id="3" name="Content Placeholder 2">
+            <a:extLst>
+              <a:ext uri="{FF2B5EF4-FFF2-40B4-BE49-F238E27FC236}">
+                <a16:creationId xmlns:a16="http://schemas.microsoft.com/office/drawing/2014/main" id="{0A04AC34-8F65-BF81-8B0B-355318F79BD4}"/>
+              </a:ext>
+            </a:extLst>
+          </p:cNvPr>
+          <p:cNvSpPr>
+            <a:spLocks noGrp="1"/>
+          </p:cNvSpPr>
+          <p:nvPr>
+            <p:ph idx="1"/>
+          </p:nvPr>
+        </p:nvSpPr>
+        <p:spPr>
+          <a:xfrm>
+            <a:off x="329609" y="1975900"/>
+            <a:ext cx="5766391" cy="4658816"/>
+          </a:xfrm>
+        </p:spPr>
+        <p:txBody>
+          <a:bodyPr>
+            <a:normAutofit/>
+          </a:bodyPr>
+          <a:lstStyle/>
+          <a:p>
+            <a:r>
+              <a:rPr lang="en-US" dirty="0"/>
+              <a:t>Definition: A </a:t>
+            </a:r>
+            <a:r>
+              <a:rPr lang="en-US" dirty="0">
+                <a:solidFill>
+                  <a:schemeClr val="accent2"/>
+                </a:solidFill>
+              </a:rPr>
+              <a:t>JavaScript Module </a:t>
+            </a:r>
+            <a:r>
+              <a:rPr lang="en-US" dirty="0"/>
+              <a:t>is a JavaScript file that can be imported into another JavaScript file. </a:t>
+            </a:r>
+          </a:p>
+          <a:p>
+            <a:pPr lvl="1"/>
+            <a:r>
+              <a:rPr lang="en-US" dirty="0"/>
+              <a:t>It may contain variables, functions, etc. </a:t>
+            </a:r>
+          </a:p>
+          <a:p>
+            <a:pPr lvl="1"/>
+            <a:r>
+              <a:rPr lang="en-US" dirty="0"/>
+              <a:t>Allows developer to organize code into separate, reusable pieces instead of writing everything in a single script</a:t>
+            </a:r>
+          </a:p>
+          <a:p>
+            <a:pPr lvl="1"/>
+            <a:r>
+              <a:rPr lang="en-US" dirty="0"/>
+              <a:t>Each module has its own scope (variables/functions inside are not automatically global) </a:t>
+            </a:r>
+          </a:p>
+          <a:p>
+            <a:pPr lvl="1"/>
+            <a:r>
+              <a:rPr lang="en-US" dirty="0"/>
+              <a:t>Prevents naming conflicts between different parts of code </a:t>
+            </a:r>
+          </a:p>
+          <a:p>
+            <a:pPr lvl="1"/>
+            <a:r>
+              <a:rPr lang="en-US" dirty="0"/>
+              <a:t>Named Exports vs Default Exports</a:t>
+            </a:r>
+          </a:p>
+          <a:p>
+            <a:pPr lvl="1"/>
+            <a:r>
+              <a:rPr lang="en-US" dirty="0"/>
+              <a:t>Strict Mode is enabled by default</a:t>
+            </a:r>
+          </a:p>
+        </p:txBody>
+      </p:sp>
+      <p:pic>
+        <p:nvPicPr>
+          <p:cNvPr id="5" name="Picture 4">
+            <a:extLst>
+              <a:ext uri="{FF2B5EF4-FFF2-40B4-BE49-F238E27FC236}">
+                <a16:creationId xmlns:a16="http://schemas.microsoft.com/office/drawing/2014/main" id="{690BE863-BAE3-2900-054F-D6D83A3AD5B8}"/>
+              </a:ext>
+            </a:extLst>
+          </p:cNvPr>
+          <p:cNvPicPr>
+            <a:picLocks noChangeAspect="1"/>
+          </p:cNvPicPr>
+          <p:nvPr/>
+        </p:nvPicPr>
+        <p:blipFill>
+          <a:blip r:embed="rId2"/>
+          <a:stretch>
+            <a:fillRect/>
+          </a:stretch>
+        </p:blipFill>
+        <p:spPr>
+          <a:xfrm>
+            <a:off x="6651023" y="1975900"/>
+            <a:ext cx="4078385" cy="2441996"/>
+          </a:xfrm>
+          <a:prstGeom prst="rect">
+            <a:avLst/>
+          </a:prstGeom>
+        </p:spPr>
+      </p:pic>
+      <p:pic>
+        <p:nvPicPr>
+          <p:cNvPr id="7" name="Picture 6">
+            <a:extLst>
+              <a:ext uri="{FF2B5EF4-FFF2-40B4-BE49-F238E27FC236}">
+                <a16:creationId xmlns:a16="http://schemas.microsoft.com/office/drawing/2014/main" id="{61978CEF-5078-901D-B769-E8777F785339}"/>
+              </a:ext>
+            </a:extLst>
+          </p:cNvPr>
+          <p:cNvPicPr>
+            <a:picLocks noChangeAspect="1"/>
+          </p:cNvPicPr>
+          <p:nvPr/>
+        </p:nvPicPr>
+        <p:blipFill>
+          <a:blip r:embed="rId3"/>
+          <a:stretch>
+            <a:fillRect/>
+          </a:stretch>
+        </p:blipFill>
+        <p:spPr>
+          <a:xfrm>
+            <a:off x="6326030" y="4677840"/>
+            <a:ext cx="4728370" cy="1668836"/>
+          </a:xfrm>
+          <a:prstGeom prst="rect">
+            <a:avLst/>
+          </a:prstGeom>
+        </p:spPr>
+      </p:pic>
+    </p:spTree>
+    <p:extLst>
+      <p:ext uri="{BB962C8B-B14F-4D97-AF65-F5344CB8AC3E}">
+        <p14:creationId xmlns:p14="http://schemas.microsoft.com/office/powerpoint/2010/main" val="2956148634"/>
+      </p:ext>
+    </p:extLst>
+  </p:cSld>
+  <p:clrMapOvr>
+    <a:masterClrMapping/>
+  </p:clrMapOvr>
+</p:sld>
+</file>
+
+<file path=ppt/slides/slide29.xml><?xml version="1.0" encoding="utf-8"?>
+<p:sld xmlns:a="http://schemas.openxmlformats.org/drawingml/2006/main" xmlns:r="http://schemas.openxmlformats.org/officeDocument/2006/relationships" xmlns:p="http://schemas.openxmlformats.org/presentationml/2006/main">
+  <p:cSld>
+    <p:spTree>
+      <p:nvGrpSpPr>
+        <p:cNvPr id="1" name=""/>
+        <p:cNvGrpSpPr/>
+        <p:nvPr/>
+      </p:nvGrpSpPr>
+      <p:grpSpPr>
+        <a:xfrm>
+          <a:off x="0" y="0"/>
+          <a:ext cx="0" cy="0"/>
+          <a:chOff x="0" y="0"/>
+          <a:chExt cx="0" cy="0"/>
+        </a:xfrm>
+      </p:grpSpPr>
+      <p:sp>
+        <p:nvSpPr>
+          <p:cNvPr id="2" name="Title 1">
+            <a:extLst>
+              <a:ext uri="{FF2B5EF4-FFF2-40B4-BE49-F238E27FC236}">
+                <a16:creationId xmlns:a16="http://schemas.microsoft.com/office/drawing/2014/main" id="{BD691A5A-E8F3-629C-9BE3-9C564E742600}"/>
+              </a:ext>
+            </a:extLst>
+          </p:cNvPr>
+          <p:cNvSpPr>
+            <a:spLocks noGrp="1"/>
+          </p:cNvSpPr>
+          <p:nvPr>
+            <p:ph type="title"/>
+          </p:nvPr>
+        </p:nvSpPr>
+        <p:spPr/>
+        <p:txBody>
+          <a:bodyPr/>
+          <a:lstStyle/>
+          <a:p>
+            <a:r>
+              <a:rPr lang="en-US" dirty="0"/>
+              <a:t>Decorators</a:t>
+            </a:r>
+          </a:p>
+        </p:txBody>
+      </p:sp>
+      <p:sp>
+        <p:nvSpPr>
+          <p:cNvPr id="3" name="Content Placeholder 2">
+            <a:extLst>
+              <a:ext uri="{FF2B5EF4-FFF2-40B4-BE49-F238E27FC236}">
+                <a16:creationId xmlns:a16="http://schemas.microsoft.com/office/drawing/2014/main" id="{0E9FAF29-4E7F-8BC6-EC21-60534B1AA1EF}"/>
+              </a:ext>
+            </a:extLst>
+          </p:cNvPr>
+          <p:cNvSpPr>
+            <a:spLocks noGrp="1"/>
+          </p:cNvSpPr>
+          <p:nvPr>
+            <p:ph idx="1"/>
+          </p:nvPr>
+        </p:nvSpPr>
+        <p:spPr>
+          <a:xfrm>
+            <a:off x="581193" y="2180496"/>
+            <a:ext cx="4713822" cy="3678303"/>
+          </a:xfrm>
+        </p:spPr>
+        <p:txBody>
+          <a:bodyPr/>
+          <a:lstStyle/>
+          <a:p>
+            <a:r>
+              <a:rPr lang="en-US" dirty="0"/>
+              <a:t>Definition: Decorators are a special kind of syntax that allows us to modify or enhance classes and class members. </a:t>
+            </a:r>
+          </a:p>
+          <a:p>
+            <a:pPr lvl="1"/>
+            <a:r>
+              <a:rPr lang="en-US" dirty="0"/>
+              <a:t>This is still experimental</a:t>
+            </a:r>
+          </a:p>
+          <a:p>
+            <a:pPr lvl="1"/>
+            <a:r>
+              <a:rPr lang="en-US" dirty="0"/>
+              <a:t>Not fully implemented yet into the </a:t>
+            </a:r>
+            <a:r>
+              <a:rPr lang="en-US" dirty="0" err="1"/>
+              <a:t>ECMAscript</a:t>
+            </a:r>
+            <a:r>
+              <a:rPr lang="en-US" dirty="0"/>
+              <a:t> standard</a:t>
+            </a:r>
+          </a:p>
+          <a:p>
+            <a:pPr lvl="1"/>
+            <a:r>
+              <a:rPr lang="en-US" dirty="0"/>
+              <a:t>Often used by larger frameworks such as Angular </a:t>
+            </a:r>
+          </a:p>
+        </p:txBody>
+      </p:sp>
+      <p:pic>
+        <p:nvPicPr>
+          <p:cNvPr id="5" name="Picture 4">
+            <a:extLst>
+              <a:ext uri="{FF2B5EF4-FFF2-40B4-BE49-F238E27FC236}">
+                <a16:creationId xmlns:a16="http://schemas.microsoft.com/office/drawing/2014/main" id="{CC90BC6D-21D3-2A70-8003-FD68B678DAB7}"/>
+              </a:ext>
+            </a:extLst>
+          </p:cNvPr>
+          <p:cNvPicPr>
+            <a:picLocks noChangeAspect="1"/>
+          </p:cNvPicPr>
+          <p:nvPr/>
+        </p:nvPicPr>
+        <p:blipFill>
+          <a:blip r:embed="rId2"/>
+          <a:stretch>
+            <a:fillRect/>
+          </a:stretch>
+        </p:blipFill>
+        <p:spPr>
+          <a:xfrm>
+            <a:off x="6227762" y="2180496"/>
+            <a:ext cx="4381295" cy="4150251"/>
+          </a:xfrm>
+          <a:prstGeom prst="rect">
+            <a:avLst/>
+          </a:prstGeom>
+        </p:spPr>
+      </p:pic>
+    </p:spTree>
+    <p:extLst>
+      <p:ext uri="{BB962C8B-B14F-4D97-AF65-F5344CB8AC3E}">
+        <p14:creationId xmlns:p14="http://schemas.microsoft.com/office/powerpoint/2010/main" val="290990628"/>
+      </p:ext>
+    </p:extLst>
+  </p:cSld>
+  <p:clrMapOvr>
+    <a:masterClrMapping/>
+  </p:clrMapOvr>
+</p:sld>
+</file>
+
 <file path=ppt/slides/slide3.xml><?xml version="1.0" encoding="utf-8"?>
 <p:sld xmlns:a="http://schemas.openxmlformats.org/drawingml/2006/main" xmlns:r="http://schemas.openxmlformats.org/officeDocument/2006/relationships" xmlns:p="http://schemas.openxmlformats.org/presentationml/2006/main">
   <p:cSld>
@@ -8453,6 +9056,2203 @@
     <p:extLst>
       <p:ext uri="{BB962C8B-B14F-4D97-AF65-F5344CB8AC3E}">
         <p14:creationId xmlns:p14="http://schemas.microsoft.com/office/powerpoint/2010/main" val="1065025101"/>
+      </p:ext>
+    </p:extLst>
+  </p:cSld>
+  <p:clrMapOvr>
+    <a:masterClrMapping/>
+  </p:clrMapOvr>
+</p:sld>
+</file>
+
+<file path=ppt/slides/slide30.xml><?xml version="1.0" encoding="utf-8"?>
+<p:sld xmlns:a="http://schemas.openxmlformats.org/drawingml/2006/main" xmlns:r="http://schemas.openxmlformats.org/officeDocument/2006/relationships" xmlns:p="http://schemas.openxmlformats.org/presentationml/2006/main">
+  <p:cSld>
+    <p:spTree>
+      <p:nvGrpSpPr>
+        <p:cNvPr id="1" name=""/>
+        <p:cNvGrpSpPr/>
+        <p:nvPr/>
+      </p:nvGrpSpPr>
+      <p:grpSpPr>
+        <a:xfrm>
+          <a:off x="0" y="0"/>
+          <a:ext cx="0" cy="0"/>
+          <a:chOff x="0" y="0"/>
+          <a:chExt cx="0" cy="0"/>
+        </a:xfrm>
+      </p:grpSpPr>
+      <p:sp>
+        <p:nvSpPr>
+          <p:cNvPr id="2" name="Title 1">
+            <a:extLst>
+              <a:ext uri="{FF2B5EF4-FFF2-40B4-BE49-F238E27FC236}">
+                <a16:creationId xmlns:a16="http://schemas.microsoft.com/office/drawing/2014/main" id="{CA263FBA-CBE4-F93C-32D9-B1D3C0DADD51}"/>
+              </a:ext>
+            </a:extLst>
+          </p:cNvPr>
+          <p:cNvSpPr>
+            <a:spLocks noGrp="1"/>
+          </p:cNvSpPr>
+          <p:nvPr>
+            <p:ph type="title"/>
+          </p:nvPr>
+        </p:nvSpPr>
+        <p:spPr/>
+        <p:txBody>
+          <a:bodyPr/>
+          <a:lstStyle/>
+          <a:p>
+            <a:r>
+              <a:rPr lang="en-US" dirty="0"/>
+              <a:t>Targeting Elements with JavaScript</a:t>
+            </a:r>
+          </a:p>
+        </p:txBody>
+      </p:sp>
+      <p:sp>
+        <p:nvSpPr>
+          <p:cNvPr id="3" name="Content Placeholder 2">
+            <a:extLst>
+              <a:ext uri="{FF2B5EF4-FFF2-40B4-BE49-F238E27FC236}">
+                <a16:creationId xmlns:a16="http://schemas.microsoft.com/office/drawing/2014/main" id="{A327D774-BC22-B216-BC2D-D7946C446556}"/>
+              </a:ext>
+            </a:extLst>
+          </p:cNvPr>
+          <p:cNvSpPr>
+            <a:spLocks noGrp="1"/>
+          </p:cNvSpPr>
+          <p:nvPr>
+            <p:ph idx="1"/>
+          </p:nvPr>
+        </p:nvSpPr>
+        <p:spPr>
+          <a:xfrm>
+            <a:off x="581192" y="2180496"/>
+            <a:ext cx="5330510" cy="4167141"/>
+          </a:xfrm>
+        </p:spPr>
+        <p:txBody>
+          <a:bodyPr/>
+          <a:lstStyle/>
+          <a:p>
+            <a:r>
+              <a:rPr lang="en-US" dirty="0" err="1"/>
+              <a:t>getElementById</a:t>
+            </a:r>
+            <a:r>
+              <a:rPr lang="en-US" dirty="0"/>
+              <a:t>() – returns single element</a:t>
+            </a:r>
+          </a:p>
+          <a:p>
+            <a:r>
+              <a:rPr lang="en-US" dirty="0" err="1"/>
+              <a:t>getElementsByClassName</a:t>
+            </a:r>
+            <a:r>
+              <a:rPr lang="en-US" dirty="0"/>
+              <a:t>() – returns a HTML collection</a:t>
+            </a:r>
+          </a:p>
+          <a:p>
+            <a:r>
+              <a:rPr lang="en-US" dirty="0" err="1"/>
+              <a:t>getElementsByTagName</a:t>
+            </a:r>
+            <a:r>
+              <a:rPr lang="en-US" dirty="0"/>
+              <a:t>() – returns a HTML collection</a:t>
+            </a:r>
+          </a:p>
+          <a:p>
+            <a:r>
+              <a:rPr lang="en-US" dirty="0" err="1"/>
+              <a:t>querySelector</a:t>
+            </a:r>
+            <a:r>
+              <a:rPr lang="en-US" dirty="0"/>
+              <a:t>() – returns first matching element based on CSS selector</a:t>
+            </a:r>
+          </a:p>
+          <a:p>
+            <a:r>
+              <a:rPr lang="en-US" dirty="0" err="1"/>
+              <a:t>querySelectorAll</a:t>
+            </a:r>
+            <a:r>
+              <a:rPr lang="en-US" dirty="0"/>
+              <a:t>() – returns a </a:t>
+            </a:r>
+            <a:r>
+              <a:rPr lang="en-US" dirty="0" err="1"/>
+              <a:t>NodeList</a:t>
+            </a:r>
+            <a:r>
+              <a:rPr lang="en-US" dirty="0"/>
+              <a:t> with all matching elements using a CSS selector</a:t>
+            </a:r>
+          </a:p>
+        </p:txBody>
+      </p:sp>
+      <p:pic>
+        <p:nvPicPr>
+          <p:cNvPr id="5" name="Picture 4">
+            <a:extLst>
+              <a:ext uri="{FF2B5EF4-FFF2-40B4-BE49-F238E27FC236}">
+                <a16:creationId xmlns:a16="http://schemas.microsoft.com/office/drawing/2014/main" id="{A8386D5E-1209-986B-9E16-9011B1FFB95B}"/>
+              </a:ext>
+            </a:extLst>
+          </p:cNvPr>
+          <p:cNvPicPr>
+            <a:picLocks noChangeAspect="1"/>
+          </p:cNvPicPr>
+          <p:nvPr/>
+        </p:nvPicPr>
+        <p:blipFill>
+          <a:blip r:embed="rId2"/>
+          <a:stretch>
+            <a:fillRect/>
+          </a:stretch>
+        </p:blipFill>
+        <p:spPr>
+          <a:xfrm>
+            <a:off x="6691771" y="2102856"/>
+            <a:ext cx="5108922" cy="1645471"/>
+          </a:xfrm>
+          <a:prstGeom prst="rect">
+            <a:avLst/>
+          </a:prstGeom>
+        </p:spPr>
+      </p:pic>
+      <p:pic>
+        <p:nvPicPr>
+          <p:cNvPr id="7" name="Picture 6">
+            <a:extLst>
+              <a:ext uri="{FF2B5EF4-FFF2-40B4-BE49-F238E27FC236}">
+                <a16:creationId xmlns:a16="http://schemas.microsoft.com/office/drawing/2014/main" id="{8CB76E27-9060-EDD1-B5C7-9A54CA1782A1}"/>
+              </a:ext>
+            </a:extLst>
+          </p:cNvPr>
+          <p:cNvPicPr>
+            <a:picLocks noChangeAspect="1"/>
+          </p:cNvPicPr>
+          <p:nvPr/>
+        </p:nvPicPr>
+        <p:blipFill>
+          <a:blip r:embed="rId3"/>
+          <a:stretch>
+            <a:fillRect/>
+          </a:stretch>
+        </p:blipFill>
+        <p:spPr>
+          <a:xfrm>
+            <a:off x="6007414" y="3932408"/>
+            <a:ext cx="5840238" cy="373127"/>
+          </a:xfrm>
+          <a:prstGeom prst="rect">
+            <a:avLst/>
+          </a:prstGeom>
+        </p:spPr>
+      </p:pic>
+      <p:pic>
+        <p:nvPicPr>
+          <p:cNvPr id="9" name="Picture 8">
+            <a:extLst>
+              <a:ext uri="{FF2B5EF4-FFF2-40B4-BE49-F238E27FC236}">
+                <a16:creationId xmlns:a16="http://schemas.microsoft.com/office/drawing/2014/main" id="{17FB9AB0-072C-4761-1A6A-1C40538B19C7}"/>
+              </a:ext>
+            </a:extLst>
+          </p:cNvPr>
+          <p:cNvPicPr>
+            <a:picLocks noChangeAspect="1"/>
+          </p:cNvPicPr>
+          <p:nvPr/>
+        </p:nvPicPr>
+        <p:blipFill>
+          <a:blip r:embed="rId4"/>
+          <a:stretch>
+            <a:fillRect/>
+          </a:stretch>
+        </p:blipFill>
+        <p:spPr>
+          <a:xfrm>
+            <a:off x="5798122" y="4534542"/>
+            <a:ext cx="6002571" cy="341231"/>
+          </a:xfrm>
+          <a:prstGeom prst="rect">
+            <a:avLst/>
+          </a:prstGeom>
+        </p:spPr>
+      </p:pic>
+      <p:pic>
+        <p:nvPicPr>
+          <p:cNvPr id="11" name="Picture 10">
+            <a:extLst>
+              <a:ext uri="{FF2B5EF4-FFF2-40B4-BE49-F238E27FC236}">
+                <a16:creationId xmlns:a16="http://schemas.microsoft.com/office/drawing/2014/main" id="{67617B94-93A3-168D-2767-3625753A104E}"/>
+              </a:ext>
+            </a:extLst>
+          </p:cNvPr>
+          <p:cNvPicPr>
+            <a:picLocks noChangeAspect="1"/>
+          </p:cNvPicPr>
+          <p:nvPr/>
+        </p:nvPicPr>
+        <p:blipFill>
+          <a:blip r:embed="rId5"/>
+          <a:stretch>
+            <a:fillRect/>
+          </a:stretch>
+        </p:blipFill>
+        <p:spPr>
+          <a:xfrm>
+            <a:off x="6054374" y="5108043"/>
+            <a:ext cx="5746319" cy="341230"/>
+          </a:xfrm>
+          <a:prstGeom prst="rect">
+            <a:avLst/>
+          </a:prstGeom>
+        </p:spPr>
+      </p:pic>
+      <p:pic>
+        <p:nvPicPr>
+          <p:cNvPr id="13" name="Picture 12">
+            <a:extLst>
+              <a:ext uri="{FF2B5EF4-FFF2-40B4-BE49-F238E27FC236}">
+                <a16:creationId xmlns:a16="http://schemas.microsoft.com/office/drawing/2014/main" id="{8846C23A-5130-6D5E-6DE8-9D9ABB1FE0E4}"/>
+              </a:ext>
+            </a:extLst>
+          </p:cNvPr>
+          <p:cNvPicPr>
+            <a:picLocks noChangeAspect="1"/>
+          </p:cNvPicPr>
+          <p:nvPr/>
+        </p:nvPicPr>
+        <p:blipFill>
+          <a:blip r:embed="rId6"/>
+          <a:stretch>
+            <a:fillRect/>
+          </a:stretch>
+        </p:blipFill>
+        <p:spPr>
+          <a:xfrm>
+            <a:off x="5678162" y="5812275"/>
+            <a:ext cx="6122531" cy="347378"/>
+          </a:xfrm>
+          <a:prstGeom prst="rect">
+            <a:avLst/>
+          </a:prstGeom>
+        </p:spPr>
+      </p:pic>
+    </p:spTree>
+    <p:extLst>
+      <p:ext uri="{BB962C8B-B14F-4D97-AF65-F5344CB8AC3E}">
+        <p14:creationId xmlns:p14="http://schemas.microsoft.com/office/powerpoint/2010/main" val="3253640469"/>
+      </p:ext>
+    </p:extLst>
+  </p:cSld>
+  <p:clrMapOvr>
+    <a:masterClrMapping/>
+  </p:clrMapOvr>
+</p:sld>
+</file>
+
+<file path=ppt/slides/slide31.xml><?xml version="1.0" encoding="utf-8"?>
+<p:sld xmlns:a="http://schemas.openxmlformats.org/drawingml/2006/main" xmlns:r="http://schemas.openxmlformats.org/officeDocument/2006/relationships" xmlns:p="http://schemas.openxmlformats.org/presentationml/2006/main">
+  <p:cSld>
+    <p:spTree>
+      <p:nvGrpSpPr>
+        <p:cNvPr id="1" name=""/>
+        <p:cNvGrpSpPr/>
+        <p:nvPr/>
+      </p:nvGrpSpPr>
+      <p:grpSpPr>
+        <a:xfrm>
+          <a:off x="0" y="0"/>
+          <a:ext cx="0" cy="0"/>
+          <a:chOff x="0" y="0"/>
+          <a:chExt cx="0" cy="0"/>
+        </a:xfrm>
+      </p:grpSpPr>
+      <p:sp>
+        <p:nvSpPr>
+          <p:cNvPr id="2" name="Title 1">
+            <a:extLst>
+              <a:ext uri="{FF2B5EF4-FFF2-40B4-BE49-F238E27FC236}">
+                <a16:creationId xmlns:a16="http://schemas.microsoft.com/office/drawing/2014/main" id="{3B221947-B59B-9FF8-77E2-DCADF7FE862C}"/>
+              </a:ext>
+            </a:extLst>
+          </p:cNvPr>
+          <p:cNvSpPr>
+            <a:spLocks noGrp="1"/>
+          </p:cNvSpPr>
+          <p:nvPr>
+            <p:ph type="title"/>
+          </p:nvPr>
+        </p:nvSpPr>
+        <p:spPr/>
+        <p:txBody>
+          <a:bodyPr/>
+          <a:lstStyle/>
+          <a:p>
+            <a:r>
+              <a:rPr lang="en-US" dirty="0"/>
+              <a:t>Events</a:t>
+            </a:r>
+          </a:p>
+        </p:txBody>
+      </p:sp>
+      <p:sp>
+        <p:nvSpPr>
+          <p:cNvPr id="3" name="Content Placeholder 2">
+            <a:extLst>
+              <a:ext uri="{FF2B5EF4-FFF2-40B4-BE49-F238E27FC236}">
+                <a16:creationId xmlns:a16="http://schemas.microsoft.com/office/drawing/2014/main" id="{E3B00879-D406-919F-B69C-8135099DADD8}"/>
+              </a:ext>
+            </a:extLst>
+          </p:cNvPr>
+          <p:cNvSpPr>
+            <a:spLocks noGrp="1"/>
+          </p:cNvSpPr>
+          <p:nvPr>
+            <p:ph idx="1"/>
+          </p:nvPr>
+        </p:nvSpPr>
+        <p:spPr>
+          <a:xfrm>
+            <a:off x="2431284" y="2233659"/>
+            <a:ext cx="7329431" cy="3678303"/>
+          </a:xfrm>
+        </p:spPr>
+        <p:txBody>
+          <a:bodyPr/>
+          <a:lstStyle/>
+          <a:p>
+            <a:r>
+              <a:rPr lang="en-US" dirty="0"/>
+              <a:t>JavaScript events are actions that happen in the browser, usually because of human action.</a:t>
+            </a:r>
+          </a:p>
+          <a:p>
+            <a:r>
+              <a:rPr lang="en-US" dirty="0"/>
+              <a:t>Some examples include:</a:t>
+            </a:r>
+          </a:p>
+          <a:p>
+            <a:pPr lvl="1"/>
+            <a:r>
+              <a:rPr lang="en-US" dirty="0"/>
+              <a:t>UI events: load, resize, scroll</a:t>
+            </a:r>
+          </a:p>
+          <a:p>
+            <a:pPr lvl="1"/>
+            <a:r>
+              <a:rPr lang="en-US" dirty="0"/>
+              <a:t>Mouse events: click, </a:t>
+            </a:r>
+            <a:r>
+              <a:rPr lang="en-US" dirty="0" err="1"/>
+              <a:t>dblclick</a:t>
+            </a:r>
+            <a:r>
+              <a:rPr lang="en-US" dirty="0"/>
+              <a:t>, mouseover, </a:t>
+            </a:r>
+            <a:r>
+              <a:rPr lang="en-US" dirty="0" err="1"/>
+              <a:t>mousemove</a:t>
+            </a:r>
+            <a:endParaRPr lang="en-US" dirty="0"/>
+          </a:p>
+          <a:p>
+            <a:pPr lvl="1"/>
+            <a:r>
+              <a:rPr lang="en-US" dirty="0"/>
+              <a:t>Keyboard events: </a:t>
+            </a:r>
+            <a:r>
+              <a:rPr lang="en-US" dirty="0" err="1"/>
+              <a:t>keydown</a:t>
+            </a:r>
+            <a:r>
+              <a:rPr lang="en-US" dirty="0"/>
+              <a:t>, </a:t>
+            </a:r>
+            <a:r>
+              <a:rPr lang="en-US" dirty="0" err="1"/>
+              <a:t>keyup</a:t>
+            </a:r>
+            <a:r>
+              <a:rPr lang="en-US" dirty="0"/>
+              <a:t>, keypress</a:t>
+            </a:r>
+          </a:p>
+          <a:p>
+            <a:pPr lvl="1"/>
+            <a:r>
+              <a:rPr lang="en-US" dirty="0"/>
+              <a:t>Form events: submit, change, focus, blur</a:t>
+            </a:r>
+          </a:p>
+          <a:p>
+            <a:pPr lvl="1"/>
+            <a:r>
+              <a:rPr lang="en-US" dirty="0"/>
+              <a:t>Clipboard events: copy, paste, cut  </a:t>
+            </a:r>
+          </a:p>
+        </p:txBody>
+      </p:sp>
+    </p:spTree>
+    <p:extLst>
+      <p:ext uri="{BB962C8B-B14F-4D97-AF65-F5344CB8AC3E}">
+        <p14:creationId xmlns:p14="http://schemas.microsoft.com/office/powerpoint/2010/main" val="4046368682"/>
+      </p:ext>
+    </p:extLst>
+  </p:cSld>
+  <p:clrMapOvr>
+    <a:masterClrMapping/>
+  </p:clrMapOvr>
+</p:sld>
+</file>
+
+<file path=ppt/slides/slide32.xml><?xml version="1.0" encoding="utf-8"?>
+<p:sld xmlns:a="http://schemas.openxmlformats.org/drawingml/2006/main" xmlns:r="http://schemas.openxmlformats.org/officeDocument/2006/relationships" xmlns:p="http://schemas.openxmlformats.org/presentationml/2006/main">
+  <p:cSld>
+    <p:spTree>
+      <p:nvGrpSpPr>
+        <p:cNvPr id="1" name=""/>
+        <p:cNvGrpSpPr/>
+        <p:nvPr/>
+      </p:nvGrpSpPr>
+      <p:grpSpPr>
+        <a:xfrm>
+          <a:off x="0" y="0"/>
+          <a:ext cx="0" cy="0"/>
+          <a:chOff x="0" y="0"/>
+          <a:chExt cx="0" cy="0"/>
+        </a:xfrm>
+      </p:grpSpPr>
+      <p:sp>
+        <p:nvSpPr>
+          <p:cNvPr id="2" name="Title 1">
+            <a:extLst>
+              <a:ext uri="{FF2B5EF4-FFF2-40B4-BE49-F238E27FC236}">
+                <a16:creationId xmlns:a16="http://schemas.microsoft.com/office/drawing/2014/main" id="{B808BEB9-B9B8-044B-B45F-35B79E841D83}"/>
+              </a:ext>
+            </a:extLst>
+          </p:cNvPr>
+          <p:cNvSpPr>
+            <a:spLocks noGrp="1"/>
+          </p:cNvSpPr>
+          <p:nvPr>
+            <p:ph type="title"/>
+          </p:nvPr>
+        </p:nvSpPr>
+        <p:spPr/>
+        <p:txBody>
+          <a:bodyPr/>
+          <a:lstStyle/>
+          <a:p>
+            <a:r>
+              <a:rPr lang="en-US" dirty="0"/>
+              <a:t>Events</a:t>
+            </a:r>
+          </a:p>
+        </p:txBody>
+      </p:sp>
+      <p:sp>
+        <p:nvSpPr>
+          <p:cNvPr id="3" name="Content Placeholder 2">
+            <a:extLst>
+              <a:ext uri="{FF2B5EF4-FFF2-40B4-BE49-F238E27FC236}">
+                <a16:creationId xmlns:a16="http://schemas.microsoft.com/office/drawing/2014/main" id="{8D8E43EF-2412-2871-3DEA-A2B05218F359}"/>
+              </a:ext>
+            </a:extLst>
+          </p:cNvPr>
+          <p:cNvSpPr>
+            <a:spLocks noGrp="1"/>
+          </p:cNvSpPr>
+          <p:nvPr>
+            <p:ph idx="1"/>
+          </p:nvPr>
+        </p:nvSpPr>
+        <p:spPr>
+          <a:xfrm>
+            <a:off x="581192" y="2285490"/>
+            <a:ext cx="4455409" cy="3678303"/>
+          </a:xfrm>
+        </p:spPr>
+        <p:txBody>
+          <a:bodyPr/>
+          <a:lstStyle/>
+          <a:p>
+            <a:r>
+              <a:rPr lang="en-US" dirty="0"/>
+              <a:t>Event Listeners “listen” for events and execute a function when they occur</a:t>
+            </a:r>
+          </a:p>
+          <a:p>
+            <a:r>
+              <a:rPr lang="en-US" dirty="0"/>
+              <a:t>When an event occurs, an Event Object is automatically passed to the event handler </a:t>
+            </a:r>
+          </a:p>
+          <a:p>
+            <a:pPr lvl="1"/>
+            <a:r>
+              <a:rPr lang="en-US" dirty="0"/>
+              <a:t>The Event Object contains important information such as the type of event, the element that triggered it, mouse position, key pressed, etc. </a:t>
+            </a:r>
+          </a:p>
+          <a:p>
+            <a:r>
+              <a:rPr lang="en-US" dirty="0"/>
+              <a:t>Inline event handlers are possible, but not recommended (it’s more maintainable to keep everything in the JS file)</a:t>
+            </a:r>
+          </a:p>
+        </p:txBody>
+      </p:sp>
+      <p:pic>
+        <p:nvPicPr>
+          <p:cNvPr id="5" name="Picture 4">
+            <a:extLst>
+              <a:ext uri="{FF2B5EF4-FFF2-40B4-BE49-F238E27FC236}">
+                <a16:creationId xmlns:a16="http://schemas.microsoft.com/office/drawing/2014/main" id="{38390F3D-0F13-9495-88B1-D802025D1D68}"/>
+              </a:ext>
+            </a:extLst>
+          </p:cNvPr>
+          <p:cNvPicPr>
+            <a:picLocks noChangeAspect="1"/>
+          </p:cNvPicPr>
+          <p:nvPr/>
+        </p:nvPicPr>
+        <p:blipFill>
+          <a:blip r:embed="rId2"/>
+          <a:stretch>
+            <a:fillRect/>
+          </a:stretch>
+        </p:blipFill>
+        <p:spPr>
+          <a:xfrm>
+            <a:off x="6900531" y="2055543"/>
+            <a:ext cx="4548833" cy="2124388"/>
+          </a:xfrm>
+          <a:prstGeom prst="rect">
+            <a:avLst/>
+          </a:prstGeom>
+        </p:spPr>
+      </p:pic>
+      <p:pic>
+        <p:nvPicPr>
+          <p:cNvPr id="7" name="Picture 6">
+            <a:extLst>
+              <a:ext uri="{FF2B5EF4-FFF2-40B4-BE49-F238E27FC236}">
+                <a16:creationId xmlns:a16="http://schemas.microsoft.com/office/drawing/2014/main" id="{2DDC1236-E871-4265-B07D-2154E62EB705}"/>
+              </a:ext>
+            </a:extLst>
+          </p:cNvPr>
+          <p:cNvPicPr>
+            <a:picLocks noChangeAspect="1"/>
+          </p:cNvPicPr>
+          <p:nvPr/>
+        </p:nvPicPr>
+        <p:blipFill>
+          <a:blip r:embed="rId3"/>
+          <a:stretch>
+            <a:fillRect/>
+          </a:stretch>
+        </p:blipFill>
+        <p:spPr>
+          <a:xfrm>
+            <a:off x="5847907" y="4346340"/>
+            <a:ext cx="5601457" cy="900470"/>
+          </a:xfrm>
+          <a:prstGeom prst="rect">
+            <a:avLst/>
+          </a:prstGeom>
+        </p:spPr>
+      </p:pic>
+      <p:pic>
+        <p:nvPicPr>
+          <p:cNvPr id="9" name="Picture 8">
+            <a:extLst>
+              <a:ext uri="{FF2B5EF4-FFF2-40B4-BE49-F238E27FC236}">
+                <a16:creationId xmlns:a16="http://schemas.microsoft.com/office/drawing/2014/main" id="{E17B3C6D-84EF-5511-832B-13DBD02AE35D}"/>
+              </a:ext>
+            </a:extLst>
+          </p:cNvPr>
+          <p:cNvPicPr>
+            <a:picLocks noChangeAspect="1"/>
+          </p:cNvPicPr>
+          <p:nvPr/>
+        </p:nvPicPr>
+        <p:blipFill>
+          <a:blip r:embed="rId4"/>
+          <a:stretch>
+            <a:fillRect/>
+          </a:stretch>
+        </p:blipFill>
+        <p:spPr>
+          <a:xfrm>
+            <a:off x="5674111" y="5771742"/>
+            <a:ext cx="5775253" cy="384102"/>
+          </a:xfrm>
+          <a:prstGeom prst="rect">
+            <a:avLst/>
+          </a:prstGeom>
+        </p:spPr>
+      </p:pic>
+    </p:spTree>
+    <p:extLst>
+      <p:ext uri="{BB962C8B-B14F-4D97-AF65-F5344CB8AC3E}">
+        <p14:creationId xmlns:p14="http://schemas.microsoft.com/office/powerpoint/2010/main" val="1431315606"/>
+      </p:ext>
+    </p:extLst>
+  </p:cSld>
+  <p:clrMapOvr>
+    <a:masterClrMapping/>
+  </p:clrMapOvr>
+</p:sld>
+</file>
+
+<file path=ppt/slides/slide33.xml><?xml version="1.0" encoding="utf-8"?>
+<p:sld xmlns:a="http://schemas.openxmlformats.org/drawingml/2006/main" xmlns:r="http://schemas.openxmlformats.org/officeDocument/2006/relationships" xmlns:p="http://schemas.openxmlformats.org/presentationml/2006/main">
+  <p:cSld>
+    <p:spTree>
+      <p:nvGrpSpPr>
+        <p:cNvPr id="1" name=""/>
+        <p:cNvGrpSpPr/>
+        <p:nvPr/>
+      </p:nvGrpSpPr>
+      <p:grpSpPr>
+        <a:xfrm>
+          <a:off x="0" y="0"/>
+          <a:ext cx="0" cy="0"/>
+          <a:chOff x="0" y="0"/>
+          <a:chExt cx="0" cy="0"/>
+        </a:xfrm>
+      </p:grpSpPr>
+      <p:sp>
+        <p:nvSpPr>
+          <p:cNvPr id="2" name="Title 1">
+            <a:extLst>
+              <a:ext uri="{FF2B5EF4-FFF2-40B4-BE49-F238E27FC236}">
+                <a16:creationId xmlns:a16="http://schemas.microsoft.com/office/drawing/2014/main" id="{94B92DBF-8789-5020-1883-96773E46C960}"/>
+              </a:ext>
+            </a:extLst>
+          </p:cNvPr>
+          <p:cNvSpPr>
+            <a:spLocks noGrp="1"/>
+          </p:cNvSpPr>
+          <p:nvPr>
+            <p:ph type="title"/>
+          </p:nvPr>
+        </p:nvSpPr>
+        <p:spPr/>
+        <p:txBody>
+          <a:bodyPr/>
+          <a:lstStyle/>
+          <a:p>
+            <a:r>
+              <a:rPr lang="en-US" dirty="0"/>
+              <a:t>Event Propagation</a:t>
+            </a:r>
+          </a:p>
+        </p:txBody>
+      </p:sp>
+      <p:sp>
+        <p:nvSpPr>
+          <p:cNvPr id="3" name="Content Placeholder 2">
+            <a:extLst>
+              <a:ext uri="{FF2B5EF4-FFF2-40B4-BE49-F238E27FC236}">
+                <a16:creationId xmlns:a16="http://schemas.microsoft.com/office/drawing/2014/main" id="{13A16A45-943E-96D2-E0BD-4BECF42E8014}"/>
+              </a:ext>
+            </a:extLst>
+          </p:cNvPr>
+          <p:cNvSpPr>
+            <a:spLocks noGrp="1"/>
+          </p:cNvSpPr>
+          <p:nvPr>
+            <p:ph idx="1"/>
+          </p:nvPr>
+        </p:nvSpPr>
+        <p:spPr>
+          <a:xfrm>
+            <a:off x="581192" y="2180496"/>
+            <a:ext cx="5514808" cy="3975348"/>
+          </a:xfrm>
+        </p:spPr>
+        <p:txBody>
+          <a:bodyPr/>
+          <a:lstStyle/>
+          <a:p>
+            <a:r>
+              <a:rPr lang="en-US" dirty="0"/>
+              <a:t>When an event occurs, it goes through 3 phases</a:t>
+            </a:r>
+          </a:p>
+          <a:p>
+            <a:pPr lvl="1"/>
+            <a:r>
+              <a:rPr lang="en-US" dirty="0"/>
+              <a:t>First, the event starts at the root of the DOM (document) and traverses down to the element that triggered the event. This is called the Capturing Phase. </a:t>
+            </a:r>
+          </a:p>
+          <a:p>
+            <a:pPr lvl="1"/>
+            <a:r>
+              <a:rPr lang="en-US" dirty="0"/>
+              <a:t>Then, when at the element that triggered the event, we are in the Target Phase. </a:t>
+            </a:r>
+          </a:p>
+          <a:p>
+            <a:pPr lvl="1"/>
+            <a:r>
+              <a:rPr lang="en-US" dirty="0"/>
+              <a:t>Finally, the event moves back up the DOM towards the root, this is the Bubbling Phase. </a:t>
+            </a:r>
+          </a:p>
+          <a:p>
+            <a:r>
+              <a:rPr lang="en-US" dirty="0"/>
+              <a:t>Our event listeners operate during the bubbling phase by default</a:t>
+            </a:r>
+          </a:p>
+        </p:txBody>
+      </p:sp>
+      <p:pic>
+        <p:nvPicPr>
+          <p:cNvPr id="5" name="Picture 4">
+            <a:extLst>
+              <a:ext uri="{FF2B5EF4-FFF2-40B4-BE49-F238E27FC236}">
+                <a16:creationId xmlns:a16="http://schemas.microsoft.com/office/drawing/2014/main" id="{B575181E-8D5D-C682-D1B6-99966405D02E}"/>
+              </a:ext>
+            </a:extLst>
+          </p:cNvPr>
+          <p:cNvPicPr>
+            <a:picLocks noChangeAspect="1"/>
+          </p:cNvPicPr>
+          <p:nvPr/>
+        </p:nvPicPr>
+        <p:blipFill>
+          <a:blip r:embed="rId2"/>
+          <a:stretch>
+            <a:fillRect/>
+          </a:stretch>
+        </p:blipFill>
+        <p:spPr>
+          <a:xfrm>
+            <a:off x="6337005" y="2531658"/>
+            <a:ext cx="4783787" cy="3136797"/>
+          </a:xfrm>
+          <a:prstGeom prst="rect">
+            <a:avLst/>
+          </a:prstGeom>
+        </p:spPr>
+      </p:pic>
+    </p:spTree>
+    <p:extLst>
+      <p:ext uri="{BB962C8B-B14F-4D97-AF65-F5344CB8AC3E}">
+        <p14:creationId xmlns:p14="http://schemas.microsoft.com/office/powerpoint/2010/main" val="989134354"/>
+      </p:ext>
+    </p:extLst>
+  </p:cSld>
+  <p:clrMapOvr>
+    <a:masterClrMapping/>
+  </p:clrMapOvr>
+</p:sld>
+</file>
+
+<file path=ppt/slides/slide34.xml><?xml version="1.0" encoding="utf-8"?>
+<p:sld xmlns:a="http://schemas.openxmlformats.org/drawingml/2006/main" xmlns:r="http://schemas.openxmlformats.org/officeDocument/2006/relationships" xmlns:p="http://schemas.openxmlformats.org/presentationml/2006/main">
+  <p:cSld>
+    <p:spTree>
+      <p:nvGrpSpPr>
+        <p:cNvPr id="1" name=""/>
+        <p:cNvGrpSpPr/>
+        <p:nvPr/>
+      </p:nvGrpSpPr>
+      <p:grpSpPr>
+        <a:xfrm>
+          <a:off x="0" y="0"/>
+          <a:ext cx="0" cy="0"/>
+          <a:chOff x="0" y="0"/>
+          <a:chExt cx="0" cy="0"/>
+        </a:xfrm>
+      </p:grpSpPr>
+      <p:sp>
+        <p:nvSpPr>
+          <p:cNvPr id="2" name="Title 1">
+            <a:extLst>
+              <a:ext uri="{FF2B5EF4-FFF2-40B4-BE49-F238E27FC236}">
+                <a16:creationId xmlns:a16="http://schemas.microsoft.com/office/drawing/2014/main" id="{ADCDD121-F802-F8FA-16F3-F5422EEEC5D0}"/>
+              </a:ext>
+            </a:extLst>
+          </p:cNvPr>
+          <p:cNvSpPr>
+            <a:spLocks noGrp="1"/>
+          </p:cNvSpPr>
+          <p:nvPr>
+            <p:ph type="title"/>
+          </p:nvPr>
+        </p:nvSpPr>
+        <p:spPr/>
+        <p:txBody>
+          <a:bodyPr/>
+          <a:lstStyle/>
+          <a:p>
+            <a:r>
+              <a:rPr lang="en-US" dirty="0"/>
+              <a:t>Event Propagation – What is the output?</a:t>
+            </a:r>
+          </a:p>
+        </p:txBody>
+      </p:sp>
+      <p:pic>
+        <p:nvPicPr>
+          <p:cNvPr id="7" name="Picture 6">
+            <a:extLst>
+              <a:ext uri="{FF2B5EF4-FFF2-40B4-BE49-F238E27FC236}">
+                <a16:creationId xmlns:a16="http://schemas.microsoft.com/office/drawing/2014/main" id="{9ACFAEBC-6283-D0C2-A57B-D2D275A800C7}"/>
+              </a:ext>
+            </a:extLst>
+          </p:cNvPr>
+          <p:cNvPicPr>
+            <a:picLocks noChangeAspect="1"/>
+          </p:cNvPicPr>
+          <p:nvPr/>
+        </p:nvPicPr>
+        <p:blipFill>
+          <a:blip r:embed="rId2"/>
+          <a:stretch>
+            <a:fillRect/>
+          </a:stretch>
+        </p:blipFill>
+        <p:spPr>
+          <a:xfrm>
+            <a:off x="581192" y="3528155"/>
+            <a:ext cx="5409952" cy="1343410"/>
+          </a:xfrm>
+          <a:prstGeom prst="rect">
+            <a:avLst/>
+          </a:prstGeom>
+        </p:spPr>
+      </p:pic>
+      <p:pic>
+        <p:nvPicPr>
+          <p:cNvPr id="9" name="Picture 8">
+            <a:extLst>
+              <a:ext uri="{FF2B5EF4-FFF2-40B4-BE49-F238E27FC236}">
+                <a16:creationId xmlns:a16="http://schemas.microsoft.com/office/drawing/2014/main" id="{BD0E802A-2775-62B3-1264-01639CDA4AC0}"/>
+              </a:ext>
+            </a:extLst>
+          </p:cNvPr>
+          <p:cNvPicPr>
+            <a:picLocks noChangeAspect="1"/>
+          </p:cNvPicPr>
+          <p:nvPr/>
+        </p:nvPicPr>
+        <p:blipFill>
+          <a:blip r:embed="rId3"/>
+          <a:stretch>
+            <a:fillRect/>
+          </a:stretch>
+        </p:blipFill>
+        <p:spPr>
+          <a:xfrm>
+            <a:off x="6868633" y="2197992"/>
+            <a:ext cx="3996607" cy="4277617"/>
+          </a:xfrm>
+          <a:prstGeom prst="rect">
+            <a:avLst/>
+          </a:prstGeom>
+        </p:spPr>
+      </p:pic>
+    </p:spTree>
+    <p:extLst>
+      <p:ext uri="{BB962C8B-B14F-4D97-AF65-F5344CB8AC3E}">
+        <p14:creationId xmlns:p14="http://schemas.microsoft.com/office/powerpoint/2010/main" val="429046973"/>
+      </p:ext>
+    </p:extLst>
+  </p:cSld>
+  <p:clrMapOvr>
+    <a:masterClrMapping/>
+  </p:clrMapOvr>
+</p:sld>
+</file>
+
+<file path=ppt/slides/slide35.xml><?xml version="1.0" encoding="utf-8"?>
+<p:sld xmlns:a="http://schemas.openxmlformats.org/drawingml/2006/main" xmlns:r="http://schemas.openxmlformats.org/officeDocument/2006/relationships" xmlns:p="http://schemas.openxmlformats.org/presentationml/2006/main">
+  <p:cSld>
+    <p:spTree>
+      <p:nvGrpSpPr>
+        <p:cNvPr id="1" name=""/>
+        <p:cNvGrpSpPr/>
+        <p:nvPr/>
+      </p:nvGrpSpPr>
+      <p:grpSpPr>
+        <a:xfrm>
+          <a:off x="0" y="0"/>
+          <a:ext cx="0" cy="0"/>
+          <a:chOff x="0" y="0"/>
+          <a:chExt cx="0" cy="0"/>
+        </a:xfrm>
+      </p:grpSpPr>
+      <p:sp>
+        <p:nvSpPr>
+          <p:cNvPr id="2" name="Title 1">
+            <a:extLst>
+              <a:ext uri="{FF2B5EF4-FFF2-40B4-BE49-F238E27FC236}">
+                <a16:creationId xmlns:a16="http://schemas.microsoft.com/office/drawing/2014/main" id="{F0DA66E6-BF3D-ED6C-DF50-73A27288FB5A}"/>
+              </a:ext>
+            </a:extLst>
+          </p:cNvPr>
+          <p:cNvSpPr>
+            <a:spLocks noGrp="1"/>
+          </p:cNvSpPr>
+          <p:nvPr>
+            <p:ph type="title"/>
+          </p:nvPr>
+        </p:nvSpPr>
+        <p:spPr/>
+        <p:txBody>
+          <a:bodyPr/>
+          <a:lstStyle/>
+          <a:p>
+            <a:r>
+              <a:rPr lang="en-US" dirty="0"/>
+              <a:t>Stopping Events</a:t>
+            </a:r>
+          </a:p>
+        </p:txBody>
+      </p:sp>
+      <p:sp>
+        <p:nvSpPr>
+          <p:cNvPr id="3" name="Content Placeholder 2">
+            <a:extLst>
+              <a:ext uri="{FF2B5EF4-FFF2-40B4-BE49-F238E27FC236}">
+                <a16:creationId xmlns:a16="http://schemas.microsoft.com/office/drawing/2014/main" id="{3411AFF2-FF18-6E75-E730-7346CCD80CC5}"/>
+              </a:ext>
+            </a:extLst>
+          </p:cNvPr>
+          <p:cNvSpPr>
+            <a:spLocks noGrp="1"/>
+          </p:cNvSpPr>
+          <p:nvPr>
+            <p:ph idx="1"/>
+          </p:nvPr>
+        </p:nvSpPr>
+        <p:spPr>
+          <a:xfrm>
+            <a:off x="581193" y="2180496"/>
+            <a:ext cx="5514807" cy="3678303"/>
+          </a:xfrm>
+        </p:spPr>
+        <p:txBody>
+          <a:bodyPr/>
+          <a:lstStyle/>
+          <a:p>
+            <a:r>
+              <a:rPr lang="en-US" dirty="0" err="1"/>
+              <a:t>event.stopPropagation</a:t>
+            </a:r>
+            <a:r>
+              <a:rPr lang="en-US" dirty="0"/>
+              <a:t>() – stops the event from continuing further (either in bubbling or capturing)</a:t>
+            </a:r>
+          </a:p>
+          <a:p>
+            <a:r>
+              <a:rPr lang="en-US" dirty="0" err="1"/>
+              <a:t>event.stopImmediatePropagation</a:t>
+            </a:r>
+            <a:r>
+              <a:rPr lang="en-US" dirty="0"/>
+              <a:t>() – also stops other listeners on the same element</a:t>
+            </a:r>
+          </a:p>
+          <a:p>
+            <a:r>
+              <a:rPr lang="en-US" dirty="0" err="1"/>
+              <a:t>event.preventDefault</a:t>
+            </a:r>
+            <a:r>
+              <a:rPr lang="en-US" dirty="0"/>
+              <a:t>() – prevents the default action (like following a link or submitting a form)</a:t>
+            </a:r>
+          </a:p>
+        </p:txBody>
+      </p:sp>
+      <p:pic>
+        <p:nvPicPr>
+          <p:cNvPr id="5" name="Picture 4">
+            <a:extLst>
+              <a:ext uri="{FF2B5EF4-FFF2-40B4-BE49-F238E27FC236}">
+                <a16:creationId xmlns:a16="http://schemas.microsoft.com/office/drawing/2014/main" id="{F7B77554-805F-613A-01F9-022C9C297C1B}"/>
+              </a:ext>
+            </a:extLst>
+          </p:cNvPr>
+          <p:cNvPicPr>
+            <a:picLocks noChangeAspect="1"/>
+          </p:cNvPicPr>
+          <p:nvPr/>
+        </p:nvPicPr>
+        <p:blipFill>
+          <a:blip r:embed="rId2"/>
+          <a:stretch>
+            <a:fillRect/>
+          </a:stretch>
+        </p:blipFill>
+        <p:spPr>
+          <a:xfrm>
+            <a:off x="6453963" y="2046068"/>
+            <a:ext cx="4618668" cy="4266099"/>
+          </a:xfrm>
+          <a:prstGeom prst="rect">
+            <a:avLst/>
+          </a:prstGeom>
+        </p:spPr>
+      </p:pic>
+      <p:sp>
+        <p:nvSpPr>
+          <p:cNvPr id="6" name="TextBox 5">
+            <a:extLst>
+              <a:ext uri="{FF2B5EF4-FFF2-40B4-BE49-F238E27FC236}">
+                <a16:creationId xmlns:a16="http://schemas.microsoft.com/office/drawing/2014/main" id="{684C0131-7D3D-BD4C-DC2E-1DD74AF6AB9E}"/>
+              </a:ext>
+            </a:extLst>
+          </p:cNvPr>
+          <p:cNvSpPr txBox="1"/>
+          <p:nvPr/>
+        </p:nvSpPr>
+        <p:spPr>
+          <a:xfrm>
+            <a:off x="436199" y="5786512"/>
+            <a:ext cx="5804794" cy="369332"/>
+          </a:xfrm>
+          <a:prstGeom prst="rect">
+            <a:avLst/>
+          </a:prstGeom>
+          <a:noFill/>
+        </p:spPr>
+        <p:txBody>
+          <a:bodyPr wrap="none" rtlCol="0">
+            <a:spAutoFit/>
+          </a:bodyPr>
+          <a:lstStyle/>
+          <a:p>
+            <a:r>
+              <a:rPr lang="en-US" dirty="0"/>
+              <a:t>What is the expected output when a user clicks the button?</a:t>
+            </a:r>
+          </a:p>
+        </p:txBody>
+      </p:sp>
+    </p:spTree>
+    <p:extLst>
+      <p:ext uri="{BB962C8B-B14F-4D97-AF65-F5344CB8AC3E}">
+        <p14:creationId xmlns:p14="http://schemas.microsoft.com/office/powerpoint/2010/main" val="3155899932"/>
+      </p:ext>
+    </p:extLst>
+  </p:cSld>
+  <p:clrMapOvr>
+    <a:masterClrMapping/>
+  </p:clrMapOvr>
+</p:sld>
+</file>
+
+<file path=ppt/slides/slide36.xml><?xml version="1.0" encoding="utf-8"?>
+<p:sld xmlns:a="http://schemas.openxmlformats.org/drawingml/2006/main" xmlns:r="http://schemas.openxmlformats.org/officeDocument/2006/relationships" xmlns:p="http://schemas.openxmlformats.org/presentationml/2006/main">
+  <p:cSld>
+    <p:spTree>
+      <p:nvGrpSpPr>
+        <p:cNvPr id="1" name=""/>
+        <p:cNvGrpSpPr/>
+        <p:nvPr/>
+      </p:nvGrpSpPr>
+      <p:grpSpPr>
+        <a:xfrm>
+          <a:off x="0" y="0"/>
+          <a:ext cx="0" cy="0"/>
+          <a:chOff x="0" y="0"/>
+          <a:chExt cx="0" cy="0"/>
+        </a:xfrm>
+      </p:grpSpPr>
+      <p:sp>
+        <p:nvSpPr>
+          <p:cNvPr id="2" name="Title 1">
+            <a:extLst>
+              <a:ext uri="{FF2B5EF4-FFF2-40B4-BE49-F238E27FC236}">
+                <a16:creationId xmlns:a16="http://schemas.microsoft.com/office/drawing/2014/main" id="{CC966DBC-8FD9-BF6A-F9EB-3526AEC5A09A}"/>
+              </a:ext>
+            </a:extLst>
+          </p:cNvPr>
+          <p:cNvSpPr>
+            <a:spLocks noGrp="1"/>
+          </p:cNvSpPr>
+          <p:nvPr>
+            <p:ph type="title"/>
+          </p:nvPr>
+        </p:nvSpPr>
+        <p:spPr/>
+        <p:txBody>
+          <a:bodyPr/>
+          <a:lstStyle/>
+          <a:p>
+            <a:r>
+              <a:rPr lang="en-US" dirty="0" err="1"/>
+              <a:t>preventDefault</a:t>
+            </a:r>
+            <a:r>
+              <a:rPr lang="en-US" dirty="0"/>
+              <a:t>()</a:t>
+            </a:r>
+          </a:p>
+        </p:txBody>
+      </p:sp>
+      <p:pic>
+        <p:nvPicPr>
+          <p:cNvPr id="5" name="Picture 4">
+            <a:extLst>
+              <a:ext uri="{FF2B5EF4-FFF2-40B4-BE49-F238E27FC236}">
+                <a16:creationId xmlns:a16="http://schemas.microsoft.com/office/drawing/2014/main" id="{F3525372-A439-EC13-02BA-2D663E517848}"/>
+              </a:ext>
+            </a:extLst>
+          </p:cNvPr>
+          <p:cNvPicPr>
+            <a:picLocks noChangeAspect="1"/>
+          </p:cNvPicPr>
+          <p:nvPr/>
+        </p:nvPicPr>
+        <p:blipFill>
+          <a:blip r:embed="rId2"/>
+          <a:stretch>
+            <a:fillRect/>
+          </a:stretch>
+        </p:blipFill>
+        <p:spPr>
+          <a:xfrm>
+            <a:off x="2355405" y="2515484"/>
+            <a:ext cx="7481190" cy="3300525"/>
+          </a:xfrm>
+          <a:prstGeom prst="rect">
+            <a:avLst/>
+          </a:prstGeom>
+        </p:spPr>
+      </p:pic>
+    </p:spTree>
+    <p:extLst>
+      <p:ext uri="{BB962C8B-B14F-4D97-AF65-F5344CB8AC3E}">
+        <p14:creationId xmlns:p14="http://schemas.microsoft.com/office/powerpoint/2010/main" val="2139381021"/>
+      </p:ext>
+    </p:extLst>
+  </p:cSld>
+  <p:clrMapOvr>
+    <a:masterClrMapping/>
+  </p:clrMapOvr>
+</p:sld>
+</file>
+
+<file path=ppt/slides/slide37.xml><?xml version="1.0" encoding="utf-8"?>
+<p:sld xmlns:a="http://schemas.openxmlformats.org/drawingml/2006/main" xmlns:r="http://schemas.openxmlformats.org/officeDocument/2006/relationships" xmlns:p="http://schemas.openxmlformats.org/presentationml/2006/main">
+  <p:cSld>
+    <p:spTree>
+      <p:nvGrpSpPr>
+        <p:cNvPr id="1" name="">
+          <a:extLst>
+            <a:ext uri="{FF2B5EF4-FFF2-40B4-BE49-F238E27FC236}">
+              <a16:creationId xmlns:a16="http://schemas.microsoft.com/office/drawing/2014/main" id="{BD45F381-3DD9-EAE5-F285-222F7C7FD329}"/>
+            </a:ext>
+          </a:extLst>
+        </p:cNvPr>
+        <p:cNvGrpSpPr/>
+        <p:nvPr/>
+      </p:nvGrpSpPr>
+      <p:grpSpPr>
+        <a:xfrm>
+          <a:off x="0" y="0"/>
+          <a:ext cx="0" cy="0"/>
+          <a:chOff x="0" y="0"/>
+          <a:chExt cx="0" cy="0"/>
+        </a:xfrm>
+      </p:grpSpPr>
+      <p:sp>
+        <p:nvSpPr>
+          <p:cNvPr id="2" name="Title 1">
+            <a:extLst>
+              <a:ext uri="{FF2B5EF4-FFF2-40B4-BE49-F238E27FC236}">
+                <a16:creationId xmlns:a16="http://schemas.microsoft.com/office/drawing/2014/main" id="{A7021044-EE2D-B9EC-073E-BB1820FC51AB}"/>
+              </a:ext>
+            </a:extLst>
+          </p:cNvPr>
+          <p:cNvSpPr>
+            <a:spLocks noGrp="1"/>
+          </p:cNvSpPr>
+          <p:nvPr>
+            <p:ph type="title"/>
+          </p:nvPr>
+        </p:nvSpPr>
+        <p:spPr/>
+        <p:txBody>
+          <a:bodyPr/>
+          <a:lstStyle/>
+          <a:p>
+            <a:r>
+              <a:rPr lang="en-US" dirty="0"/>
+              <a:t>Challenge – Make a Module</a:t>
+            </a:r>
+          </a:p>
+        </p:txBody>
+      </p:sp>
+      <p:sp>
+        <p:nvSpPr>
+          <p:cNvPr id="3" name="Content Placeholder 2">
+            <a:extLst>
+              <a:ext uri="{FF2B5EF4-FFF2-40B4-BE49-F238E27FC236}">
+                <a16:creationId xmlns:a16="http://schemas.microsoft.com/office/drawing/2014/main" id="{70DAA92D-2DBB-CF03-B414-E79A73CD533F}"/>
+              </a:ext>
+            </a:extLst>
+          </p:cNvPr>
+          <p:cNvSpPr>
+            <a:spLocks noGrp="1"/>
+          </p:cNvSpPr>
+          <p:nvPr>
+            <p:ph idx="1"/>
+          </p:nvPr>
+        </p:nvSpPr>
+        <p:spPr>
+          <a:xfrm>
+            <a:off x="581192" y="2475925"/>
+            <a:ext cx="5317584" cy="1681246"/>
+          </a:xfrm>
+        </p:spPr>
+        <p:txBody>
+          <a:bodyPr/>
+          <a:lstStyle/>
+          <a:p>
+            <a:r>
+              <a:rPr lang="en-US" dirty="0"/>
+              <a:t>Create a JavaScript module that has a function called from a button click</a:t>
+            </a:r>
+          </a:p>
+        </p:txBody>
+      </p:sp>
+      <p:sp>
+        <p:nvSpPr>
+          <p:cNvPr id="6" name="TextBox 5">
+            <a:extLst>
+              <a:ext uri="{FF2B5EF4-FFF2-40B4-BE49-F238E27FC236}">
+                <a16:creationId xmlns:a16="http://schemas.microsoft.com/office/drawing/2014/main" id="{4F240662-D6D0-B9E8-C238-CCB43E471B51}"/>
+              </a:ext>
+            </a:extLst>
+          </p:cNvPr>
+          <p:cNvSpPr txBox="1"/>
+          <p:nvPr/>
+        </p:nvSpPr>
+        <p:spPr>
+          <a:xfrm>
+            <a:off x="1228165" y="2402747"/>
+            <a:ext cx="756938" cy="369332"/>
+          </a:xfrm>
+          <a:prstGeom prst="rect">
+            <a:avLst/>
+          </a:prstGeom>
+          <a:noFill/>
+        </p:spPr>
+        <p:txBody>
+          <a:bodyPr wrap="none" rtlCol="0">
+            <a:spAutoFit/>
+          </a:bodyPr>
+          <a:lstStyle/>
+          <a:p>
+            <a:r>
+              <a:rPr lang="en-US" b="1" dirty="0"/>
+              <a:t>Goal:</a:t>
+            </a:r>
+          </a:p>
+        </p:txBody>
+      </p:sp>
+      <p:sp>
+        <p:nvSpPr>
+          <p:cNvPr id="7" name="TextBox 6">
+            <a:extLst>
+              <a:ext uri="{FF2B5EF4-FFF2-40B4-BE49-F238E27FC236}">
+                <a16:creationId xmlns:a16="http://schemas.microsoft.com/office/drawing/2014/main" id="{392E0DCA-1144-1DE9-EF1D-223EF05693E5}"/>
+              </a:ext>
+            </a:extLst>
+          </p:cNvPr>
+          <p:cNvSpPr txBox="1"/>
+          <p:nvPr/>
+        </p:nvSpPr>
+        <p:spPr>
+          <a:xfrm>
+            <a:off x="6714565" y="2402747"/>
+            <a:ext cx="4896243" cy="369332"/>
+          </a:xfrm>
+          <a:prstGeom prst="rect">
+            <a:avLst/>
+          </a:prstGeom>
+          <a:noFill/>
+        </p:spPr>
+        <p:txBody>
+          <a:bodyPr wrap="square" rtlCol="0">
+            <a:spAutoFit/>
+          </a:bodyPr>
+          <a:lstStyle/>
+          <a:p>
+            <a:r>
+              <a:rPr lang="en-US" b="1" dirty="0"/>
+              <a:t>Scenario:  			   20 min</a:t>
+            </a:r>
+          </a:p>
+        </p:txBody>
+      </p:sp>
+      <p:sp>
+        <p:nvSpPr>
+          <p:cNvPr id="8" name="Content Placeholder 2">
+            <a:extLst>
+              <a:ext uri="{FF2B5EF4-FFF2-40B4-BE49-F238E27FC236}">
+                <a16:creationId xmlns:a16="http://schemas.microsoft.com/office/drawing/2014/main" id="{916EA046-C7C7-02AD-FD5B-9549A6D716E1}"/>
+              </a:ext>
+            </a:extLst>
+          </p:cNvPr>
+          <p:cNvSpPr txBox="1">
+            <a:spLocks/>
+          </p:cNvSpPr>
+          <p:nvPr/>
+        </p:nvSpPr>
+        <p:spPr>
+          <a:xfrm>
+            <a:off x="6545749" y="2475925"/>
+            <a:ext cx="4661642" cy="3054980"/>
+          </a:xfrm>
+          <a:prstGeom prst="rect">
+            <a:avLst/>
+          </a:prstGeom>
+        </p:spPr>
+        <p:txBody>
+          <a:bodyPr vert="horz" lIns="91440" tIns="45720" rIns="91440" bIns="45720" rtlCol="0" anchor="ctr">
+            <a:normAutofit/>
+          </a:bodyPr>
+          <a:lstStyle>
+            <a:lvl1pPr marL="306000" indent="-306000" algn="l" defTabSz="457200" rtl="0" eaLnBrk="1" latinLnBrk="0" hangingPunct="1">
+              <a:spcBef>
+                <a:spcPct val="20000"/>
+              </a:spcBef>
+              <a:spcAft>
+                <a:spcPts val="600"/>
+              </a:spcAft>
+              <a:buClr>
+                <a:schemeClr val="accent2"/>
+              </a:buClr>
+              <a:buSzPct val="92000"/>
+              <a:buFont typeface="Wingdings 2" panose="05020102010507070707" pitchFamily="18" charset="2"/>
+              <a:buChar char=""/>
+              <a:defRPr sz="1800" kern="1200">
+                <a:solidFill>
+                  <a:schemeClr val="tx2"/>
+                </a:solidFill>
+                <a:latin typeface="+mn-lt"/>
+                <a:ea typeface="+mn-ea"/>
+                <a:cs typeface="+mn-cs"/>
+              </a:defRPr>
+            </a:lvl1pPr>
+            <a:lvl2pPr marL="630000" indent="-306000" algn="l" defTabSz="457200" rtl="0" eaLnBrk="1" latinLnBrk="0" hangingPunct="1">
+              <a:spcBef>
+                <a:spcPct val="20000"/>
+              </a:spcBef>
+              <a:spcAft>
+                <a:spcPts val="600"/>
+              </a:spcAft>
+              <a:buClr>
+                <a:schemeClr val="accent2"/>
+              </a:buClr>
+              <a:buSzPct val="92000"/>
+              <a:buFont typeface="Wingdings 2" panose="05020102010507070707" pitchFamily="18" charset="2"/>
+              <a:buChar char=""/>
+              <a:defRPr sz="1600" kern="1200">
+                <a:solidFill>
+                  <a:schemeClr val="tx2"/>
+                </a:solidFill>
+                <a:latin typeface="+mn-lt"/>
+                <a:ea typeface="+mn-ea"/>
+                <a:cs typeface="+mn-cs"/>
+              </a:defRPr>
+            </a:lvl2pPr>
+            <a:lvl3pPr marL="900000" indent="-270000" algn="l" defTabSz="457200" rtl="0" eaLnBrk="1" latinLnBrk="0" hangingPunct="1">
+              <a:spcBef>
+                <a:spcPct val="20000"/>
+              </a:spcBef>
+              <a:spcAft>
+                <a:spcPts val="600"/>
+              </a:spcAft>
+              <a:buClr>
+                <a:schemeClr val="accent2"/>
+              </a:buClr>
+              <a:buSzPct val="92000"/>
+              <a:buFont typeface="Wingdings 2" panose="05020102010507070707" pitchFamily="18" charset="2"/>
+              <a:buChar char=""/>
+              <a:defRPr sz="1400" kern="1200">
+                <a:solidFill>
+                  <a:schemeClr val="tx2"/>
+                </a:solidFill>
+                <a:latin typeface="+mn-lt"/>
+                <a:ea typeface="+mn-ea"/>
+                <a:cs typeface="+mn-cs"/>
+              </a:defRPr>
+            </a:lvl3pPr>
+            <a:lvl4pPr marL="1242000" indent="-234000" algn="l" defTabSz="457200" rtl="0" eaLnBrk="1" latinLnBrk="0" hangingPunct="1">
+              <a:spcBef>
+                <a:spcPct val="20000"/>
+              </a:spcBef>
+              <a:spcAft>
+                <a:spcPts val="600"/>
+              </a:spcAft>
+              <a:buClr>
+                <a:schemeClr val="accent2"/>
+              </a:buClr>
+              <a:buSzPct val="92000"/>
+              <a:buFont typeface="Wingdings 2" panose="05020102010507070707" pitchFamily="18" charset="2"/>
+              <a:buChar char=""/>
+              <a:defRPr sz="1200" kern="1200">
+                <a:solidFill>
+                  <a:schemeClr val="tx2"/>
+                </a:solidFill>
+                <a:latin typeface="+mn-lt"/>
+                <a:ea typeface="+mn-ea"/>
+                <a:cs typeface="+mn-cs"/>
+              </a:defRPr>
+            </a:lvl4pPr>
+            <a:lvl5pPr marL="1602000" indent="-234000" algn="l" defTabSz="457200" rtl="0" eaLnBrk="1" latinLnBrk="0" hangingPunct="1">
+              <a:spcBef>
+                <a:spcPct val="20000"/>
+              </a:spcBef>
+              <a:spcAft>
+                <a:spcPts val="600"/>
+              </a:spcAft>
+              <a:buClr>
+                <a:schemeClr val="accent2"/>
+              </a:buClr>
+              <a:buSzPct val="92000"/>
+              <a:buFont typeface="Wingdings 2" panose="05020102010507070707" pitchFamily="18" charset="2"/>
+              <a:buChar char=""/>
+              <a:defRPr sz="1200" kern="1200">
+                <a:solidFill>
+                  <a:schemeClr val="tx2"/>
+                </a:solidFill>
+                <a:latin typeface="+mn-lt"/>
+                <a:ea typeface="+mn-ea"/>
+                <a:cs typeface="+mn-cs"/>
+              </a:defRPr>
+            </a:lvl5pPr>
+            <a:lvl6pPr marL="1900000" indent="-228600" algn="l" defTabSz="457200" rtl="0" eaLnBrk="1" latinLnBrk="0" hangingPunct="1">
+              <a:spcBef>
+                <a:spcPct val="20000"/>
+              </a:spcBef>
+              <a:spcAft>
+                <a:spcPts val="600"/>
+              </a:spcAft>
+              <a:buClr>
+                <a:schemeClr val="accent2"/>
+              </a:buClr>
+              <a:buSzPct val="92000"/>
+              <a:buFont typeface="Wingdings 2" panose="05020102010507070707" pitchFamily="18" charset="2"/>
+              <a:buChar char=""/>
+              <a:defRPr sz="1200" kern="1200">
+                <a:solidFill>
+                  <a:schemeClr val="tx2"/>
+                </a:solidFill>
+                <a:latin typeface="+mn-lt"/>
+                <a:ea typeface="+mn-ea"/>
+                <a:cs typeface="+mn-cs"/>
+              </a:defRPr>
+            </a:lvl6pPr>
+            <a:lvl7pPr marL="2200000" indent="-228600" algn="l" defTabSz="457200" rtl="0" eaLnBrk="1" latinLnBrk="0" hangingPunct="1">
+              <a:spcBef>
+                <a:spcPct val="20000"/>
+              </a:spcBef>
+              <a:spcAft>
+                <a:spcPts val="600"/>
+              </a:spcAft>
+              <a:buClr>
+                <a:schemeClr val="accent2"/>
+              </a:buClr>
+              <a:buSzPct val="92000"/>
+              <a:buFont typeface="Wingdings 2" panose="05020102010507070707" pitchFamily="18" charset="2"/>
+              <a:buChar char=""/>
+              <a:defRPr sz="1200" kern="1200">
+                <a:solidFill>
+                  <a:schemeClr val="tx2"/>
+                </a:solidFill>
+                <a:latin typeface="+mn-lt"/>
+                <a:ea typeface="+mn-ea"/>
+                <a:cs typeface="+mn-cs"/>
+              </a:defRPr>
+            </a:lvl7pPr>
+            <a:lvl8pPr marL="2500000" indent="-228600" algn="l" defTabSz="457200" rtl="0" eaLnBrk="1" latinLnBrk="0" hangingPunct="1">
+              <a:spcBef>
+                <a:spcPct val="20000"/>
+              </a:spcBef>
+              <a:spcAft>
+                <a:spcPts val="600"/>
+              </a:spcAft>
+              <a:buClr>
+                <a:schemeClr val="accent2"/>
+              </a:buClr>
+              <a:buSzPct val="92000"/>
+              <a:buFont typeface="Wingdings 2" panose="05020102010507070707" pitchFamily="18" charset="2"/>
+              <a:buChar char=""/>
+              <a:defRPr sz="1200" kern="1200">
+                <a:solidFill>
+                  <a:schemeClr val="tx2"/>
+                </a:solidFill>
+                <a:latin typeface="+mn-lt"/>
+                <a:ea typeface="+mn-ea"/>
+                <a:cs typeface="+mn-cs"/>
+              </a:defRPr>
+            </a:lvl8pPr>
+            <a:lvl9pPr marL="2800000" indent="-228600" algn="l" defTabSz="457200" rtl="0" eaLnBrk="1" latinLnBrk="0" hangingPunct="1">
+              <a:spcBef>
+                <a:spcPct val="20000"/>
+              </a:spcBef>
+              <a:spcAft>
+                <a:spcPts val="600"/>
+              </a:spcAft>
+              <a:buClr>
+                <a:schemeClr val="accent2"/>
+              </a:buClr>
+              <a:buSzPct val="92000"/>
+              <a:buFont typeface="Wingdings 2" panose="05020102010507070707" pitchFamily="18" charset="2"/>
+              <a:buChar char=""/>
+              <a:defRPr sz="1200" kern="1200">
+                <a:solidFill>
+                  <a:schemeClr val="tx2"/>
+                </a:solidFill>
+                <a:latin typeface="+mn-lt"/>
+                <a:ea typeface="+mn-ea"/>
+                <a:cs typeface="+mn-cs"/>
+              </a:defRPr>
+            </a:lvl9pPr>
+          </a:lstStyle>
+          <a:p>
+            <a:r>
+              <a:rPr lang="en-US" dirty="0"/>
+              <a:t>Your organization needs you to continue work on the product launch page. </a:t>
+            </a:r>
+          </a:p>
+          <a:p>
+            <a:r>
+              <a:rPr lang="en-US" dirty="0"/>
+              <a:t>Create a JavaScript module that returns the current date formatted as ‘YYYY-MM-DD’</a:t>
+            </a:r>
+          </a:p>
+          <a:p>
+            <a:r>
+              <a:rPr lang="en-US" dirty="0"/>
+              <a:t>Call this method and print the results to the console whenever a button is clicked </a:t>
+            </a:r>
+          </a:p>
+        </p:txBody>
+      </p:sp>
+    </p:spTree>
+    <p:extLst>
+      <p:ext uri="{BB962C8B-B14F-4D97-AF65-F5344CB8AC3E}">
+        <p14:creationId xmlns:p14="http://schemas.microsoft.com/office/powerpoint/2010/main" val="3076854592"/>
+      </p:ext>
+    </p:extLst>
+  </p:cSld>
+  <p:clrMapOvr>
+    <a:masterClrMapping/>
+  </p:clrMapOvr>
+</p:sld>
+</file>
+
+<file path=ppt/slides/slide38.xml><?xml version="1.0" encoding="utf-8"?>
+<p:sld xmlns:a="http://schemas.openxmlformats.org/drawingml/2006/main" xmlns:r="http://schemas.openxmlformats.org/officeDocument/2006/relationships" xmlns:p="http://schemas.openxmlformats.org/presentationml/2006/main">
+  <p:cSld>
+    <p:spTree>
+      <p:nvGrpSpPr>
+        <p:cNvPr id="1" name=""/>
+        <p:cNvGrpSpPr/>
+        <p:nvPr/>
+      </p:nvGrpSpPr>
+      <p:grpSpPr>
+        <a:xfrm>
+          <a:off x="0" y="0"/>
+          <a:ext cx="0" cy="0"/>
+          <a:chOff x="0" y="0"/>
+          <a:chExt cx="0" cy="0"/>
+        </a:xfrm>
+      </p:grpSpPr>
+      <p:sp>
+        <p:nvSpPr>
+          <p:cNvPr id="2" name="Title 1">
+            <a:extLst>
+              <a:ext uri="{FF2B5EF4-FFF2-40B4-BE49-F238E27FC236}">
+                <a16:creationId xmlns:a16="http://schemas.microsoft.com/office/drawing/2014/main" id="{725691BE-4CD9-6E37-B75B-23ED258289CD}"/>
+              </a:ext>
+            </a:extLst>
+          </p:cNvPr>
+          <p:cNvSpPr>
+            <a:spLocks noGrp="1"/>
+          </p:cNvSpPr>
+          <p:nvPr>
+            <p:ph type="title"/>
+          </p:nvPr>
+        </p:nvSpPr>
+        <p:spPr/>
+        <p:txBody>
+          <a:bodyPr/>
+          <a:lstStyle/>
+          <a:p>
+            <a:r>
+              <a:rPr lang="en-US" dirty="0"/>
+              <a:t>DOM Manipulation</a:t>
+            </a:r>
+          </a:p>
+        </p:txBody>
+      </p:sp>
+      <p:sp>
+        <p:nvSpPr>
+          <p:cNvPr id="3" name="Content Placeholder 2">
+            <a:extLst>
+              <a:ext uri="{FF2B5EF4-FFF2-40B4-BE49-F238E27FC236}">
+                <a16:creationId xmlns:a16="http://schemas.microsoft.com/office/drawing/2014/main" id="{A08B84B8-81CB-0BD2-CD14-066741337119}"/>
+              </a:ext>
+            </a:extLst>
+          </p:cNvPr>
+          <p:cNvSpPr>
+            <a:spLocks noGrp="1"/>
+          </p:cNvSpPr>
+          <p:nvPr>
+            <p:ph idx="1"/>
+          </p:nvPr>
+        </p:nvSpPr>
+        <p:spPr>
+          <a:xfrm>
+            <a:off x="581193" y="2180496"/>
+            <a:ext cx="4607496" cy="3678303"/>
+          </a:xfrm>
+        </p:spPr>
+        <p:txBody>
+          <a:bodyPr/>
+          <a:lstStyle/>
+          <a:p>
+            <a:r>
+              <a:rPr lang="en-US" dirty="0" err="1"/>
+              <a:t>createElement</a:t>
+            </a:r>
+            <a:r>
+              <a:rPr lang="en-US" dirty="0"/>
+              <a:t>() – creates an element with specified tag</a:t>
+            </a:r>
+          </a:p>
+          <a:p>
+            <a:r>
+              <a:rPr lang="en-US" dirty="0" err="1"/>
+              <a:t>appendChild</a:t>
+            </a:r>
+            <a:r>
+              <a:rPr lang="en-US" dirty="0"/>
+              <a:t>() – attaches an element as a child of the specified element</a:t>
+            </a:r>
+          </a:p>
+          <a:p>
+            <a:r>
+              <a:rPr lang="en-US" dirty="0" err="1"/>
+              <a:t>removeChild</a:t>
+            </a:r>
+            <a:r>
+              <a:rPr lang="en-US" dirty="0"/>
+              <a:t>() – removes a specified element from the DOM</a:t>
+            </a:r>
+          </a:p>
+          <a:p>
+            <a:r>
+              <a:rPr lang="en-US" dirty="0" err="1"/>
+              <a:t>replaceChild</a:t>
+            </a:r>
+            <a:r>
+              <a:rPr lang="en-US" dirty="0"/>
+              <a:t>(</a:t>
+            </a:r>
+            <a:r>
+              <a:rPr lang="en-US" dirty="0" err="1"/>
+              <a:t>newElement</a:t>
+            </a:r>
+            <a:r>
+              <a:rPr lang="en-US" dirty="0"/>
+              <a:t>, </a:t>
+            </a:r>
+            <a:r>
+              <a:rPr lang="en-US" dirty="0" err="1"/>
+              <a:t>oldElement</a:t>
+            </a:r>
+            <a:r>
+              <a:rPr lang="en-US" dirty="0"/>
+              <a:t>) – swaps one element for another on a parent</a:t>
+            </a:r>
+          </a:p>
+        </p:txBody>
+      </p:sp>
+      <p:pic>
+        <p:nvPicPr>
+          <p:cNvPr id="7" name="Picture 6">
+            <a:extLst>
+              <a:ext uri="{FF2B5EF4-FFF2-40B4-BE49-F238E27FC236}">
+                <a16:creationId xmlns:a16="http://schemas.microsoft.com/office/drawing/2014/main" id="{AB495205-853F-B6BE-C2FE-EC01F22C4374}"/>
+              </a:ext>
+            </a:extLst>
+          </p:cNvPr>
+          <p:cNvPicPr>
+            <a:picLocks noChangeAspect="1"/>
+          </p:cNvPicPr>
+          <p:nvPr/>
+        </p:nvPicPr>
+        <p:blipFill>
+          <a:blip r:embed="rId2"/>
+          <a:stretch>
+            <a:fillRect/>
+          </a:stretch>
+        </p:blipFill>
+        <p:spPr>
+          <a:xfrm>
+            <a:off x="5495953" y="2572364"/>
+            <a:ext cx="5963482" cy="2638793"/>
+          </a:xfrm>
+          <a:prstGeom prst="rect">
+            <a:avLst/>
+          </a:prstGeom>
+        </p:spPr>
+      </p:pic>
+    </p:spTree>
+    <p:extLst>
+      <p:ext uri="{BB962C8B-B14F-4D97-AF65-F5344CB8AC3E}">
+        <p14:creationId xmlns:p14="http://schemas.microsoft.com/office/powerpoint/2010/main" val="851612013"/>
+      </p:ext>
+    </p:extLst>
+  </p:cSld>
+  <p:clrMapOvr>
+    <a:masterClrMapping/>
+  </p:clrMapOvr>
+</p:sld>
+</file>
+
+<file path=ppt/slides/slide39.xml><?xml version="1.0" encoding="utf-8"?>
+<p:sld xmlns:a="http://schemas.openxmlformats.org/drawingml/2006/main" xmlns:r="http://schemas.openxmlformats.org/officeDocument/2006/relationships" xmlns:p="http://schemas.openxmlformats.org/presentationml/2006/main">
+  <p:cSld>
+    <p:spTree>
+      <p:nvGrpSpPr>
+        <p:cNvPr id="1" name="">
+          <a:extLst>
+            <a:ext uri="{FF2B5EF4-FFF2-40B4-BE49-F238E27FC236}">
+              <a16:creationId xmlns:a16="http://schemas.microsoft.com/office/drawing/2014/main" id="{7D1B9F02-7B1E-94B2-82A5-9F2D0B68FB9E}"/>
+            </a:ext>
+          </a:extLst>
+        </p:cNvPr>
+        <p:cNvGrpSpPr/>
+        <p:nvPr/>
+      </p:nvGrpSpPr>
+      <p:grpSpPr>
+        <a:xfrm>
+          <a:off x="0" y="0"/>
+          <a:ext cx="0" cy="0"/>
+          <a:chOff x="0" y="0"/>
+          <a:chExt cx="0" cy="0"/>
+        </a:xfrm>
+      </p:grpSpPr>
+      <p:sp>
+        <p:nvSpPr>
+          <p:cNvPr id="2" name="Title 1">
+            <a:extLst>
+              <a:ext uri="{FF2B5EF4-FFF2-40B4-BE49-F238E27FC236}">
+                <a16:creationId xmlns:a16="http://schemas.microsoft.com/office/drawing/2014/main" id="{DAE3DE05-63F2-ED29-198F-439EB34C1DD2}"/>
+              </a:ext>
+            </a:extLst>
+          </p:cNvPr>
+          <p:cNvSpPr>
+            <a:spLocks noGrp="1"/>
+          </p:cNvSpPr>
+          <p:nvPr>
+            <p:ph type="title"/>
+          </p:nvPr>
+        </p:nvSpPr>
+        <p:spPr/>
+        <p:txBody>
+          <a:bodyPr/>
+          <a:lstStyle/>
+          <a:p>
+            <a:r>
+              <a:rPr lang="en-US" dirty="0"/>
+              <a:t>Challenge – Display The Date</a:t>
+            </a:r>
+          </a:p>
+        </p:txBody>
+      </p:sp>
+      <p:sp>
+        <p:nvSpPr>
+          <p:cNvPr id="3" name="Content Placeholder 2">
+            <a:extLst>
+              <a:ext uri="{FF2B5EF4-FFF2-40B4-BE49-F238E27FC236}">
+                <a16:creationId xmlns:a16="http://schemas.microsoft.com/office/drawing/2014/main" id="{0858C0B1-57E7-C0B2-66D1-833A7EECA8CD}"/>
+              </a:ext>
+            </a:extLst>
+          </p:cNvPr>
+          <p:cNvSpPr>
+            <a:spLocks noGrp="1"/>
+          </p:cNvSpPr>
+          <p:nvPr>
+            <p:ph idx="1"/>
+          </p:nvPr>
+        </p:nvSpPr>
+        <p:spPr>
+          <a:xfrm>
+            <a:off x="581192" y="2475925"/>
+            <a:ext cx="5317584" cy="1681246"/>
+          </a:xfrm>
+        </p:spPr>
+        <p:txBody>
+          <a:bodyPr/>
+          <a:lstStyle/>
+          <a:p>
+            <a:r>
+              <a:rPr lang="en-US" dirty="0"/>
+              <a:t>Edit your JavaScript so that the current date appears within a div on the page when your button is clicked</a:t>
+            </a:r>
+          </a:p>
+        </p:txBody>
+      </p:sp>
+      <p:sp>
+        <p:nvSpPr>
+          <p:cNvPr id="6" name="TextBox 5">
+            <a:extLst>
+              <a:ext uri="{FF2B5EF4-FFF2-40B4-BE49-F238E27FC236}">
+                <a16:creationId xmlns:a16="http://schemas.microsoft.com/office/drawing/2014/main" id="{F54B800E-42C9-D116-D8E4-DE01D16B2645}"/>
+              </a:ext>
+            </a:extLst>
+          </p:cNvPr>
+          <p:cNvSpPr txBox="1"/>
+          <p:nvPr/>
+        </p:nvSpPr>
+        <p:spPr>
+          <a:xfrm>
+            <a:off x="1228165" y="2402747"/>
+            <a:ext cx="756938" cy="369332"/>
+          </a:xfrm>
+          <a:prstGeom prst="rect">
+            <a:avLst/>
+          </a:prstGeom>
+          <a:noFill/>
+        </p:spPr>
+        <p:txBody>
+          <a:bodyPr wrap="none" rtlCol="0">
+            <a:spAutoFit/>
+          </a:bodyPr>
+          <a:lstStyle/>
+          <a:p>
+            <a:r>
+              <a:rPr lang="en-US" b="1" dirty="0"/>
+              <a:t>Goal:</a:t>
+            </a:r>
+          </a:p>
+        </p:txBody>
+      </p:sp>
+      <p:sp>
+        <p:nvSpPr>
+          <p:cNvPr id="7" name="TextBox 6">
+            <a:extLst>
+              <a:ext uri="{FF2B5EF4-FFF2-40B4-BE49-F238E27FC236}">
+                <a16:creationId xmlns:a16="http://schemas.microsoft.com/office/drawing/2014/main" id="{5D2FF032-7B33-45E4-D461-6339655E5078}"/>
+              </a:ext>
+            </a:extLst>
+          </p:cNvPr>
+          <p:cNvSpPr txBox="1"/>
+          <p:nvPr/>
+        </p:nvSpPr>
+        <p:spPr>
+          <a:xfrm>
+            <a:off x="6714565" y="2402747"/>
+            <a:ext cx="4896243" cy="369332"/>
+          </a:xfrm>
+          <a:prstGeom prst="rect">
+            <a:avLst/>
+          </a:prstGeom>
+          <a:noFill/>
+        </p:spPr>
+        <p:txBody>
+          <a:bodyPr wrap="square" rtlCol="0">
+            <a:spAutoFit/>
+          </a:bodyPr>
+          <a:lstStyle/>
+          <a:p>
+            <a:r>
+              <a:rPr lang="en-US" b="1" dirty="0"/>
+              <a:t>Scenario:  			   15 min</a:t>
+            </a:r>
+          </a:p>
+        </p:txBody>
+      </p:sp>
+      <p:sp>
+        <p:nvSpPr>
+          <p:cNvPr id="8" name="Content Placeholder 2">
+            <a:extLst>
+              <a:ext uri="{FF2B5EF4-FFF2-40B4-BE49-F238E27FC236}">
+                <a16:creationId xmlns:a16="http://schemas.microsoft.com/office/drawing/2014/main" id="{2394808F-9BA9-1981-82F4-C2E32B8EFE6E}"/>
+              </a:ext>
+            </a:extLst>
+          </p:cNvPr>
+          <p:cNvSpPr txBox="1">
+            <a:spLocks/>
+          </p:cNvSpPr>
+          <p:nvPr/>
+        </p:nvSpPr>
+        <p:spPr>
+          <a:xfrm>
+            <a:off x="6545749" y="2772079"/>
+            <a:ext cx="4661642" cy="3054980"/>
+          </a:xfrm>
+          <a:prstGeom prst="rect">
+            <a:avLst/>
+          </a:prstGeom>
+        </p:spPr>
+        <p:txBody>
+          <a:bodyPr vert="horz" lIns="91440" tIns="45720" rIns="91440" bIns="45720" rtlCol="0" anchor="ctr">
+            <a:normAutofit/>
+          </a:bodyPr>
+          <a:lstStyle>
+            <a:lvl1pPr marL="306000" indent="-306000" algn="l" defTabSz="457200" rtl="0" eaLnBrk="1" latinLnBrk="0" hangingPunct="1">
+              <a:spcBef>
+                <a:spcPct val="20000"/>
+              </a:spcBef>
+              <a:spcAft>
+                <a:spcPts val="600"/>
+              </a:spcAft>
+              <a:buClr>
+                <a:schemeClr val="accent2"/>
+              </a:buClr>
+              <a:buSzPct val="92000"/>
+              <a:buFont typeface="Wingdings 2" panose="05020102010507070707" pitchFamily="18" charset="2"/>
+              <a:buChar char=""/>
+              <a:defRPr sz="1800" kern="1200">
+                <a:solidFill>
+                  <a:schemeClr val="tx2"/>
+                </a:solidFill>
+                <a:latin typeface="+mn-lt"/>
+                <a:ea typeface="+mn-ea"/>
+                <a:cs typeface="+mn-cs"/>
+              </a:defRPr>
+            </a:lvl1pPr>
+            <a:lvl2pPr marL="630000" indent="-306000" algn="l" defTabSz="457200" rtl="0" eaLnBrk="1" latinLnBrk="0" hangingPunct="1">
+              <a:spcBef>
+                <a:spcPct val="20000"/>
+              </a:spcBef>
+              <a:spcAft>
+                <a:spcPts val="600"/>
+              </a:spcAft>
+              <a:buClr>
+                <a:schemeClr val="accent2"/>
+              </a:buClr>
+              <a:buSzPct val="92000"/>
+              <a:buFont typeface="Wingdings 2" panose="05020102010507070707" pitchFamily="18" charset="2"/>
+              <a:buChar char=""/>
+              <a:defRPr sz="1600" kern="1200">
+                <a:solidFill>
+                  <a:schemeClr val="tx2"/>
+                </a:solidFill>
+                <a:latin typeface="+mn-lt"/>
+                <a:ea typeface="+mn-ea"/>
+                <a:cs typeface="+mn-cs"/>
+              </a:defRPr>
+            </a:lvl2pPr>
+            <a:lvl3pPr marL="900000" indent="-270000" algn="l" defTabSz="457200" rtl="0" eaLnBrk="1" latinLnBrk="0" hangingPunct="1">
+              <a:spcBef>
+                <a:spcPct val="20000"/>
+              </a:spcBef>
+              <a:spcAft>
+                <a:spcPts val="600"/>
+              </a:spcAft>
+              <a:buClr>
+                <a:schemeClr val="accent2"/>
+              </a:buClr>
+              <a:buSzPct val="92000"/>
+              <a:buFont typeface="Wingdings 2" panose="05020102010507070707" pitchFamily="18" charset="2"/>
+              <a:buChar char=""/>
+              <a:defRPr sz="1400" kern="1200">
+                <a:solidFill>
+                  <a:schemeClr val="tx2"/>
+                </a:solidFill>
+                <a:latin typeface="+mn-lt"/>
+                <a:ea typeface="+mn-ea"/>
+                <a:cs typeface="+mn-cs"/>
+              </a:defRPr>
+            </a:lvl3pPr>
+            <a:lvl4pPr marL="1242000" indent="-234000" algn="l" defTabSz="457200" rtl="0" eaLnBrk="1" latinLnBrk="0" hangingPunct="1">
+              <a:spcBef>
+                <a:spcPct val="20000"/>
+              </a:spcBef>
+              <a:spcAft>
+                <a:spcPts val="600"/>
+              </a:spcAft>
+              <a:buClr>
+                <a:schemeClr val="accent2"/>
+              </a:buClr>
+              <a:buSzPct val="92000"/>
+              <a:buFont typeface="Wingdings 2" panose="05020102010507070707" pitchFamily="18" charset="2"/>
+              <a:buChar char=""/>
+              <a:defRPr sz="1200" kern="1200">
+                <a:solidFill>
+                  <a:schemeClr val="tx2"/>
+                </a:solidFill>
+                <a:latin typeface="+mn-lt"/>
+                <a:ea typeface="+mn-ea"/>
+                <a:cs typeface="+mn-cs"/>
+              </a:defRPr>
+            </a:lvl4pPr>
+            <a:lvl5pPr marL="1602000" indent="-234000" algn="l" defTabSz="457200" rtl="0" eaLnBrk="1" latinLnBrk="0" hangingPunct="1">
+              <a:spcBef>
+                <a:spcPct val="20000"/>
+              </a:spcBef>
+              <a:spcAft>
+                <a:spcPts val="600"/>
+              </a:spcAft>
+              <a:buClr>
+                <a:schemeClr val="accent2"/>
+              </a:buClr>
+              <a:buSzPct val="92000"/>
+              <a:buFont typeface="Wingdings 2" panose="05020102010507070707" pitchFamily="18" charset="2"/>
+              <a:buChar char=""/>
+              <a:defRPr sz="1200" kern="1200">
+                <a:solidFill>
+                  <a:schemeClr val="tx2"/>
+                </a:solidFill>
+                <a:latin typeface="+mn-lt"/>
+                <a:ea typeface="+mn-ea"/>
+                <a:cs typeface="+mn-cs"/>
+              </a:defRPr>
+            </a:lvl5pPr>
+            <a:lvl6pPr marL="1900000" indent="-228600" algn="l" defTabSz="457200" rtl="0" eaLnBrk="1" latinLnBrk="0" hangingPunct="1">
+              <a:spcBef>
+                <a:spcPct val="20000"/>
+              </a:spcBef>
+              <a:spcAft>
+                <a:spcPts val="600"/>
+              </a:spcAft>
+              <a:buClr>
+                <a:schemeClr val="accent2"/>
+              </a:buClr>
+              <a:buSzPct val="92000"/>
+              <a:buFont typeface="Wingdings 2" panose="05020102010507070707" pitchFamily="18" charset="2"/>
+              <a:buChar char=""/>
+              <a:defRPr sz="1200" kern="1200">
+                <a:solidFill>
+                  <a:schemeClr val="tx2"/>
+                </a:solidFill>
+                <a:latin typeface="+mn-lt"/>
+                <a:ea typeface="+mn-ea"/>
+                <a:cs typeface="+mn-cs"/>
+              </a:defRPr>
+            </a:lvl6pPr>
+            <a:lvl7pPr marL="2200000" indent="-228600" algn="l" defTabSz="457200" rtl="0" eaLnBrk="1" latinLnBrk="0" hangingPunct="1">
+              <a:spcBef>
+                <a:spcPct val="20000"/>
+              </a:spcBef>
+              <a:spcAft>
+                <a:spcPts val="600"/>
+              </a:spcAft>
+              <a:buClr>
+                <a:schemeClr val="accent2"/>
+              </a:buClr>
+              <a:buSzPct val="92000"/>
+              <a:buFont typeface="Wingdings 2" panose="05020102010507070707" pitchFamily="18" charset="2"/>
+              <a:buChar char=""/>
+              <a:defRPr sz="1200" kern="1200">
+                <a:solidFill>
+                  <a:schemeClr val="tx2"/>
+                </a:solidFill>
+                <a:latin typeface="+mn-lt"/>
+                <a:ea typeface="+mn-ea"/>
+                <a:cs typeface="+mn-cs"/>
+              </a:defRPr>
+            </a:lvl7pPr>
+            <a:lvl8pPr marL="2500000" indent="-228600" algn="l" defTabSz="457200" rtl="0" eaLnBrk="1" latinLnBrk="0" hangingPunct="1">
+              <a:spcBef>
+                <a:spcPct val="20000"/>
+              </a:spcBef>
+              <a:spcAft>
+                <a:spcPts val="600"/>
+              </a:spcAft>
+              <a:buClr>
+                <a:schemeClr val="accent2"/>
+              </a:buClr>
+              <a:buSzPct val="92000"/>
+              <a:buFont typeface="Wingdings 2" panose="05020102010507070707" pitchFamily="18" charset="2"/>
+              <a:buChar char=""/>
+              <a:defRPr sz="1200" kern="1200">
+                <a:solidFill>
+                  <a:schemeClr val="tx2"/>
+                </a:solidFill>
+                <a:latin typeface="+mn-lt"/>
+                <a:ea typeface="+mn-ea"/>
+                <a:cs typeface="+mn-cs"/>
+              </a:defRPr>
+            </a:lvl8pPr>
+            <a:lvl9pPr marL="2800000" indent="-228600" algn="l" defTabSz="457200" rtl="0" eaLnBrk="1" latinLnBrk="0" hangingPunct="1">
+              <a:spcBef>
+                <a:spcPct val="20000"/>
+              </a:spcBef>
+              <a:spcAft>
+                <a:spcPts val="600"/>
+              </a:spcAft>
+              <a:buClr>
+                <a:schemeClr val="accent2"/>
+              </a:buClr>
+              <a:buSzPct val="92000"/>
+              <a:buFont typeface="Wingdings 2" panose="05020102010507070707" pitchFamily="18" charset="2"/>
+              <a:buChar char=""/>
+              <a:defRPr sz="1200" kern="1200">
+                <a:solidFill>
+                  <a:schemeClr val="tx2"/>
+                </a:solidFill>
+                <a:latin typeface="+mn-lt"/>
+                <a:ea typeface="+mn-ea"/>
+                <a:cs typeface="+mn-cs"/>
+              </a:defRPr>
+            </a:lvl9pPr>
+          </a:lstStyle>
+          <a:p>
+            <a:r>
+              <a:rPr lang="en-US" dirty="0"/>
+              <a:t>Your organization needs you to continue work on the product launch page. </a:t>
+            </a:r>
+          </a:p>
+          <a:p>
+            <a:r>
+              <a:rPr lang="en-US" dirty="0"/>
+              <a:t>Ensure the date appears on the page, within a div, when the button is clicked</a:t>
+            </a:r>
+          </a:p>
+          <a:p>
+            <a:r>
+              <a:rPr lang="en-US" dirty="0"/>
+              <a:t>You may not create a div within the html, use only JavaScript to solve the challenge</a:t>
+            </a:r>
+          </a:p>
+          <a:p>
+            <a:r>
+              <a:rPr lang="en-US" dirty="0"/>
+              <a:t>Ensure that no duplicate dates appear on the page, you should replace the old value with the new value if a div currently exists</a:t>
+            </a:r>
+          </a:p>
+        </p:txBody>
+      </p:sp>
+    </p:spTree>
+    <p:extLst>
+      <p:ext uri="{BB962C8B-B14F-4D97-AF65-F5344CB8AC3E}">
+        <p14:creationId xmlns:p14="http://schemas.microsoft.com/office/powerpoint/2010/main" val="3691623560"/>
       </p:ext>
     </p:extLst>
   </p:cSld>
@@ -8611,6 +11411,1511 @@
     <p:extLst>
       <p:ext uri="{BB962C8B-B14F-4D97-AF65-F5344CB8AC3E}">
         <p14:creationId xmlns:p14="http://schemas.microsoft.com/office/powerpoint/2010/main" val="2782518340"/>
+      </p:ext>
+    </p:extLst>
+  </p:cSld>
+  <p:clrMapOvr>
+    <a:masterClrMapping/>
+  </p:clrMapOvr>
+</p:sld>
+</file>
+
+<file path=ppt/slides/slide40.xml><?xml version="1.0" encoding="utf-8"?>
+<p:sld xmlns:a="http://schemas.openxmlformats.org/drawingml/2006/main" xmlns:r="http://schemas.openxmlformats.org/officeDocument/2006/relationships" xmlns:p="http://schemas.openxmlformats.org/presentationml/2006/main">
+  <p:cSld>
+    <p:spTree>
+      <p:nvGrpSpPr>
+        <p:cNvPr id="1" name=""/>
+        <p:cNvGrpSpPr/>
+        <p:nvPr/>
+      </p:nvGrpSpPr>
+      <p:grpSpPr>
+        <a:xfrm>
+          <a:off x="0" y="0"/>
+          <a:ext cx="0" cy="0"/>
+          <a:chOff x="0" y="0"/>
+          <a:chExt cx="0" cy="0"/>
+        </a:xfrm>
+      </p:grpSpPr>
+      <p:sp>
+        <p:nvSpPr>
+          <p:cNvPr id="2" name="Title 1">
+            <a:extLst>
+              <a:ext uri="{FF2B5EF4-FFF2-40B4-BE49-F238E27FC236}">
+                <a16:creationId xmlns:a16="http://schemas.microsoft.com/office/drawing/2014/main" id="{B23F05B8-1205-10BB-E0D5-5741BEB5A5B9}"/>
+              </a:ext>
+            </a:extLst>
+          </p:cNvPr>
+          <p:cNvSpPr>
+            <a:spLocks noGrp="1"/>
+          </p:cNvSpPr>
+          <p:nvPr>
+            <p:ph type="title"/>
+          </p:nvPr>
+        </p:nvSpPr>
+        <p:spPr/>
+        <p:txBody>
+          <a:bodyPr/>
+          <a:lstStyle/>
+          <a:p>
+            <a:r>
+              <a:rPr lang="en-US" dirty="0"/>
+              <a:t>The JavaScript Event Loop</a:t>
+            </a:r>
+          </a:p>
+        </p:txBody>
+      </p:sp>
+      <p:sp>
+        <p:nvSpPr>
+          <p:cNvPr id="3" name="Content Placeholder 2">
+            <a:extLst>
+              <a:ext uri="{FF2B5EF4-FFF2-40B4-BE49-F238E27FC236}">
+                <a16:creationId xmlns:a16="http://schemas.microsoft.com/office/drawing/2014/main" id="{4A7F067C-63C7-271E-CA73-A9B351905495}"/>
+              </a:ext>
+            </a:extLst>
+          </p:cNvPr>
+          <p:cNvSpPr>
+            <a:spLocks noGrp="1"/>
+          </p:cNvSpPr>
+          <p:nvPr>
+            <p:ph idx="1"/>
+          </p:nvPr>
+        </p:nvSpPr>
+        <p:spPr>
+          <a:xfrm>
+            <a:off x="581192" y="2455454"/>
+            <a:ext cx="4107766" cy="3700390"/>
+          </a:xfrm>
+        </p:spPr>
+        <p:txBody>
+          <a:bodyPr>
+            <a:normAutofit lnSpcReduction="10000"/>
+          </a:bodyPr>
+          <a:lstStyle/>
+          <a:p>
+            <a:r>
+              <a:rPr lang="en-US" dirty="0"/>
+              <a:t>JavaScript is considered a ‘blocking’ or ‘single-threaded’ language</a:t>
+            </a:r>
+          </a:p>
+          <a:p>
+            <a:r>
+              <a:rPr lang="en-US" dirty="0"/>
+              <a:t>The call stack – first in, last out structure</a:t>
+            </a:r>
+          </a:p>
+          <a:p>
+            <a:r>
+              <a:rPr lang="en-US" dirty="0"/>
+              <a:t>The event queue – first in, first out structure</a:t>
+            </a:r>
+          </a:p>
+          <a:p>
+            <a:r>
+              <a:rPr lang="en-US" dirty="0"/>
+              <a:t>Our event loop supplies jobs to the call stack from our event queue</a:t>
+            </a:r>
+          </a:p>
+          <a:p>
+            <a:r>
+              <a:rPr lang="en-US" dirty="0"/>
+              <a:t>If an asynchronous job appears, it is sent to the browser’s web APIs for processing</a:t>
+            </a:r>
+          </a:p>
+          <a:p>
+            <a:endParaRPr lang="en-US" dirty="0"/>
+          </a:p>
+        </p:txBody>
+      </p:sp>
+      <p:pic>
+        <p:nvPicPr>
+          <p:cNvPr id="5" name="Picture 4">
+            <a:extLst>
+              <a:ext uri="{FF2B5EF4-FFF2-40B4-BE49-F238E27FC236}">
+                <a16:creationId xmlns:a16="http://schemas.microsoft.com/office/drawing/2014/main" id="{CD024412-B523-00BA-E1E2-27509DC35B8D}"/>
+              </a:ext>
+            </a:extLst>
+          </p:cNvPr>
+          <p:cNvPicPr>
+            <a:picLocks noChangeAspect="1"/>
+          </p:cNvPicPr>
+          <p:nvPr/>
+        </p:nvPicPr>
+        <p:blipFill>
+          <a:blip r:embed="rId2"/>
+          <a:stretch>
+            <a:fillRect/>
+          </a:stretch>
+        </p:blipFill>
+        <p:spPr>
+          <a:xfrm>
+            <a:off x="4901609" y="2265500"/>
+            <a:ext cx="6832772" cy="3593299"/>
+          </a:xfrm>
+          <a:prstGeom prst="rect">
+            <a:avLst/>
+          </a:prstGeom>
+        </p:spPr>
+      </p:pic>
+    </p:spTree>
+    <p:extLst>
+      <p:ext uri="{BB962C8B-B14F-4D97-AF65-F5344CB8AC3E}">
+        <p14:creationId xmlns:p14="http://schemas.microsoft.com/office/powerpoint/2010/main" val="966078369"/>
+      </p:ext>
+    </p:extLst>
+  </p:cSld>
+  <p:clrMapOvr>
+    <a:masterClrMapping/>
+  </p:clrMapOvr>
+</p:sld>
+</file>
+
+<file path=ppt/slides/slide41.xml><?xml version="1.0" encoding="utf-8"?>
+<p:sld xmlns:a="http://schemas.openxmlformats.org/drawingml/2006/main" xmlns:r="http://schemas.openxmlformats.org/officeDocument/2006/relationships" xmlns:p="http://schemas.openxmlformats.org/presentationml/2006/main">
+  <p:cSld>
+    <p:spTree>
+      <p:nvGrpSpPr>
+        <p:cNvPr id="1" name=""/>
+        <p:cNvGrpSpPr/>
+        <p:nvPr/>
+      </p:nvGrpSpPr>
+      <p:grpSpPr>
+        <a:xfrm>
+          <a:off x="0" y="0"/>
+          <a:ext cx="0" cy="0"/>
+          <a:chOff x="0" y="0"/>
+          <a:chExt cx="0" cy="0"/>
+        </a:xfrm>
+      </p:grpSpPr>
+      <p:sp>
+        <p:nvSpPr>
+          <p:cNvPr id="2" name="Title 1">
+            <a:extLst>
+              <a:ext uri="{FF2B5EF4-FFF2-40B4-BE49-F238E27FC236}">
+                <a16:creationId xmlns:a16="http://schemas.microsoft.com/office/drawing/2014/main" id="{7331CBCE-6D21-C8B1-FEB6-1DD06A7B5509}"/>
+              </a:ext>
+            </a:extLst>
+          </p:cNvPr>
+          <p:cNvSpPr>
+            <a:spLocks noGrp="1"/>
+          </p:cNvSpPr>
+          <p:nvPr>
+            <p:ph type="title"/>
+          </p:nvPr>
+        </p:nvSpPr>
+        <p:spPr/>
+        <p:txBody>
+          <a:bodyPr/>
+          <a:lstStyle/>
+          <a:p>
+            <a:r>
+              <a:rPr lang="en-US" dirty="0" err="1"/>
+              <a:t>XMLHttpRequests</a:t>
+            </a:r>
+            <a:r>
+              <a:rPr lang="en-US" dirty="0"/>
+              <a:t> and callbacks</a:t>
+            </a:r>
+          </a:p>
+        </p:txBody>
+      </p:sp>
+      <p:pic>
+        <p:nvPicPr>
+          <p:cNvPr id="5" name="Picture 4">
+            <a:extLst>
+              <a:ext uri="{FF2B5EF4-FFF2-40B4-BE49-F238E27FC236}">
+                <a16:creationId xmlns:a16="http://schemas.microsoft.com/office/drawing/2014/main" id="{6DBBD86D-9ABC-94D2-BEFF-01D9C2FF3D78}"/>
+              </a:ext>
+            </a:extLst>
+          </p:cNvPr>
+          <p:cNvPicPr>
+            <a:picLocks noChangeAspect="1"/>
+          </p:cNvPicPr>
+          <p:nvPr/>
+        </p:nvPicPr>
+        <p:blipFill>
+          <a:blip r:embed="rId2"/>
+          <a:stretch>
+            <a:fillRect/>
+          </a:stretch>
+        </p:blipFill>
+        <p:spPr>
+          <a:xfrm>
+            <a:off x="1060697" y="2030818"/>
+            <a:ext cx="4366877" cy="4631813"/>
+          </a:xfrm>
+          <a:prstGeom prst="rect">
+            <a:avLst/>
+          </a:prstGeom>
+        </p:spPr>
+      </p:pic>
+      <p:pic>
+        <p:nvPicPr>
+          <p:cNvPr id="7" name="Picture 6">
+            <a:extLst>
+              <a:ext uri="{FF2B5EF4-FFF2-40B4-BE49-F238E27FC236}">
+                <a16:creationId xmlns:a16="http://schemas.microsoft.com/office/drawing/2014/main" id="{5FE29A24-9DC9-7F7C-B858-06C4335279FF}"/>
+              </a:ext>
+            </a:extLst>
+          </p:cNvPr>
+          <p:cNvPicPr>
+            <a:picLocks noChangeAspect="1"/>
+          </p:cNvPicPr>
+          <p:nvPr/>
+        </p:nvPicPr>
+        <p:blipFill>
+          <a:blip r:embed="rId3"/>
+          <a:stretch>
+            <a:fillRect/>
+          </a:stretch>
+        </p:blipFill>
+        <p:spPr>
+          <a:xfrm>
+            <a:off x="5723536" y="4194175"/>
+            <a:ext cx="5887272" cy="1895740"/>
+          </a:xfrm>
+          <a:prstGeom prst="rect">
+            <a:avLst/>
+          </a:prstGeom>
+        </p:spPr>
+      </p:pic>
+      <p:sp>
+        <p:nvSpPr>
+          <p:cNvPr id="8" name="TextBox 7">
+            <a:extLst>
+              <a:ext uri="{FF2B5EF4-FFF2-40B4-BE49-F238E27FC236}">
+                <a16:creationId xmlns:a16="http://schemas.microsoft.com/office/drawing/2014/main" id="{EE2013ED-EF99-8EF1-B3B5-346B9EF78413}"/>
+              </a:ext>
+            </a:extLst>
+          </p:cNvPr>
+          <p:cNvSpPr txBox="1"/>
+          <p:nvPr/>
+        </p:nvSpPr>
+        <p:spPr>
+          <a:xfrm>
+            <a:off x="6096000" y="2488017"/>
+            <a:ext cx="5082417" cy="1200329"/>
+          </a:xfrm>
+          <a:prstGeom prst="rect">
+            <a:avLst/>
+          </a:prstGeom>
+          <a:noFill/>
+        </p:spPr>
+        <p:txBody>
+          <a:bodyPr wrap="square" rtlCol="0">
+            <a:spAutoFit/>
+          </a:bodyPr>
+          <a:lstStyle/>
+          <a:p>
+            <a:r>
+              <a:rPr lang="en-US" dirty="0"/>
+              <a:t>Definition: A </a:t>
+            </a:r>
+            <a:r>
+              <a:rPr lang="en-US" dirty="0">
+                <a:solidFill>
+                  <a:schemeClr val="accent2"/>
+                </a:solidFill>
+              </a:rPr>
+              <a:t>Callback Function </a:t>
+            </a:r>
+            <a:r>
+              <a:rPr lang="en-US" dirty="0"/>
+              <a:t>is a function that is passed as an argument to another function, and is meant to be called later, usually after an operation has completed</a:t>
+            </a:r>
+          </a:p>
+        </p:txBody>
+      </p:sp>
+    </p:spTree>
+    <p:extLst>
+      <p:ext uri="{BB962C8B-B14F-4D97-AF65-F5344CB8AC3E}">
+        <p14:creationId xmlns:p14="http://schemas.microsoft.com/office/powerpoint/2010/main" val="892247919"/>
+      </p:ext>
+    </p:extLst>
+  </p:cSld>
+  <p:clrMapOvr>
+    <a:masterClrMapping/>
+  </p:clrMapOvr>
+</p:sld>
+</file>
+
+<file path=ppt/slides/slide42.xml><?xml version="1.0" encoding="utf-8"?>
+<p:sld xmlns:a="http://schemas.openxmlformats.org/drawingml/2006/main" xmlns:r="http://schemas.openxmlformats.org/officeDocument/2006/relationships" xmlns:p="http://schemas.openxmlformats.org/presentationml/2006/main">
+  <p:cSld>
+    <p:spTree>
+      <p:nvGrpSpPr>
+        <p:cNvPr id="1" name=""/>
+        <p:cNvGrpSpPr/>
+        <p:nvPr/>
+      </p:nvGrpSpPr>
+      <p:grpSpPr>
+        <a:xfrm>
+          <a:off x="0" y="0"/>
+          <a:ext cx="0" cy="0"/>
+          <a:chOff x="0" y="0"/>
+          <a:chExt cx="0" cy="0"/>
+        </a:xfrm>
+      </p:grpSpPr>
+      <p:sp>
+        <p:nvSpPr>
+          <p:cNvPr id="2" name="Title 1">
+            <a:extLst>
+              <a:ext uri="{FF2B5EF4-FFF2-40B4-BE49-F238E27FC236}">
+                <a16:creationId xmlns:a16="http://schemas.microsoft.com/office/drawing/2014/main" id="{1067E964-4133-02A9-FACB-F8E3D24F9AE4}"/>
+              </a:ext>
+            </a:extLst>
+          </p:cNvPr>
+          <p:cNvSpPr>
+            <a:spLocks noGrp="1"/>
+          </p:cNvSpPr>
+          <p:nvPr>
+            <p:ph type="title"/>
+          </p:nvPr>
+        </p:nvSpPr>
+        <p:spPr/>
+        <p:txBody>
+          <a:bodyPr/>
+          <a:lstStyle/>
+          <a:p>
+            <a:r>
+              <a:rPr lang="en-US" dirty="0"/>
+              <a:t>Other scenarios with callback functions</a:t>
+            </a:r>
+          </a:p>
+        </p:txBody>
+      </p:sp>
+      <p:sp>
+        <p:nvSpPr>
+          <p:cNvPr id="3" name="Content Placeholder 2">
+            <a:extLst>
+              <a:ext uri="{FF2B5EF4-FFF2-40B4-BE49-F238E27FC236}">
+                <a16:creationId xmlns:a16="http://schemas.microsoft.com/office/drawing/2014/main" id="{DCBFA334-A215-E641-795A-F7990708A549}"/>
+              </a:ext>
+            </a:extLst>
+          </p:cNvPr>
+          <p:cNvSpPr>
+            <a:spLocks noGrp="1"/>
+          </p:cNvSpPr>
+          <p:nvPr>
+            <p:ph idx="1"/>
+          </p:nvPr>
+        </p:nvSpPr>
+        <p:spPr>
+          <a:xfrm>
+            <a:off x="1222460" y="2557699"/>
+            <a:ext cx="3661199" cy="3678303"/>
+          </a:xfrm>
+        </p:spPr>
+        <p:txBody>
+          <a:bodyPr/>
+          <a:lstStyle/>
+          <a:p>
+            <a:r>
+              <a:rPr lang="en-US" dirty="0" err="1"/>
+              <a:t>forEach</a:t>
+            </a:r>
+            <a:r>
+              <a:rPr lang="en-US" dirty="0"/>
+              <a:t>() - executes a callback for each item</a:t>
+            </a:r>
+          </a:p>
+          <a:p>
+            <a:r>
+              <a:rPr lang="en-US" dirty="0"/>
+              <a:t>map() – creates a new array while executing the callback for each item</a:t>
+            </a:r>
+          </a:p>
+        </p:txBody>
+      </p:sp>
+      <p:pic>
+        <p:nvPicPr>
+          <p:cNvPr id="5" name="Picture 4">
+            <a:extLst>
+              <a:ext uri="{FF2B5EF4-FFF2-40B4-BE49-F238E27FC236}">
+                <a16:creationId xmlns:a16="http://schemas.microsoft.com/office/drawing/2014/main" id="{894EC795-CAF0-94A6-C5FF-FD58CF54BDB7}"/>
+              </a:ext>
+            </a:extLst>
+          </p:cNvPr>
+          <p:cNvPicPr>
+            <a:picLocks noChangeAspect="1"/>
+          </p:cNvPicPr>
+          <p:nvPr/>
+        </p:nvPicPr>
+        <p:blipFill>
+          <a:blip r:embed="rId2"/>
+          <a:stretch>
+            <a:fillRect/>
+          </a:stretch>
+        </p:blipFill>
+        <p:spPr>
+          <a:xfrm>
+            <a:off x="6182727" y="2276314"/>
+            <a:ext cx="3249073" cy="1523790"/>
+          </a:xfrm>
+          <a:prstGeom prst="rect">
+            <a:avLst/>
+          </a:prstGeom>
+        </p:spPr>
+      </p:pic>
+      <p:pic>
+        <p:nvPicPr>
+          <p:cNvPr id="7" name="Picture 6">
+            <a:extLst>
+              <a:ext uri="{FF2B5EF4-FFF2-40B4-BE49-F238E27FC236}">
+                <a16:creationId xmlns:a16="http://schemas.microsoft.com/office/drawing/2014/main" id="{34ED6910-8F73-D8CA-359C-CEBE372A2AEB}"/>
+              </a:ext>
+            </a:extLst>
+          </p:cNvPr>
+          <p:cNvPicPr>
+            <a:picLocks noChangeAspect="1"/>
+          </p:cNvPicPr>
+          <p:nvPr/>
+        </p:nvPicPr>
+        <p:blipFill>
+          <a:blip r:embed="rId3"/>
+          <a:stretch>
+            <a:fillRect/>
+          </a:stretch>
+        </p:blipFill>
+        <p:spPr>
+          <a:xfrm>
+            <a:off x="6182727" y="4184649"/>
+            <a:ext cx="3277057" cy="1914792"/>
+          </a:xfrm>
+          <a:prstGeom prst="rect">
+            <a:avLst/>
+          </a:prstGeom>
+        </p:spPr>
+      </p:pic>
+    </p:spTree>
+    <p:extLst>
+      <p:ext uri="{BB962C8B-B14F-4D97-AF65-F5344CB8AC3E}">
+        <p14:creationId xmlns:p14="http://schemas.microsoft.com/office/powerpoint/2010/main" val="1672948942"/>
+      </p:ext>
+    </p:extLst>
+  </p:cSld>
+  <p:clrMapOvr>
+    <a:masterClrMapping/>
+  </p:clrMapOvr>
+</p:sld>
+</file>
+
+<file path=ppt/slides/slide43.xml><?xml version="1.0" encoding="utf-8"?>
+<p:sld xmlns:a="http://schemas.openxmlformats.org/drawingml/2006/main" xmlns:r="http://schemas.openxmlformats.org/officeDocument/2006/relationships" xmlns:p="http://schemas.openxmlformats.org/presentationml/2006/main">
+  <p:cSld>
+    <p:spTree>
+      <p:nvGrpSpPr>
+        <p:cNvPr id="1" name="">
+          <a:extLst>
+            <a:ext uri="{FF2B5EF4-FFF2-40B4-BE49-F238E27FC236}">
+              <a16:creationId xmlns:a16="http://schemas.microsoft.com/office/drawing/2014/main" id="{F977BAB1-73E8-40DD-7790-C70DEC085C86}"/>
+            </a:ext>
+          </a:extLst>
+        </p:cNvPr>
+        <p:cNvGrpSpPr/>
+        <p:nvPr/>
+      </p:nvGrpSpPr>
+      <p:grpSpPr>
+        <a:xfrm>
+          <a:off x="0" y="0"/>
+          <a:ext cx="0" cy="0"/>
+          <a:chOff x="0" y="0"/>
+          <a:chExt cx="0" cy="0"/>
+        </a:xfrm>
+      </p:grpSpPr>
+      <p:sp>
+        <p:nvSpPr>
+          <p:cNvPr id="2" name="Title 1">
+            <a:extLst>
+              <a:ext uri="{FF2B5EF4-FFF2-40B4-BE49-F238E27FC236}">
+                <a16:creationId xmlns:a16="http://schemas.microsoft.com/office/drawing/2014/main" id="{3A34B84A-C3EC-167B-1BE5-E9D9A48791D2}"/>
+              </a:ext>
+            </a:extLst>
+          </p:cNvPr>
+          <p:cNvSpPr>
+            <a:spLocks noGrp="1"/>
+          </p:cNvSpPr>
+          <p:nvPr>
+            <p:ph type="title"/>
+          </p:nvPr>
+        </p:nvSpPr>
+        <p:spPr/>
+        <p:txBody>
+          <a:bodyPr/>
+          <a:lstStyle/>
+          <a:p>
+            <a:r>
+              <a:rPr lang="en-US" dirty="0"/>
+              <a:t>Other scenarios with callback functions</a:t>
+            </a:r>
+          </a:p>
+        </p:txBody>
+      </p:sp>
+      <p:sp>
+        <p:nvSpPr>
+          <p:cNvPr id="3" name="Content Placeholder 2">
+            <a:extLst>
+              <a:ext uri="{FF2B5EF4-FFF2-40B4-BE49-F238E27FC236}">
+                <a16:creationId xmlns:a16="http://schemas.microsoft.com/office/drawing/2014/main" id="{4030627A-D8D7-94C6-1C81-0283B0642CC7}"/>
+              </a:ext>
+            </a:extLst>
+          </p:cNvPr>
+          <p:cNvSpPr>
+            <a:spLocks noGrp="1"/>
+          </p:cNvSpPr>
+          <p:nvPr>
+            <p:ph idx="1"/>
+          </p:nvPr>
+        </p:nvSpPr>
+        <p:spPr>
+          <a:xfrm>
+            <a:off x="1222460" y="2557699"/>
+            <a:ext cx="3661199" cy="3678303"/>
+          </a:xfrm>
+        </p:spPr>
+        <p:txBody>
+          <a:bodyPr/>
+          <a:lstStyle/>
+          <a:p>
+            <a:r>
+              <a:rPr lang="en-US" dirty="0"/>
+              <a:t>filter() – returns a new array containing only the elements for which the callback returns true</a:t>
+            </a:r>
+          </a:p>
+          <a:p>
+            <a:r>
+              <a:rPr lang="en-US" dirty="0"/>
+              <a:t>reduce() – accumulates a single value by applying the callback to each element</a:t>
+            </a:r>
+          </a:p>
+        </p:txBody>
+      </p:sp>
+      <p:pic>
+        <p:nvPicPr>
+          <p:cNvPr id="6" name="Picture 5">
+            <a:extLst>
+              <a:ext uri="{FF2B5EF4-FFF2-40B4-BE49-F238E27FC236}">
+                <a16:creationId xmlns:a16="http://schemas.microsoft.com/office/drawing/2014/main" id="{FD4F3723-A0E4-CF47-2010-321BEC05E0D9}"/>
+              </a:ext>
+            </a:extLst>
+          </p:cNvPr>
+          <p:cNvPicPr>
+            <a:picLocks noChangeAspect="1"/>
+          </p:cNvPicPr>
+          <p:nvPr/>
+        </p:nvPicPr>
+        <p:blipFill>
+          <a:blip r:embed="rId2"/>
+          <a:stretch>
+            <a:fillRect/>
+          </a:stretch>
+        </p:blipFill>
+        <p:spPr>
+          <a:xfrm>
+            <a:off x="7097087" y="2132324"/>
+            <a:ext cx="3353268" cy="1857634"/>
+          </a:xfrm>
+          <a:prstGeom prst="rect">
+            <a:avLst/>
+          </a:prstGeom>
+        </p:spPr>
+      </p:pic>
+      <p:pic>
+        <p:nvPicPr>
+          <p:cNvPr id="9" name="Picture 8">
+            <a:extLst>
+              <a:ext uri="{FF2B5EF4-FFF2-40B4-BE49-F238E27FC236}">
+                <a16:creationId xmlns:a16="http://schemas.microsoft.com/office/drawing/2014/main" id="{07A2C8B3-3786-09F5-2E9C-702AE1D786F0}"/>
+              </a:ext>
+            </a:extLst>
+          </p:cNvPr>
+          <p:cNvPicPr>
+            <a:picLocks noChangeAspect="1"/>
+          </p:cNvPicPr>
+          <p:nvPr/>
+        </p:nvPicPr>
+        <p:blipFill>
+          <a:blip r:embed="rId3"/>
+          <a:stretch>
+            <a:fillRect/>
+          </a:stretch>
+        </p:blipFill>
+        <p:spPr>
+          <a:xfrm>
+            <a:off x="6577902" y="4406326"/>
+            <a:ext cx="4391638" cy="1838582"/>
+          </a:xfrm>
+          <a:prstGeom prst="rect">
+            <a:avLst/>
+          </a:prstGeom>
+        </p:spPr>
+      </p:pic>
+    </p:spTree>
+    <p:extLst>
+      <p:ext uri="{BB962C8B-B14F-4D97-AF65-F5344CB8AC3E}">
+        <p14:creationId xmlns:p14="http://schemas.microsoft.com/office/powerpoint/2010/main" val="1840732059"/>
+      </p:ext>
+    </p:extLst>
+  </p:cSld>
+  <p:clrMapOvr>
+    <a:masterClrMapping/>
+  </p:clrMapOvr>
+</p:sld>
+</file>
+
+<file path=ppt/slides/slide44.xml><?xml version="1.0" encoding="utf-8"?>
+<p:sld xmlns:a="http://schemas.openxmlformats.org/drawingml/2006/main" xmlns:r="http://schemas.openxmlformats.org/officeDocument/2006/relationships" xmlns:p="http://schemas.openxmlformats.org/presentationml/2006/main">
+  <p:cSld>
+    <p:spTree>
+      <p:nvGrpSpPr>
+        <p:cNvPr id="1" name=""/>
+        <p:cNvGrpSpPr/>
+        <p:nvPr/>
+      </p:nvGrpSpPr>
+      <p:grpSpPr>
+        <a:xfrm>
+          <a:off x="0" y="0"/>
+          <a:ext cx="0" cy="0"/>
+          <a:chOff x="0" y="0"/>
+          <a:chExt cx="0" cy="0"/>
+        </a:xfrm>
+      </p:grpSpPr>
+      <p:sp>
+        <p:nvSpPr>
+          <p:cNvPr id="2" name="Title 1">
+            <a:extLst>
+              <a:ext uri="{FF2B5EF4-FFF2-40B4-BE49-F238E27FC236}">
+                <a16:creationId xmlns:a16="http://schemas.microsoft.com/office/drawing/2014/main" id="{26171C56-81FF-ADD5-ED33-69CBA7F501E1}"/>
+              </a:ext>
+            </a:extLst>
+          </p:cNvPr>
+          <p:cNvSpPr>
+            <a:spLocks noGrp="1"/>
+          </p:cNvSpPr>
+          <p:nvPr>
+            <p:ph type="title"/>
+          </p:nvPr>
+        </p:nvSpPr>
+        <p:spPr/>
+        <p:txBody>
+          <a:bodyPr/>
+          <a:lstStyle/>
+          <a:p>
+            <a:r>
+              <a:rPr lang="en-US" dirty="0"/>
+              <a:t>Promises</a:t>
+            </a:r>
+          </a:p>
+        </p:txBody>
+      </p:sp>
+      <p:sp>
+        <p:nvSpPr>
+          <p:cNvPr id="3" name="Content Placeholder 2">
+            <a:extLst>
+              <a:ext uri="{FF2B5EF4-FFF2-40B4-BE49-F238E27FC236}">
+                <a16:creationId xmlns:a16="http://schemas.microsoft.com/office/drawing/2014/main" id="{E5E18E2C-36AF-F377-8D1D-3E626D602432}"/>
+              </a:ext>
+            </a:extLst>
+          </p:cNvPr>
+          <p:cNvSpPr>
+            <a:spLocks noGrp="1"/>
+          </p:cNvSpPr>
+          <p:nvPr>
+            <p:ph idx="1"/>
+          </p:nvPr>
+        </p:nvSpPr>
+        <p:spPr>
+          <a:xfrm>
+            <a:off x="581193" y="2180496"/>
+            <a:ext cx="5064695" cy="3678303"/>
+          </a:xfrm>
+        </p:spPr>
+        <p:txBody>
+          <a:bodyPr/>
+          <a:lstStyle/>
+          <a:p>
+            <a:r>
+              <a:rPr lang="en-US" dirty="0"/>
+              <a:t>Definition: A </a:t>
+            </a:r>
+            <a:r>
+              <a:rPr lang="en-US" dirty="0">
+                <a:solidFill>
+                  <a:schemeClr val="accent2"/>
+                </a:solidFill>
+              </a:rPr>
+              <a:t>Promise</a:t>
+            </a:r>
+            <a:r>
+              <a:rPr lang="en-US" dirty="0"/>
+              <a:t> is an object that represents the eventual result of an asynchronous operation</a:t>
+            </a:r>
+          </a:p>
+          <a:p>
+            <a:pPr lvl="1"/>
+            <a:r>
+              <a:rPr lang="en-US" dirty="0"/>
+              <a:t>These allow us to handle success and failures of these operations in a cleaner way</a:t>
+            </a:r>
+          </a:p>
+          <a:p>
+            <a:r>
+              <a:rPr lang="en-US" dirty="0"/>
+              <a:t>Promises may be pending, fulfilled, or rejected </a:t>
+            </a:r>
+          </a:p>
+        </p:txBody>
+      </p:sp>
+      <p:pic>
+        <p:nvPicPr>
+          <p:cNvPr id="5" name="Picture 4">
+            <a:extLst>
+              <a:ext uri="{FF2B5EF4-FFF2-40B4-BE49-F238E27FC236}">
+                <a16:creationId xmlns:a16="http://schemas.microsoft.com/office/drawing/2014/main" id="{256F1220-E7EF-87AD-5102-B6A733A223A2}"/>
+              </a:ext>
+            </a:extLst>
+          </p:cNvPr>
+          <p:cNvPicPr>
+            <a:picLocks noChangeAspect="1"/>
+          </p:cNvPicPr>
+          <p:nvPr/>
+        </p:nvPicPr>
+        <p:blipFill>
+          <a:blip r:embed="rId2"/>
+          <a:stretch>
+            <a:fillRect/>
+          </a:stretch>
+        </p:blipFill>
+        <p:spPr>
+          <a:xfrm>
+            <a:off x="6934701" y="2390630"/>
+            <a:ext cx="3915321" cy="2076740"/>
+          </a:xfrm>
+          <a:prstGeom prst="rect">
+            <a:avLst/>
+          </a:prstGeom>
+        </p:spPr>
+      </p:pic>
+      <p:pic>
+        <p:nvPicPr>
+          <p:cNvPr id="7" name="Picture 6">
+            <a:extLst>
+              <a:ext uri="{FF2B5EF4-FFF2-40B4-BE49-F238E27FC236}">
+                <a16:creationId xmlns:a16="http://schemas.microsoft.com/office/drawing/2014/main" id="{2C3C9B61-3AED-0529-9936-DA6E10B1FD8D}"/>
+              </a:ext>
+            </a:extLst>
+          </p:cNvPr>
+          <p:cNvPicPr>
+            <a:picLocks noChangeAspect="1"/>
+          </p:cNvPicPr>
+          <p:nvPr/>
+        </p:nvPicPr>
+        <p:blipFill>
+          <a:blip r:embed="rId3"/>
+          <a:stretch>
+            <a:fillRect/>
+          </a:stretch>
+        </p:blipFill>
+        <p:spPr>
+          <a:xfrm>
+            <a:off x="6963279" y="4646423"/>
+            <a:ext cx="3858163" cy="1648055"/>
+          </a:xfrm>
+          <a:prstGeom prst="rect">
+            <a:avLst/>
+          </a:prstGeom>
+        </p:spPr>
+      </p:pic>
+    </p:spTree>
+    <p:extLst>
+      <p:ext uri="{BB962C8B-B14F-4D97-AF65-F5344CB8AC3E}">
+        <p14:creationId xmlns:p14="http://schemas.microsoft.com/office/powerpoint/2010/main" val="2670149110"/>
+      </p:ext>
+    </p:extLst>
+  </p:cSld>
+  <p:clrMapOvr>
+    <a:masterClrMapping/>
+  </p:clrMapOvr>
+</p:sld>
+</file>
+
+<file path=ppt/slides/slide45.xml><?xml version="1.0" encoding="utf-8"?>
+<p:sld xmlns:a="http://schemas.openxmlformats.org/drawingml/2006/main" xmlns:r="http://schemas.openxmlformats.org/officeDocument/2006/relationships" xmlns:p="http://schemas.openxmlformats.org/presentationml/2006/main">
+  <p:cSld>
+    <p:spTree>
+      <p:nvGrpSpPr>
+        <p:cNvPr id="1" name=""/>
+        <p:cNvGrpSpPr/>
+        <p:nvPr/>
+      </p:nvGrpSpPr>
+      <p:grpSpPr>
+        <a:xfrm>
+          <a:off x="0" y="0"/>
+          <a:ext cx="0" cy="0"/>
+          <a:chOff x="0" y="0"/>
+          <a:chExt cx="0" cy="0"/>
+        </a:xfrm>
+      </p:grpSpPr>
+      <p:sp>
+        <p:nvSpPr>
+          <p:cNvPr id="2" name="Title 1">
+            <a:extLst>
+              <a:ext uri="{FF2B5EF4-FFF2-40B4-BE49-F238E27FC236}">
+                <a16:creationId xmlns:a16="http://schemas.microsoft.com/office/drawing/2014/main" id="{F1B440AE-88C9-68B2-DC9C-638EB2101EE1}"/>
+              </a:ext>
+            </a:extLst>
+          </p:cNvPr>
+          <p:cNvSpPr>
+            <a:spLocks noGrp="1"/>
+          </p:cNvSpPr>
+          <p:nvPr>
+            <p:ph type="title"/>
+          </p:nvPr>
+        </p:nvSpPr>
+        <p:spPr/>
+        <p:txBody>
+          <a:bodyPr/>
+          <a:lstStyle/>
+          <a:p>
+            <a:r>
+              <a:rPr lang="en-US" dirty="0"/>
+              <a:t>The Fetch API</a:t>
+            </a:r>
+          </a:p>
+        </p:txBody>
+      </p:sp>
+      <p:sp>
+        <p:nvSpPr>
+          <p:cNvPr id="3" name="Content Placeholder 2">
+            <a:extLst>
+              <a:ext uri="{FF2B5EF4-FFF2-40B4-BE49-F238E27FC236}">
+                <a16:creationId xmlns:a16="http://schemas.microsoft.com/office/drawing/2014/main" id="{F0B5BA18-E500-0580-04E6-4A387C79BE3C}"/>
+              </a:ext>
+            </a:extLst>
+          </p:cNvPr>
+          <p:cNvSpPr>
+            <a:spLocks noGrp="1"/>
+          </p:cNvSpPr>
+          <p:nvPr>
+            <p:ph idx="1"/>
+          </p:nvPr>
+        </p:nvSpPr>
+        <p:spPr>
+          <a:xfrm>
+            <a:off x="581193" y="2180496"/>
+            <a:ext cx="5287980" cy="3678303"/>
+          </a:xfrm>
+        </p:spPr>
+        <p:txBody>
+          <a:bodyPr/>
+          <a:lstStyle/>
+          <a:p>
+            <a:r>
+              <a:rPr lang="en-US" dirty="0"/>
+              <a:t>Definition: The </a:t>
+            </a:r>
+            <a:r>
+              <a:rPr lang="en-US" dirty="0">
+                <a:solidFill>
+                  <a:schemeClr val="accent2"/>
+                </a:solidFill>
+              </a:rPr>
+              <a:t>Fetch API </a:t>
+            </a:r>
+            <a:r>
+              <a:rPr lang="en-US" dirty="0"/>
+              <a:t>is a modern JavaScript interface for making HTTP requests to servers</a:t>
+            </a:r>
+          </a:p>
+          <a:p>
+            <a:pPr lvl="1"/>
+            <a:r>
+              <a:rPr lang="en-US" dirty="0"/>
+              <a:t>Let's us send and retrieve data asynchronously </a:t>
+            </a:r>
+          </a:p>
+          <a:p>
+            <a:pPr lvl="1"/>
+            <a:r>
+              <a:rPr lang="en-US" dirty="0"/>
+              <a:t>Uses promises</a:t>
+            </a:r>
+          </a:p>
+        </p:txBody>
+      </p:sp>
+      <p:pic>
+        <p:nvPicPr>
+          <p:cNvPr id="5" name="Picture 4">
+            <a:extLst>
+              <a:ext uri="{FF2B5EF4-FFF2-40B4-BE49-F238E27FC236}">
+                <a16:creationId xmlns:a16="http://schemas.microsoft.com/office/drawing/2014/main" id="{A7E74090-258F-2F40-4DD4-3ECE50D05BF2}"/>
+              </a:ext>
+            </a:extLst>
+          </p:cNvPr>
+          <p:cNvPicPr>
+            <a:picLocks noChangeAspect="1"/>
+          </p:cNvPicPr>
+          <p:nvPr/>
+        </p:nvPicPr>
+        <p:blipFill>
+          <a:blip r:embed="rId2"/>
+          <a:stretch>
+            <a:fillRect/>
+          </a:stretch>
+        </p:blipFill>
+        <p:spPr>
+          <a:xfrm>
+            <a:off x="6322829" y="2180496"/>
+            <a:ext cx="5056955" cy="4124611"/>
+          </a:xfrm>
+          <a:prstGeom prst="rect">
+            <a:avLst/>
+          </a:prstGeom>
+        </p:spPr>
+      </p:pic>
+    </p:spTree>
+    <p:extLst>
+      <p:ext uri="{BB962C8B-B14F-4D97-AF65-F5344CB8AC3E}">
+        <p14:creationId xmlns:p14="http://schemas.microsoft.com/office/powerpoint/2010/main" val="1620391189"/>
+      </p:ext>
+    </p:extLst>
+  </p:cSld>
+  <p:clrMapOvr>
+    <a:masterClrMapping/>
+  </p:clrMapOvr>
+</p:sld>
+</file>
+
+<file path=ppt/slides/slide46.xml><?xml version="1.0" encoding="utf-8"?>
+<p:sld xmlns:a="http://schemas.openxmlformats.org/drawingml/2006/main" xmlns:r="http://schemas.openxmlformats.org/officeDocument/2006/relationships" xmlns:p="http://schemas.openxmlformats.org/presentationml/2006/main">
+  <p:cSld>
+    <p:spTree>
+      <p:nvGrpSpPr>
+        <p:cNvPr id="1" name=""/>
+        <p:cNvGrpSpPr/>
+        <p:nvPr/>
+      </p:nvGrpSpPr>
+      <p:grpSpPr>
+        <a:xfrm>
+          <a:off x="0" y="0"/>
+          <a:ext cx="0" cy="0"/>
+          <a:chOff x="0" y="0"/>
+          <a:chExt cx="0" cy="0"/>
+        </a:xfrm>
+      </p:grpSpPr>
+      <p:sp>
+        <p:nvSpPr>
+          <p:cNvPr id="2" name="Title 1">
+            <a:extLst>
+              <a:ext uri="{FF2B5EF4-FFF2-40B4-BE49-F238E27FC236}">
+                <a16:creationId xmlns:a16="http://schemas.microsoft.com/office/drawing/2014/main" id="{30EB790B-1FB1-F813-608E-DE8AB0B7CE0B}"/>
+              </a:ext>
+            </a:extLst>
+          </p:cNvPr>
+          <p:cNvSpPr>
+            <a:spLocks noGrp="1"/>
+          </p:cNvSpPr>
+          <p:nvPr>
+            <p:ph type="title"/>
+          </p:nvPr>
+        </p:nvSpPr>
+        <p:spPr/>
+        <p:txBody>
+          <a:bodyPr/>
+          <a:lstStyle/>
+          <a:p>
+            <a:r>
+              <a:rPr lang="en-US" dirty="0" err="1"/>
+              <a:t>Asnyc</a:t>
+            </a:r>
+            <a:r>
+              <a:rPr lang="en-US" dirty="0"/>
+              <a:t>/Await</a:t>
+            </a:r>
+          </a:p>
+        </p:txBody>
+      </p:sp>
+      <p:sp>
+        <p:nvSpPr>
+          <p:cNvPr id="3" name="Content Placeholder 2">
+            <a:extLst>
+              <a:ext uri="{FF2B5EF4-FFF2-40B4-BE49-F238E27FC236}">
+                <a16:creationId xmlns:a16="http://schemas.microsoft.com/office/drawing/2014/main" id="{6FE15881-78D8-76A2-EC0D-603229FA06B2}"/>
+              </a:ext>
+            </a:extLst>
+          </p:cNvPr>
+          <p:cNvSpPr>
+            <a:spLocks noGrp="1"/>
+          </p:cNvSpPr>
+          <p:nvPr>
+            <p:ph idx="1"/>
+          </p:nvPr>
+        </p:nvSpPr>
+        <p:spPr>
+          <a:xfrm>
+            <a:off x="581193" y="2180496"/>
+            <a:ext cx="4607496" cy="3678303"/>
+          </a:xfrm>
+        </p:spPr>
+        <p:txBody>
+          <a:bodyPr/>
+          <a:lstStyle/>
+          <a:p>
+            <a:r>
+              <a:rPr lang="en-US" dirty="0"/>
+              <a:t>Async/Await – is a modern syntax for working with asynchronous code in a way that looks and behaves more like synchronous code</a:t>
+            </a:r>
+          </a:p>
+          <a:p>
+            <a:r>
+              <a:rPr lang="en-US" dirty="0"/>
+              <a:t>Syntactical Sugar</a:t>
+            </a:r>
+          </a:p>
+        </p:txBody>
+      </p:sp>
+      <p:pic>
+        <p:nvPicPr>
+          <p:cNvPr id="5" name="Picture 4">
+            <a:extLst>
+              <a:ext uri="{FF2B5EF4-FFF2-40B4-BE49-F238E27FC236}">
+                <a16:creationId xmlns:a16="http://schemas.microsoft.com/office/drawing/2014/main" id="{79088AFD-1A96-7397-565B-22E7389D5D98}"/>
+              </a:ext>
+            </a:extLst>
+          </p:cNvPr>
+          <p:cNvPicPr>
+            <a:picLocks noChangeAspect="1"/>
+          </p:cNvPicPr>
+          <p:nvPr/>
+        </p:nvPicPr>
+        <p:blipFill>
+          <a:blip r:embed="rId2"/>
+          <a:stretch>
+            <a:fillRect/>
+          </a:stretch>
+        </p:blipFill>
+        <p:spPr>
+          <a:xfrm>
+            <a:off x="5625325" y="2071512"/>
+            <a:ext cx="5811061" cy="3896269"/>
+          </a:xfrm>
+          <a:prstGeom prst="rect">
+            <a:avLst/>
+          </a:prstGeom>
+        </p:spPr>
+      </p:pic>
+    </p:spTree>
+    <p:extLst>
+      <p:ext uri="{BB962C8B-B14F-4D97-AF65-F5344CB8AC3E}">
+        <p14:creationId xmlns:p14="http://schemas.microsoft.com/office/powerpoint/2010/main" val="1615872724"/>
+      </p:ext>
+    </p:extLst>
+  </p:cSld>
+  <p:clrMapOvr>
+    <a:masterClrMapping/>
+  </p:clrMapOvr>
+</p:sld>
+</file>
+
+<file path=ppt/slides/slide47.xml><?xml version="1.0" encoding="utf-8"?>
+<p:sld xmlns:a="http://schemas.openxmlformats.org/drawingml/2006/main" xmlns:r="http://schemas.openxmlformats.org/officeDocument/2006/relationships" xmlns:p="http://schemas.openxmlformats.org/presentationml/2006/main">
+  <p:cSld>
+    <p:spTree>
+      <p:nvGrpSpPr>
+        <p:cNvPr id="1" name="">
+          <a:extLst>
+            <a:ext uri="{FF2B5EF4-FFF2-40B4-BE49-F238E27FC236}">
+              <a16:creationId xmlns:a16="http://schemas.microsoft.com/office/drawing/2014/main" id="{A729D020-B51A-E46D-4D85-9D0BB1481DEF}"/>
+            </a:ext>
+          </a:extLst>
+        </p:cNvPr>
+        <p:cNvGrpSpPr/>
+        <p:nvPr/>
+      </p:nvGrpSpPr>
+      <p:grpSpPr>
+        <a:xfrm>
+          <a:off x="0" y="0"/>
+          <a:ext cx="0" cy="0"/>
+          <a:chOff x="0" y="0"/>
+          <a:chExt cx="0" cy="0"/>
+        </a:xfrm>
+      </p:grpSpPr>
+      <p:sp>
+        <p:nvSpPr>
+          <p:cNvPr id="2" name="Title 1">
+            <a:extLst>
+              <a:ext uri="{FF2B5EF4-FFF2-40B4-BE49-F238E27FC236}">
+                <a16:creationId xmlns:a16="http://schemas.microsoft.com/office/drawing/2014/main" id="{48CA0E3C-14B8-A72D-C375-C34D252D6311}"/>
+              </a:ext>
+            </a:extLst>
+          </p:cNvPr>
+          <p:cNvSpPr>
+            <a:spLocks noGrp="1"/>
+          </p:cNvSpPr>
+          <p:nvPr>
+            <p:ph type="title"/>
+          </p:nvPr>
+        </p:nvSpPr>
+        <p:spPr/>
+        <p:txBody>
+          <a:bodyPr/>
+          <a:lstStyle/>
+          <a:p>
+            <a:r>
+              <a:rPr lang="en-US" dirty="0"/>
+              <a:t>Challenge – Complete Your mini-Project</a:t>
+            </a:r>
+          </a:p>
+        </p:txBody>
+      </p:sp>
+      <p:sp>
+        <p:nvSpPr>
+          <p:cNvPr id="3" name="Content Placeholder 2">
+            <a:extLst>
+              <a:ext uri="{FF2B5EF4-FFF2-40B4-BE49-F238E27FC236}">
+                <a16:creationId xmlns:a16="http://schemas.microsoft.com/office/drawing/2014/main" id="{A9DBC692-24EF-D1B0-1A6D-A04772642CFA}"/>
+              </a:ext>
+            </a:extLst>
+          </p:cNvPr>
+          <p:cNvSpPr>
+            <a:spLocks noGrp="1"/>
+          </p:cNvSpPr>
+          <p:nvPr>
+            <p:ph idx="1"/>
+          </p:nvPr>
+        </p:nvSpPr>
+        <p:spPr>
+          <a:xfrm>
+            <a:off x="581192" y="2475925"/>
+            <a:ext cx="5317584" cy="1681246"/>
+          </a:xfrm>
+        </p:spPr>
+        <p:txBody>
+          <a:bodyPr/>
+          <a:lstStyle/>
+          <a:p>
+            <a:r>
+              <a:rPr lang="en-US" dirty="0"/>
+              <a:t>Use your knowledge of fetch to include a public API in your project</a:t>
+            </a:r>
+          </a:p>
+        </p:txBody>
+      </p:sp>
+      <p:sp>
+        <p:nvSpPr>
+          <p:cNvPr id="6" name="TextBox 5">
+            <a:extLst>
+              <a:ext uri="{FF2B5EF4-FFF2-40B4-BE49-F238E27FC236}">
+                <a16:creationId xmlns:a16="http://schemas.microsoft.com/office/drawing/2014/main" id="{C5F9292C-383C-D5AB-F452-A3AA99EC9E5F}"/>
+              </a:ext>
+            </a:extLst>
+          </p:cNvPr>
+          <p:cNvSpPr txBox="1"/>
+          <p:nvPr/>
+        </p:nvSpPr>
+        <p:spPr>
+          <a:xfrm>
+            <a:off x="1228165" y="2402747"/>
+            <a:ext cx="756938" cy="369332"/>
+          </a:xfrm>
+          <a:prstGeom prst="rect">
+            <a:avLst/>
+          </a:prstGeom>
+          <a:noFill/>
+        </p:spPr>
+        <p:txBody>
+          <a:bodyPr wrap="none" rtlCol="0">
+            <a:spAutoFit/>
+          </a:bodyPr>
+          <a:lstStyle/>
+          <a:p>
+            <a:r>
+              <a:rPr lang="en-US" b="1" dirty="0"/>
+              <a:t>Goal:</a:t>
+            </a:r>
+          </a:p>
+        </p:txBody>
+      </p:sp>
+      <p:sp>
+        <p:nvSpPr>
+          <p:cNvPr id="7" name="TextBox 6">
+            <a:extLst>
+              <a:ext uri="{FF2B5EF4-FFF2-40B4-BE49-F238E27FC236}">
+                <a16:creationId xmlns:a16="http://schemas.microsoft.com/office/drawing/2014/main" id="{E5B525C2-157B-D36C-28DB-FFCFE1458893}"/>
+              </a:ext>
+            </a:extLst>
+          </p:cNvPr>
+          <p:cNvSpPr txBox="1"/>
+          <p:nvPr/>
+        </p:nvSpPr>
+        <p:spPr>
+          <a:xfrm>
+            <a:off x="6714565" y="2402747"/>
+            <a:ext cx="4896243" cy="369332"/>
+          </a:xfrm>
+          <a:prstGeom prst="rect">
+            <a:avLst/>
+          </a:prstGeom>
+          <a:noFill/>
+        </p:spPr>
+        <p:txBody>
+          <a:bodyPr wrap="square" rtlCol="0">
+            <a:spAutoFit/>
+          </a:bodyPr>
+          <a:lstStyle/>
+          <a:p>
+            <a:r>
+              <a:rPr lang="en-US" b="1" dirty="0"/>
+              <a:t>Scenario:  			   ?? min</a:t>
+            </a:r>
+          </a:p>
+        </p:txBody>
+      </p:sp>
+      <p:sp>
+        <p:nvSpPr>
+          <p:cNvPr id="8" name="Content Placeholder 2">
+            <a:extLst>
+              <a:ext uri="{FF2B5EF4-FFF2-40B4-BE49-F238E27FC236}">
+                <a16:creationId xmlns:a16="http://schemas.microsoft.com/office/drawing/2014/main" id="{F753F197-8330-8F83-2870-86B612D7DAA5}"/>
+              </a:ext>
+            </a:extLst>
+          </p:cNvPr>
+          <p:cNvSpPr txBox="1">
+            <a:spLocks/>
+          </p:cNvSpPr>
+          <p:nvPr/>
+        </p:nvSpPr>
+        <p:spPr>
+          <a:xfrm>
+            <a:off x="6545749" y="2772079"/>
+            <a:ext cx="4661642" cy="1534107"/>
+          </a:xfrm>
+          <a:prstGeom prst="rect">
+            <a:avLst/>
+          </a:prstGeom>
+        </p:spPr>
+        <p:txBody>
+          <a:bodyPr vert="horz" lIns="91440" tIns="45720" rIns="91440" bIns="45720" rtlCol="0" anchor="ctr">
+            <a:normAutofit/>
+          </a:bodyPr>
+          <a:lstStyle>
+            <a:lvl1pPr marL="306000" indent="-306000" algn="l" defTabSz="457200" rtl="0" eaLnBrk="1" latinLnBrk="0" hangingPunct="1">
+              <a:spcBef>
+                <a:spcPct val="20000"/>
+              </a:spcBef>
+              <a:spcAft>
+                <a:spcPts val="600"/>
+              </a:spcAft>
+              <a:buClr>
+                <a:schemeClr val="accent2"/>
+              </a:buClr>
+              <a:buSzPct val="92000"/>
+              <a:buFont typeface="Wingdings 2" panose="05020102010507070707" pitchFamily="18" charset="2"/>
+              <a:buChar char=""/>
+              <a:defRPr sz="1800" kern="1200">
+                <a:solidFill>
+                  <a:schemeClr val="tx2"/>
+                </a:solidFill>
+                <a:latin typeface="+mn-lt"/>
+                <a:ea typeface="+mn-ea"/>
+                <a:cs typeface="+mn-cs"/>
+              </a:defRPr>
+            </a:lvl1pPr>
+            <a:lvl2pPr marL="630000" indent="-306000" algn="l" defTabSz="457200" rtl="0" eaLnBrk="1" latinLnBrk="0" hangingPunct="1">
+              <a:spcBef>
+                <a:spcPct val="20000"/>
+              </a:spcBef>
+              <a:spcAft>
+                <a:spcPts val="600"/>
+              </a:spcAft>
+              <a:buClr>
+                <a:schemeClr val="accent2"/>
+              </a:buClr>
+              <a:buSzPct val="92000"/>
+              <a:buFont typeface="Wingdings 2" panose="05020102010507070707" pitchFamily="18" charset="2"/>
+              <a:buChar char=""/>
+              <a:defRPr sz="1600" kern="1200">
+                <a:solidFill>
+                  <a:schemeClr val="tx2"/>
+                </a:solidFill>
+                <a:latin typeface="+mn-lt"/>
+                <a:ea typeface="+mn-ea"/>
+                <a:cs typeface="+mn-cs"/>
+              </a:defRPr>
+            </a:lvl2pPr>
+            <a:lvl3pPr marL="900000" indent="-270000" algn="l" defTabSz="457200" rtl="0" eaLnBrk="1" latinLnBrk="0" hangingPunct="1">
+              <a:spcBef>
+                <a:spcPct val="20000"/>
+              </a:spcBef>
+              <a:spcAft>
+                <a:spcPts val="600"/>
+              </a:spcAft>
+              <a:buClr>
+                <a:schemeClr val="accent2"/>
+              </a:buClr>
+              <a:buSzPct val="92000"/>
+              <a:buFont typeface="Wingdings 2" panose="05020102010507070707" pitchFamily="18" charset="2"/>
+              <a:buChar char=""/>
+              <a:defRPr sz="1400" kern="1200">
+                <a:solidFill>
+                  <a:schemeClr val="tx2"/>
+                </a:solidFill>
+                <a:latin typeface="+mn-lt"/>
+                <a:ea typeface="+mn-ea"/>
+                <a:cs typeface="+mn-cs"/>
+              </a:defRPr>
+            </a:lvl3pPr>
+            <a:lvl4pPr marL="1242000" indent="-234000" algn="l" defTabSz="457200" rtl="0" eaLnBrk="1" latinLnBrk="0" hangingPunct="1">
+              <a:spcBef>
+                <a:spcPct val="20000"/>
+              </a:spcBef>
+              <a:spcAft>
+                <a:spcPts val="600"/>
+              </a:spcAft>
+              <a:buClr>
+                <a:schemeClr val="accent2"/>
+              </a:buClr>
+              <a:buSzPct val="92000"/>
+              <a:buFont typeface="Wingdings 2" panose="05020102010507070707" pitchFamily="18" charset="2"/>
+              <a:buChar char=""/>
+              <a:defRPr sz="1200" kern="1200">
+                <a:solidFill>
+                  <a:schemeClr val="tx2"/>
+                </a:solidFill>
+                <a:latin typeface="+mn-lt"/>
+                <a:ea typeface="+mn-ea"/>
+                <a:cs typeface="+mn-cs"/>
+              </a:defRPr>
+            </a:lvl4pPr>
+            <a:lvl5pPr marL="1602000" indent="-234000" algn="l" defTabSz="457200" rtl="0" eaLnBrk="1" latinLnBrk="0" hangingPunct="1">
+              <a:spcBef>
+                <a:spcPct val="20000"/>
+              </a:spcBef>
+              <a:spcAft>
+                <a:spcPts val="600"/>
+              </a:spcAft>
+              <a:buClr>
+                <a:schemeClr val="accent2"/>
+              </a:buClr>
+              <a:buSzPct val="92000"/>
+              <a:buFont typeface="Wingdings 2" panose="05020102010507070707" pitchFamily="18" charset="2"/>
+              <a:buChar char=""/>
+              <a:defRPr sz="1200" kern="1200">
+                <a:solidFill>
+                  <a:schemeClr val="tx2"/>
+                </a:solidFill>
+                <a:latin typeface="+mn-lt"/>
+                <a:ea typeface="+mn-ea"/>
+                <a:cs typeface="+mn-cs"/>
+              </a:defRPr>
+            </a:lvl5pPr>
+            <a:lvl6pPr marL="1900000" indent="-228600" algn="l" defTabSz="457200" rtl="0" eaLnBrk="1" latinLnBrk="0" hangingPunct="1">
+              <a:spcBef>
+                <a:spcPct val="20000"/>
+              </a:spcBef>
+              <a:spcAft>
+                <a:spcPts val="600"/>
+              </a:spcAft>
+              <a:buClr>
+                <a:schemeClr val="accent2"/>
+              </a:buClr>
+              <a:buSzPct val="92000"/>
+              <a:buFont typeface="Wingdings 2" panose="05020102010507070707" pitchFamily="18" charset="2"/>
+              <a:buChar char=""/>
+              <a:defRPr sz="1200" kern="1200">
+                <a:solidFill>
+                  <a:schemeClr val="tx2"/>
+                </a:solidFill>
+                <a:latin typeface="+mn-lt"/>
+                <a:ea typeface="+mn-ea"/>
+                <a:cs typeface="+mn-cs"/>
+              </a:defRPr>
+            </a:lvl6pPr>
+            <a:lvl7pPr marL="2200000" indent="-228600" algn="l" defTabSz="457200" rtl="0" eaLnBrk="1" latinLnBrk="0" hangingPunct="1">
+              <a:spcBef>
+                <a:spcPct val="20000"/>
+              </a:spcBef>
+              <a:spcAft>
+                <a:spcPts val="600"/>
+              </a:spcAft>
+              <a:buClr>
+                <a:schemeClr val="accent2"/>
+              </a:buClr>
+              <a:buSzPct val="92000"/>
+              <a:buFont typeface="Wingdings 2" panose="05020102010507070707" pitchFamily="18" charset="2"/>
+              <a:buChar char=""/>
+              <a:defRPr sz="1200" kern="1200">
+                <a:solidFill>
+                  <a:schemeClr val="tx2"/>
+                </a:solidFill>
+                <a:latin typeface="+mn-lt"/>
+                <a:ea typeface="+mn-ea"/>
+                <a:cs typeface="+mn-cs"/>
+              </a:defRPr>
+            </a:lvl7pPr>
+            <a:lvl8pPr marL="2500000" indent="-228600" algn="l" defTabSz="457200" rtl="0" eaLnBrk="1" latinLnBrk="0" hangingPunct="1">
+              <a:spcBef>
+                <a:spcPct val="20000"/>
+              </a:spcBef>
+              <a:spcAft>
+                <a:spcPts val="600"/>
+              </a:spcAft>
+              <a:buClr>
+                <a:schemeClr val="accent2"/>
+              </a:buClr>
+              <a:buSzPct val="92000"/>
+              <a:buFont typeface="Wingdings 2" panose="05020102010507070707" pitchFamily="18" charset="2"/>
+              <a:buChar char=""/>
+              <a:defRPr sz="1200" kern="1200">
+                <a:solidFill>
+                  <a:schemeClr val="tx2"/>
+                </a:solidFill>
+                <a:latin typeface="+mn-lt"/>
+                <a:ea typeface="+mn-ea"/>
+                <a:cs typeface="+mn-cs"/>
+              </a:defRPr>
+            </a:lvl8pPr>
+            <a:lvl9pPr marL="2800000" indent="-228600" algn="l" defTabSz="457200" rtl="0" eaLnBrk="1" latinLnBrk="0" hangingPunct="1">
+              <a:spcBef>
+                <a:spcPct val="20000"/>
+              </a:spcBef>
+              <a:spcAft>
+                <a:spcPts val="600"/>
+              </a:spcAft>
+              <a:buClr>
+                <a:schemeClr val="accent2"/>
+              </a:buClr>
+              <a:buSzPct val="92000"/>
+              <a:buFont typeface="Wingdings 2" panose="05020102010507070707" pitchFamily="18" charset="2"/>
+              <a:buChar char=""/>
+              <a:defRPr sz="1200" kern="1200">
+                <a:solidFill>
+                  <a:schemeClr val="tx2"/>
+                </a:solidFill>
+                <a:latin typeface="+mn-lt"/>
+                <a:ea typeface="+mn-ea"/>
+                <a:cs typeface="+mn-cs"/>
+              </a:defRPr>
+            </a:lvl9pPr>
+          </a:lstStyle>
+          <a:p>
+            <a:r>
+              <a:rPr lang="en-US" dirty="0"/>
+              <a:t>Your organization needs you to continue work on the product launch page. </a:t>
+            </a:r>
+          </a:p>
+          <a:p>
+            <a:r>
+              <a:rPr lang="en-US" dirty="0"/>
+              <a:t>Use a public API to include data on the page</a:t>
+            </a:r>
+          </a:p>
+        </p:txBody>
+      </p:sp>
+    </p:spTree>
+    <p:extLst>
+      <p:ext uri="{BB962C8B-B14F-4D97-AF65-F5344CB8AC3E}">
+        <p14:creationId xmlns:p14="http://schemas.microsoft.com/office/powerpoint/2010/main" val="1851066554"/>
       </p:ext>
     </p:extLst>
   </p:cSld>

--- a/Week_1/004-JavaScript/JavaScript.pptx
+++ b/Week_1/004-JavaScript/JavaScript.pptx
@@ -41,17 +41,18 @@
     <p:sldId id="294" r:id="rId35"/>
     <p:sldId id="295" r:id="rId36"/>
     <p:sldId id="296" r:id="rId37"/>
-    <p:sldId id="297" r:id="rId38"/>
-    <p:sldId id="299" r:id="rId39"/>
-    <p:sldId id="300" r:id="rId40"/>
-    <p:sldId id="301" r:id="rId41"/>
-    <p:sldId id="302" r:id="rId42"/>
-    <p:sldId id="303" r:id="rId43"/>
-    <p:sldId id="304" r:id="rId44"/>
-    <p:sldId id="305" r:id="rId45"/>
-    <p:sldId id="306" r:id="rId46"/>
-    <p:sldId id="307" r:id="rId47"/>
-    <p:sldId id="308" r:id="rId48"/>
+    <p:sldId id="309" r:id="rId38"/>
+    <p:sldId id="297" r:id="rId39"/>
+    <p:sldId id="299" r:id="rId40"/>
+    <p:sldId id="300" r:id="rId41"/>
+    <p:sldId id="301" r:id="rId42"/>
+    <p:sldId id="302" r:id="rId43"/>
+    <p:sldId id="303" r:id="rId44"/>
+    <p:sldId id="304" r:id="rId45"/>
+    <p:sldId id="305" r:id="rId46"/>
+    <p:sldId id="306" r:id="rId47"/>
+    <p:sldId id="307" r:id="rId48"/>
+    <p:sldId id="308" r:id="rId49"/>
   </p:sldIdLst>
   <p:sldSz cx="12192000" cy="6858000"/>
   <p:notesSz cx="6858000" cy="9144000"/>
@@ -8632,6 +8633,13 @@
               <a:t>Strict Mode is enabled by default</a:t>
             </a:r>
           </a:p>
+          <a:p>
+            <a:pPr lvl="1"/>
+            <a:r>
+              <a:rPr lang="en-US" dirty="0"/>
+              <a:t>Need to apply ‘type’ attribute with a value of ‘module’</a:t>
+            </a:r>
+          </a:p>
         </p:txBody>
       </p:sp>
       <p:pic>
@@ -8656,7 +8664,7 @@
         </p:blipFill>
         <p:spPr>
           <a:xfrm>
-            <a:off x="6651023" y="1975900"/>
+            <a:off x="6976015" y="1933785"/>
             <a:ext cx="4078385" cy="2441996"/>
           </a:xfrm>
           <a:prstGeom prst="rect">
@@ -8686,8 +8694,38 @@
         </p:blipFill>
         <p:spPr>
           <a:xfrm>
-            <a:off x="6326030" y="4677840"/>
+            <a:off x="6326030" y="4487008"/>
             <a:ext cx="4728370" cy="1668836"/>
+          </a:xfrm>
+          <a:prstGeom prst="rect">
+            <a:avLst/>
+          </a:prstGeom>
+        </p:spPr>
+      </p:pic>
+      <p:pic>
+        <p:nvPicPr>
+          <p:cNvPr id="9" name="Picture 8">
+            <a:extLst>
+              <a:ext uri="{FF2B5EF4-FFF2-40B4-BE49-F238E27FC236}">
+                <a16:creationId xmlns:a16="http://schemas.microsoft.com/office/drawing/2014/main" id="{86D803CA-C5EF-1A02-432F-C8A04E83D26A}"/>
+              </a:ext>
+            </a:extLst>
+          </p:cNvPr>
+          <p:cNvPicPr>
+            <a:picLocks noChangeAspect="1"/>
+          </p:cNvPicPr>
+          <p:nvPr/>
+        </p:nvPicPr>
+        <p:blipFill>
+          <a:blip r:embed="rId4"/>
+          <a:stretch>
+            <a:fillRect/>
+          </a:stretch>
+        </p:blipFill>
+        <p:spPr>
+          <a:xfrm>
+            <a:off x="6014525" y="6308393"/>
+            <a:ext cx="5039875" cy="326323"/>
           </a:xfrm>
           <a:prstGeom prst="rect">
             <a:avLst/>
@@ -10258,6 +10296,94 @@
 </file>
 
 <file path=ppt/slides/slide37.xml><?xml version="1.0" encoding="utf-8"?>
+<p:sld xmlns:a="http://schemas.openxmlformats.org/drawingml/2006/main" xmlns:r="http://schemas.openxmlformats.org/officeDocument/2006/relationships" xmlns:p="http://schemas.openxmlformats.org/presentationml/2006/main">
+  <p:cSld>
+    <p:spTree>
+      <p:nvGrpSpPr>
+        <p:cNvPr id="1" name=""/>
+        <p:cNvGrpSpPr/>
+        <p:nvPr/>
+      </p:nvGrpSpPr>
+      <p:grpSpPr>
+        <a:xfrm>
+          <a:off x="0" y="0"/>
+          <a:ext cx="0" cy="0"/>
+          <a:chOff x="0" y="0"/>
+          <a:chExt cx="0" cy="0"/>
+        </a:xfrm>
+      </p:grpSpPr>
+      <p:sp>
+        <p:nvSpPr>
+          <p:cNvPr id="2" name="Title 1">
+            <a:extLst>
+              <a:ext uri="{FF2B5EF4-FFF2-40B4-BE49-F238E27FC236}">
+                <a16:creationId xmlns:a16="http://schemas.microsoft.com/office/drawing/2014/main" id="{4ECD0FD7-AD69-D04D-BB7B-F4F2CD34A0A8}"/>
+              </a:ext>
+            </a:extLst>
+          </p:cNvPr>
+          <p:cNvSpPr>
+            <a:spLocks noGrp="1"/>
+          </p:cNvSpPr>
+          <p:nvPr>
+            <p:ph type="title"/>
+          </p:nvPr>
+        </p:nvSpPr>
+        <p:spPr/>
+        <p:txBody>
+          <a:bodyPr/>
+          <a:lstStyle/>
+          <a:p>
+            <a:r>
+              <a:rPr lang="en-US" dirty="0"/>
+              <a:t>Working With Dates</a:t>
+            </a:r>
+          </a:p>
+        </p:txBody>
+      </p:sp>
+      <p:pic>
+        <p:nvPicPr>
+          <p:cNvPr id="5" name="Picture 4">
+            <a:extLst>
+              <a:ext uri="{FF2B5EF4-FFF2-40B4-BE49-F238E27FC236}">
+                <a16:creationId xmlns:a16="http://schemas.microsoft.com/office/drawing/2014/main" id="{59C4C130-03D8-28CD-EB8C-A558CA1985B4}"/>
+              </a:ext>
+            </a:extLst>
+          </p:cNvPr>
+          <p:cNvPicPr>
+            <a:picLocks noChangeAspect="1"/>
+          </p:cNvPicPr>
+          <p:nvPr/>
+        </p:nvPicPr>
+        <p:blipFill>
+          <a:blip r:embed="rId2"/>
+          <a:stretch>
+            <a:fillRect/>
+          </a:stretch>
+        </p:blipFill>
+        <p:spPr>
+          <a:xfrm>
+            <a:off x="2646266" y="2436703"/>
+            <a:ext cx="6899467" cy="3719141"/>
+          </a:xfrm>
+          <a:prstGeom prst="rect">
+            <a:avLst/>
+          </a:prstGeom>
+        </p:spPr>
+      </p:pic>
+    </p:spTree>
+    <p:extLst>
+      <p:ext uri="{BB962C8B-B14F-4D97-AF65-F5344CB8AC3E}">
+        <p14:creationId xmlns:p14="http://schemas.microsoft.com/office/powerpoint/2010/main" val="2622947897"/>
+      </p:ext>
+    </p:extLst>
+  </p:cSld>
+  <p:clrMapOvr>
+    <a:masterClrMapping/>
+  </p:clrMapOvr>
+</p:sld>
+</file>
+
+<file path=ppt/slides/slide38.xml><?xml version="1.0" encoding="utf-8"?>
 <p:sld xmlns:a="http://schemas.openxmlformats.org/drawingml/2006/main" xmlns:r="http://schemas.openxmlformats.org/officeDocument/2006/relationships" xmlns:p="http://schemas.openxmlformats.org/presentationml/2006/main">
   <p:cSld>
     <p:spTree>
@@ -10671,7 +10797,7 @@
 </p:sld>
 </file>
 
-<file path=ppt/slides/slide38.xml><?xml version="1.0" encoding="utf-8"?>
+<file path=ppt/slides/slide39.xml><?xml version="1.0" encoding="utf-8"?>
 <p:sld xmlns:a="http://schemas.openxmlformats.org/drawingml/2006/main" xmlns:r="http://schemas.openxmlformats.org/officeDocument/2006/relationships" xmlns:p="http://schemas.openxmlformats.org/presentationml/2006/main">
   <p:cSld>
     <p:spTree>
@@ -10842,7 +10968,165 @@
 </p:sld>
 </file>
 
-<file path=ppt/slides/slide39.xml><?xml version="1.0" encoding="utf-8"?>
+<file path=ppt/slides/slide4.xml><?xml version="1.0" encoding="utf-8"?>
+<p:sld xmlns:a="http://schemas.openxmlformats.org/drawingml/2006/main" xmlns:r="http://schemas.openxmlformats.org/officeDocument/2006/relationships" xmlns:p="http://schemas.openxmlformats.org/presentationml/2006/main">
+  <p:cSld>
+    <p:spTree>
+      <p:nvGrpSpPr>
+        <p:cNvPr id="1" name=""/>
+        <p:cNvGrpSpPr/>
+        <p:nvPr/>
+      </p:nvGrpSpPr>
+      <p:grpSpPr>
+        <a:xfrm>
+          <a:off x="0" y="0"/>
+          <a:ext cx="0" cy="0"/>
+          <a:chOff x="0" y="0"/>
+          <a:chExt cx="0" cy="0"/>
+        </a:xfrm>
+      </p:grpSpPr>
+      <p:sp>
+        <p:nvSpPr>
+          <p:cNvPr id="2" name="Title 1">
+            <a:extLst>
+              <a:ext uri="{FF2B5EF4-FFF2-40B4-BE49-F238E27FC236}">
+                <a16:creationId xmlns:a16="http://schemas.microsoft.com/office/drawing/2014/main" id="{0FC03B4C-6A3D-06DE-4B09-C885B2761EB4}"/>
+              </a:ext>
+            </a:extLst>
+          </p:cNvPr>
+          <p:cNvSpPr>
+            <a:spLocks noGrp="1"/>
+          </p:cNvSpPr>
+          <p:nvPr>
+            <p:ph type="title"/>
+          </p:nvPr>
+        </p:nvSpPr>
+        <p:spPr/>
+        <p:txBody>
+          <a:bodyPr/>
+          <a:lstStyle/>
+          <a:p>
+            <a:r>
+              <a:rPr lang="en-US" dirty="0"/>
+              <a:t>Variables</a:t>
+            </a:r>
+          </a:p>
+        </p:txBody>
+      </p:sp>
+      <p:sp>
+        <p:nvSpPr>
+          <p:cNvPr id="3" name="Content Placeholder 2">
+            <a:extLst>
+              <a:ext uri="{FF2B5EF4-FFF2-40B4-BE49-F238E27FC236}">
+                <a16:creationId xmlns:a16="http://schemas.microsoft.com/office/drawing/2014/main" id="{A02070B9-9595-3C71-6C18-3743858F5B79}"/>
+              </a:ext>
+            </a:extLst>
+          </p:cNvPr>
+          <p:cNvSpPr>
+            <a:spLocks noGrp="1"/>
+          </p:cNvSpPr>
+          <p:nvPr>
+            <p:ph idx="1"/>
+          </p:nvPr>
+        </p:nvSpPr>
+        <p:spPr>
+          <a:xfrm>
+            <a:off x="581192" y="2110230"/>
+            <a:ext cx="11029615" cy="2536759"/>
+          </a:xfrm>
+        </p:spPr>
+        <p:txBody>
+          <a:bodyPr/>
+          <a:lstStyle/>
+          <a:p>
+            <a:r>
+              <a:rPr lang="en-US" dirty="0"/>
+              <a:t>Definition: </a:t>
+            </a:r>
+            <a:r>
+              <a:rPr lang="en-US" dirty="0">
+                <a:solidFill>
+                  <a:schemeClr val="accent2"/>
+                </a:solidFill>
+              </a:rPr>
+              <a:t>Variable</a:t>
+            </a:r>
+            <a:r>
+              <a:rPr lang="en-US" dirty="0"/>
+              <a:t> – a container for storing data values, such as numbers, text, objects or more.</a:t>
+            </a:r>
+          </a:p>
+          <a:p>
+            <a:pPr lvl="1"/>
+            <a:r>
+              <a:rPr lang="en-US" dirty="0"/>
+              <a:t>Variables let us label and reuse data within our application </a:t>
+            </a:r>
+          </a:p>
+          <a:p>
+            <a:r>
+              <a:rPr lang="en-US" dirty="0"/>
+              <a:t>Let – declares a variable that can be reassigned</a:t>
+            </a:r>
+          </a:p>
+          <a:p>
+            <a:r>
+              <a:rPr lang="en-US" dirty="0"/>
+              <a:t>Const – declares a variable that cannot be reassigned</a:t>
+            </a:r>
+          </a:p>
+          <a:p>
+            <a:r>
+              <a:rPr lang="en-US" dirty="0"/>
+              <a:t>Var – old way of declaring variables (not commonly used now)</a:t>
+            </a:r>
+          </a:p>
+        </p:txBody>
+      </p:sp>
+      <p:pic>
+        <p:nvPicPr>
+          <p:cNvPr id="5" name="Picture 4">
+            <a:extLst>
+              <a:ext uri="{FF2B5EF4-FFF2-40B4-BE49-F238E27FC236}">
+                <a16:creationId xmlns:a16="http://schemas.microsoft.com/office/drawing/2014/main" id="{7EFD9A1F-535C-4896-ADE8-8AC448A1A988}"/>
+              </a:ext>
+            </a:extLst>
+          </p:cNvPr>
+          <p:cNvPicPr>
+            <a:picLocks noChangeAspect="1"/>
+          </p:cNvPicPr>
+          <p:nvPr/>
+        </p:nvPicPr>
+        <p:blipFill>
+          <a:blip r:embed="rId2"/>
+          <a:stretch>
+            <a:fillRect/>
+          </a:stretch>
+        </p:blipFill>
+        <p:spPr>
+          <a:xfrm>
+            <a:off x="3338126" y="5041263"/>
+            <a:ext cx="5515745" cy="1114581"/>
+          </a:xfrm>
+          <a:prstGeom prst="rect">
+            <a:avLst/>
+          </a:prstGeom>
+        </p:spPr>
+      </p:pic>
+    </p:spTree>
+    <p:extLst>
+      <p:ext uri="{BB962C8B-B14F-4D97-AF65-F5344CB8AC3E}">
+        <p14:creationId xmlns:p14="http://schemas.microsoft.com/office/powerpoint/2010/main" val="2782518340"/>
+      </p:ext>
+    </p:extLst>
+  </p:cSld>
+  <p:clrMapOvr>
+    <a:masterClrMapping/>
+  </p:clrMapOvr>
+</p:sld>
+</file>
+
+<file path=ppt/slides/slide40.xml><?xml version="1.0" encoding="utf-8"?>
 <p:sld xmlns:a="http://schemas.openxmlformats.org/drawingml/2006/main" xmlns:r="http://schemas.openxmlformats.org/officeDocument/2006/relationships" xmlns:p="http://schemas.openxmlformats.org/presentationml/2006/main">
   <p:cSld>
     <p:spTree>
@@ -11262,314 +11546,6 @@
 </p:sld>
 </file>
 
-<file path=ppt/slides/slide4.xml><?xml version="1.0" encoding="utf-8"?>
-<p:sld xmlns:a="http://schemas.openxmlformats.org/drawingml/2006/main" xmlns:r="http://schemas.openxmlformats.org/officeDocument/2006/relationships" xmlns:p="http://schemas.openxmlformats.org/presentationml/2006/main">
-  <p:cSld>
-    <p:spTree>
-      <p:nvGrpSpPr>
-        <p:cNvPr id="1" name=""/>
-        <p:cNvGrpSpPr/>
-        <p:nvPr/>
-      </p:nvGrpSpPr>
-      <p:grpSpPr>
-        <a:xfrm>
-          <a:off x="0" y="0"/>
-          <a:ext cx="0" cy="0"/>
-          <a:chOff x="0" y="0"/>
-          <a:chExt cx="0" cy="0"/>
-        </a:xfrm>
-      </p:grpSpPr>
-      <p:sp>
-        <p:nvSpPr>
-          <p:cNvPr id="2" name="Title 1">
-            <a:extLst>
-              <a:ext uri="{FF2B5EF4-FFF2-40B4-BE49-F238E27FC236}">
-                <a16:creationId xmlns:a16="http://schemas.microsoft.com/office/drawing/2014/main" id="{0FC03B4C-6A3D-06DE-4B09-C885B2761EB4}"/>
-              </a:ext>
-            </a:extLst>
-          </p:cNvPr>
-          <p:cNvSpPr>
-            <a:spLocks noGrp="1"/>
-          </p:cNvSpPr>
-          <p:nvPr>
-            <p:ph type="title"/>
-          </p:nvPr>
-        </p:nvSpPr>
-        <p:spPr/>
-        <p:txBody>
-          <a:bodyPr/>
-          <a:lstStyle/>
-          <a:p>
-            <a:r>
-              <a:rPr lang="en-US" dirty="0"/>
-              <a:t>Variables</a:t>
-            </a:r>
-          </a:p>
-        </p:txBody>
-      </p:sp>
-      <p:sp>
-        <p:nvSpPr>
-          <p:cNvPr id="3" name="Content Placeholder 2">
-            <a:extLst>
-              <a:ext uri="{FF2B5EF4-FFF2-40B4-BE49-F238E27FC236}">
-                <a16:creationId xmlns:a16="http://schemas.microsoft.com/office/drawing/2014/main" id="{A02070B9-9595-3C71-6C18-3743858F5B79}"/>
-              </a:ext>
-            </a:extLst>
-          </p:cNvPr>
-          <p:cNvSpPr>
-            <a:spLocks noGrp="1"/>
-          </p:cNvSpPr>
-          <p:nvPr>
-            <p:ph idx="1"/>
-          </p:nvPr>
-        </p:nvSpPr>
-        <p:spPr>
-          <a:xfrm>
-            <a:off x="581192" y="2110230"/>
-            <a:ext cx="11029615" cy="2536759"/>
-          </a:xfrm>
-        </p:spPr>
-        <p:txBody>
-          <a:bodyPr/>
-          <a:lstStyle/>
-          <a:p>
-            <a:r>
-              <a:rPr lang="en-US" dirty="0"/>
-              <a:t>Definition: </a:t>
-            </a:r>
-            <a:r>
-              <a:rPr lang="en-US" dirty="0">
-                <a:solidFill>
-                  <a:schemeClr val="accent2"/>
-                </a:solidFill>
-              </a:rPr>
-              <a:t>Variable</a:t>
-            </a:r>
-            <a:r>
-              <a:rPr lang="en-US" dirty="0"/>
-              <a:t> – a container for storing data values, such as numbers, text, objects or more.</a:t>
-            </a:r>
-          </a:p>
-          <a:p>
-            <a:pPr lvl="1"/>
-            <a:r>
-              <a:rPr lang="en-US" dirty="0"/>
-              <a:t>Variables let us label and reuse data within our application </a:t>
-            </a:r>
-          </a:p>
-          <a:p>
-            <a:r>
-              <a:rPr lang="en-US" dirty="0"/>
-              <a:t>Let – declares a variable that can be reassigned</a:t>
-            </a:r>
-          </a:p>
-          <a:p>
-            <a:r>
-              <a:rPr lang="en-US" dirty="0"/>
-              <a:t>Const – declares a variable that cannot be reassigned</a:t>
-            </a:r>
-          </a:p>
-          <a:p>
-            <a:r>
-              <a:rPr lang="en-US" dirty="0"/>
-              <a:t>Var – old way of declaring variables (not commonly used now)</a:t>
-            </a:r>
-          </a:p>
-        </p:txBody>
-      </p:sp>
-      <p:pic>
-        <p:nvPicPr>
-          <p:cNvPr id="5" name="Picture 4">
-            <a:extLst>
-              <a:ext uri="{FF2B5EF4-FFF2-40B4-BE49-F238E27FC236}">
-                <a16:creationId xmlns:a16="http://schemas.microsoft.com/office/drawing/2014/main" id="{7EFD9A1F-535C-4896-ADE8-8AC448A1A988}"/>
-              </a:ext>
-            </a:extLst>
-          </p:cNvPr>
-          <p:cNvPicPr>
-            <a:picLocks noChangeAspect="1"/>
-          </p:cNvPicPr>
-          <p:nvPr/>
-        </p:nvPicPr>
-        <p:blipFill>
-          <a:blip r:embed="rId2"/>
-          <a:stretch>
-            <a:fillRect/>
-          </a:stretch>
-        </p:blipFill>
-        <p:spPr>
-          <a:xfrm>
-            <a:off x="3338126" y="5041263"/>
-            <a:ext cx="5515745" cy="1114581"/>
-          </a:xfrm>
-          <a:prstGeom prst="rect">
-            <a:avLst/>
-          </a:prstGeom>
-        </p:spPr>
-      </p:pic>
-    </p:spTree>
-    <p:extLst>
-      <p:ext uri="{BB962C8B-B14F-4D97-AF65-F5344CB8AC3E}">
-        <p14:creationId xmlns:p14="http://schemas.microsoft.com/office/powerpoint/2010/main" val="2782518340"/>
-      </p:ext>
-    </p:extLst>
-  </p:cSld>
-  <p:clrMapOvr>
-    <a:masterClrMapping/>
-  </p:clrMapOvr>
-</p:sld>
-</file>
-
-<file path=ppt/slides/slide40.xml><?xml version="1.0" encoding="utf-8"?>
-<p:sld xmlns:a="http://schemas.openxmlformats.org/drawingml/2006/main" xmlns:r="http://schemas.openxmlformats.org/officeDocument/2006/relationships" xmlns:p="http://schemas.openxmlformats.org/presentationml/2006/main">
-  <p:cSld>
-    <p:spTree>
-      <p:nvGrpSpPr>
-        <p:cNvPr id="1" name=""/>
-        <p:cNvGrpSpPr/>
-        <p:nvPr/>
-      </p:nvGrpSpPr>
-      <p:grpSpPr>
-        <a:xfrm>
-          <a:off x="0" y="0"/>
-          <a:ext cx="0" cy="0"/>
-          <a:chOff x="0" y="0"/>
-          <a:chExt cx="0" cy="0"/>
-        </a:xfrm>
-      </p:grpSpPr>
-      <p:sp>
-        <p:nvSpPr>
-          <p:cNvPr id="2" name="Title 1">
-            <a:extLst>
-              <a:ext uri="{FF2B5EF4-FFF2-40B4-BE49-F238E27FC236}">
-                <a16:creationId xmlns:a16="http://schemas.microsoft.com/office/drawing/2014/main" id="{B23F05B8-1205-10BB-E0D5-5741BEB5A5B9}"/>
-              </a:ext>
-            </a:extLst>
-          </p:cNvPr>
-          <p:cNvSpPr>
-            <a:spLocks noGrp="1"/>
-          </p:cNvSpPr>
-          <p:nvPr>
-            <p:ph type="title"/>
-          </p:nvPr>
-        </p:nvSpPr>
-        <p:spPr/>
-        <p:txBody>
-          <a:bodyPr/>
-          <a:lstStyle/>
-          <a:p>
-            <a:r>
-              <a:rPr lang="en-US" dirty="0"/>
-              <a:t>The JavaScript Event Loop</a:t>
-            </a:r>
-          </a:p>
-        </p:txBody>
-      </p:sp>
-      <p:sp>
-        <p:nvSpPr>
-          <p:cNvPr id="3" name="Content Placeholder 2">
-            <a:extLst>
-              <a:ext uri="{FF2B5EF4-FFF2-40B4-BE49-F238E27FC236}">
-                <a16:creationId xmlns:a16="http://schemas.microsoft.com/office/drawing/2014/main" id="{4A7F067C-63C7-271E-CA73-A9B351905495}"/>
-              </a:ext>
-            </a:extLst>
-          </p:cNvPr>
-          <p:cNvSpPr>
-            <a:spLocks noGrp="1"/>
-          </p:cNvSpPr>
-          <p:nvPr>
-            <p:ph idx="1"/>
-          </p:nvPr>
-        </p:nvSpPr>
-        <p:spPr>
-          <a:xfrm>
-            <a:off x="581192" y="2455454"/>
-            <a:ext cx="4107766" cy="3700390"/>
-          </a:xfrm>
-        </p:spPr>
-        <p:txBody>
-          <a:bodyPr>
-            <a:normAutofit lnSpcReduction="10000"/>
-          </a:bodyPr>
-          <a:lstStyle/>
-          <a:p>
-            <a:r>
-              <a:rPr lang="en-US" dirty="0"/>
-              <a:t>JavaScript is considered a ‘blocking’ or ‘single-threaded’ language</a:t>
-            </a:r>
-          </a:p>
-          <a:p>
-            <a:r>
-              <a:rPr lang="en-US" dirty="0"/>
-              <a:t>The call stack – first in, last out structure</a:t>
-            </a:r>
-          </a:p>
-          <a:p>
-            <a:r>
-              <a:rPr lang="en-US" dirty="0"/>
-              <a:t>The event queue – first in, first out structure</a:t>
-            </a:r>
-          </a:p>
-          <a:p>
-            <a:r>
-              <a:rPr lang="en-US" dirty="0"/>
-              <a:t>Our event loop supplies jobs to the call stack from our event queue</a:t>
-            </a:r>
-          </a:p>
-          <a:p>
-            <a:r>
-              <a:rPr lang="en-US" dirty="0"/>
-              <a:t>If an asynchronous job appears, it is sent to the browser’s web APIs for processing</a:t>
-            </a:r>
-          </a:p>
-          <a:p>
-            <a:endParaRPr lang="en-US" dirty="0"/>
-          </a:p>
-        </p:txBody>
-      </p:sp>
-      <p:pic>
-        <p:nvPicPr>
-          <p:cNvPr id="5" name="Picture 4">
-            <a:extLst>
-              <a:ext uri="{FF2B5EF4-FFF2-40B4-BE49-F238E27FC236}">
-                <a16:creationId xmlns:a16="http://schemas.microsoft.com/office/drawing/2014/main" id="{CD024412-B523-00BA-E1E2-27509DC35B8D}"/>
-              </a:ext>
-            </a:extLst>
-          </p:cNvPr>
-          <p:cNvPicPr>
-            <a:picLocks noChangeAspect="1"/>
-          </p:cNvPicPr>
-          <p:nvPr/>
-        </p:nvPicPr>
-        <p:blipFill>
-          <a:blip r:embed="rId2"/>
-          <a:stretch>
-            <a:fillRect/>
-          </a:stretch>
-        </p:blipFill>
-        <p:spPr>
-          <a:xfrm>
-            <a:off x="4901609" y="2265500"/>
-            <a:ext cx="6832772" cy="3593299"/>
-          </a:xfrm>
-          <a:prstGeom prst="rect">
-            <a:avLst/>
-          </a:prstGeom>
-        </p:spPr>
-      </p:pic>
-    </p:spTree>
-    <p:extLst>
-      <p:ext uri="{BB962C8B-B14F-4D97-AF65-F5344CB8AC3E}">
-        <p14:creationId xmlns:p14="http://schemas.microsoft.com/office/powerpoint/2010/main" val="966078369"/>
-      </p:ext>
-    </p:extLst>
-  </p:cSld>
-  <p:clrMapOvr>
-    <a:masterClrMapping/>
-  </p:clrMapOvr>
-</p:sld>
-</file>
-
 <file path=ppt/slides/slide41.xml><?xml version="1.0" encoding="utf-8"?>
 <p:sld xmlns:a="http://schemas.openxmlformats.org/drawingml/2006/main" xmlns:r="http://schemas.openxmlformats.org/officeDocument/2006/relationships" xmlns:p="http://schemas.openxmlformats.org/presentationml/2006/main">
   <p:cSld>
@@ -11592,7 +11568,7 @@
           <p:cNvPr id="2" name="Title 1">
             <a:extLst>
               <a:ext uri="{FF2B5EF4-FFF2-40B4-BE49-F238E27FC236}">
-                <a16:creationId xmlns:a16="http://schemas.microsoft.com/office/drawing/2014/main" id="{7331CBCE-6D21-C8B1-FEB6-1DD06A7B5509}"/>
+                <a16:creationId xmlns:a16="http://schemas.microsoft.com/office/drawing/2014/main" id="{B23F05B8-1205-10BB-E0D5-5741BEB5A5B9}"/>
               </a:ext>
             </a:extLst>
           </p:cNvPr>
@@ -11609,13 +11585,71 @@
           <a:lstStyle/>
           <a:p>
             <a:r>
-              <a:rPr lang="en-US" dirty="0" err="1"/>
-              <a:t>XMLHttpRequests</a:t>
-            </a:r>
-            <a:r>
-              <a:rPr lang="en-US" dirty="0"/>
-              <a:t> and callbacks</a:t>
-            </a:r>
+              <a:rPr lang="en-US" dirty="0"/>
+              <a:t>The JavaScript Event Loop</a:t>
+            </a:r>
+          </a:p>
+        </p:txBody>
+      </p:sp>
+      <p:sp>
+        <p:nvSpPr>
+          <p:cNvPr id="3" name="Content Placeholder 2">
+            <a:extLst>
+              <a:ext uri="{FF2B5EF4-FFF2-40B4-BE49-F238E27FC236}">
+                <a16:creationId xmlns:a16="http://schemas.microsoft.com/office/drawing/2014/main" id="{4A7F067C-63C7-271E-CA73-A9B351905495}"/>
+              </a:ext>
+            </a:extLst>
+          </p:cNvPr>
+          <p:cNvSpPr>
+            <a:spLocks noGrp="1"/>
+          </p:cNvSpPr>
+          <p:nvPr>
+            <p:ph idx="1"/>
+          </p:nvPr>
+        </p:nvSpPr>
+        <p:spPr>
+          <a:xfrm>
+            <a:off x="581192" y="2455454"/>
+            <a:ext cx="4107766" cy="3700390"/>
+          </a:xfrm>
+        </p:spPr>
+        <p:txBody>
+          <a:bodyPr>
+            <a:normAutofit lnSpcReduction="10000"/>
+          </a:bodyPr>
+          <a:lstStyle/>
+          <a:p>
+            <a:r>
+              <a:rPr lang="en-US" dirty="0"/>
+              <a:t>JavaScript is considered a ‘blocking’ or ‘single-threaded’ language</a:t>
+            </a:r>
+          </a:p>
+          <a:p>
+            <a:r>
+              <a:rPr lang="en-US" dirty="0"/>
+              <a:t>The call stack – first in, last out structure</a:t>
+            </a:r>
+          </a:p>
+          <a:p>
+            <a:r>
+              <a:rPr lang="en-US" dirty="0"/>
+              <a:t>The event queue – first in, first out structure</a:t>
+            </a:r>
+          </a:p>
+          <a:p>
+            <a:r>
+              <a:rPr lang="en-US" dirty="0"/>
+              <a:t>Our event loop supplies jobs to the call stack from our event queue</a:t>
+            </a:r>
+          </a:p>
+          <a:p>
+            <a:r>
+              <a:rPr lang="en-US" dirty="0"/>
+              <a:t>If an asynchronous job appears, it is sent to the browser’s web APIs for processing</a:t>
+            </a:r>
+          </a:p>
+          <a:p>
+            <a:endParaRPr lang="en-US" dirty="0"/>
           </a:p>
         </p:txBody>
       </p:sp>
@@ -11624,7 +11658,7 @@
           <p:cNvPr id="5" name="Picture 4">
             <a:extLst>
               <a:ext uri="{FF2B5EF4-FFF2-40B4-BE49-F238E27FC236}">
-                <a16:creationId xmlns:a16="http://schemas.microsoft.com/office/drawing/2014/main" id="{6DBBD86D-9ABC-94D2-BEFF-01D9C2FF3D78}"/>
+                <a16:creationId xmlns:a16="http://schemas.microsoft.com/office/drawing/2014/main" id="{CD024412-B523-00BA-E1E2-27509DC35B8D}"/>
               </a:ext>
             </a:extLst>
           </p:cNvPr>
@@ -11641,95 +11675,18 @@
         </p:blipFill>
         <p:spPr>
           <a:xfrm>
-            <a:off x="1060697" y="2030818"/>
-            <a:ext cx="4366877" cy="4631813"/>
+            <a:off x="4901609" y="2265500"/>
+            <a:ext cx="6832772" cy="3593299"/>
           </a:xfrm>
           <a:prstGeom prst="rect">
             <a:avLst/>
           </a:prstGeom>
         </p:spPr>
       </p:pic>
-      <p:pic>
-        <p:nvPicPr>
-          <p:cNvPr id="7" name="Picture 6">
-            <a:extLst>
-              <a:ext uri="{FF2B5EF4-FFF2-40B4-BE49-F238E27FC236}">
-                <a16:creationId xmlns:a16="http://schemas.microsoft.com/office/drawing/2014/main" id="{5FE29A24-9DC9-7F7C-B858-06C4335279FF}"/>
-              </a:ext>
-            </a:extLst>
-          </p:cNvPr>
-          <p:cNvPicPr>
-            <a:picLocks noChangeAspect="1"/>
-          </p:cNvPicPr>
-          <p:nvPr/>
-        </p:nvPicPr>
-        <p:blipFill>
-          <a:blip r:embed="rId3"/>
-          <a:stretch>
-            <a:fillRect/>
-          </a:stretch>
-        </p:blipFill>
-        <p:spPr>
-          <a:xfrm>
-            <a:off x="5723536" y="4194175"/>
-            <a:ext cx="5887272" cy="1895740"/>
-          </a:xfrm>
-          <a:prstGeom prst="rect">
-            <a:avLst/>
-          </a:prstGeom>
-        </p:spPr>
-      </p:pic>
-      <p:sp>
-        <p:nvSpPr>
-          <p:cNvPr id="8" name="TextBox 7">
-            <a:extLst>
-              <a:ext uri="{FF2B5EF4-FFF2-40B4-BE49-F238E27FC236}">
-                <a16:creationId xmlns:a16="http://schemas.microsoft.com/office/drawing/2014/main" id="{EE2013ED-EF99-8EF1-B3B5-346B9EF78413}"/>
-              </a:ext>
-            </a:extLst>
-          </p:cNvPr>
-          <p:cNvSpPr txBox="1"/>
-          <p:nvPr/>
-        </p:nvSpPr>
-        <p:spPr>
-          <a:xfrm>
-            <a:off x="6096000" y="2488017"/>
-            <a:ext cx="5082417" cy="1200329"/>
-          </a:xfrm>
-          <a:prstGeom prst="rect">
-            <a:avLst/>
-          </a:prstGeom>
-          <a:noFill/>
-        </p:spPr>
-        <p:txBody>
-          <a:bodyPr wrap="square" rtlCol="0">
-            <a:spAutoFit/>
-          </a:bodyPr>
-          <a:lstStyle/>
-          <a:p>
-            <a:r>
-              <a:rPr lang="en-US" dirty="0"/>
-              <a:t>Definition: A </a:t>
-            </a:r>
-            <a:r>
-              <a:rPr lang="en-US" dirty="0">
-                <a:solidFill>
-                  <a:schemeClr val="accent2"/>
-                </a:solidFill>
-              </a:rPr>
-              <a:t>Callback Function </a:t>
-            </a:r>
-            <a:r>
-              <a:rPr lang="en-US" dirty="0"/>
-              <a:t>is a function that is passed as an argument to another function, and is meant to be called later, usually after an operation has completed</a:t>
-            </a:r>
-          </a:p>
-        </p:txBody>
-      </p:sp>
     </p:spTree>
     <p:extLst>
       <p:ext uri="{BB962C8B-B14F-4D97-AF65-F5344CB8AC3E}">
-        <p14:creationId xmlns:p14="http://schemas.microsoft.com/office/powerpoint/2010/main" val="892247919"/>
+        <p14:creationId xmlns:p14="http://schemas.microsoft.com/office/powerpoint/2010/main" val="966078369"/>
       </p:ext>
     </p:extLst>
   </p:cSld>
@@ -11761,6 +11718,175 @@
           <p:cNvPr id="2" name="Title 1">
             <a:extLst>
               <a:ext uri="{FF2B5EF4-FFF2-40B4-BE49-F238E27FC236}">
+                <a16:creationId xmlns:a16="http://schemas.microsoft.com/office/drawing/2014/main" id="{7331CBCE-6D21-C8B1-FEB6-1DD06A7B5509}"/>
+              </a:ext>
+            </a:extLst>
+          </p:cNvPr>
+          <p:cNvSpPr>
+            <a:spLocks noGrp="1"/>
+          </p:cNvSpPr>
+          <p:nvPr>
+            <p:ph type="title"/>
+          </p:nvPr>
+        </p:nvSpPr>
+        <p:spPr/>
+        <p:txBody>
+          <a:bodyPr/>
+          <a:lstStyle/>
+          <a:p>
+            <a:r>
+              <a:rPr lang="en-US" dirty="0" err="1"/>
+              <a:t>XMLHttpRequests</a:t>
+            </a:r>
+            <a:r>
+              <a:rPr lang="en-US" dirty="0"/>
+              <a:t> and callbacks</a:t>
+            </a:r>
+          </a:p>
+        </p:txBody>
+      </p:sp>
+      <p:pic>
+        <p:nvPicPr>
+          <p:cNvPr id="5" name="Picture 4">
+            <a:extLst>
+              <a:ext uri="{FF2B5EF4-FFF2-40B4-BE49-F238E27FC236}">
+                <a16:creationId xmlns:a16="http://schemas.microsoft.com/office/drawing/2014/main" id="{6DBBD86D-9ABC-94D2-BEFF-01D9C2FF3D78}"/>
+              </a:ext>
+            </a:extLst>
+          </p:cNvPr>
+          <p:cNvPicPr>
+            <a:picLocks noChangeAspect="1"/>
+          </p:cNvPicPr>
+          <p:nvPr/>
+        </p:nvPicPr>
+        <p:blipFill>
+          <a:blip r:embed="rId2"/>
+          <a:stretch>
+            <a:fillRect/>
+          </a:stretch>
+        </p:blipFill>
+        <p:spPr>
+          <a:xfrm>
+            <a:off x="1060697" y="2030818"/>
+            <a:ext cx="4366877" cy="4631813"/>
+          </a:xfrm>
+          <a:prstGeom prst="rect">
+            <a:avLst/>
+          </a:prstGeom>
+        </p:spPr>
+      </p:pic>
+      <p:pic>
+        <p:nvPicPr>
+          <p:cNvPr id="7" name="Picture 6">
+            <a:extLst>
+              <a:ext uri="{FF2B5EF4-FFF2-40B4-BE49-F238E27FC236}">
+                <a16:creationId xmlns:a16="http://schemas.microsoft.com/office/drawing/2014/main" id="{5FE29A24-9DC9-7F7C-B858-06C4335279FF}"/>
+              </a:ext>
+            </a:extLst>
+          </p:cNvPr>
+          <p:cNvPicPr>
+            <a:picLocks noChangeAspect="1"/>
+          </p:cNvPicPr>
+          <p:nvPr/>
+        </p:nvPicPr>
+        <p:blipFill>
+          <a:blip r:embed="rId3"/>
+          <a:stretch>
+            <a:fillRect/>
+          </a:stretch>
+        </p:blipFill>
+        <p:spPr>
+          <a:xfrm>
+            <a:off x="5723536" y="4194175"/>
+            <a:ext cx="5887272" cy="1895740"/>
+          </a:xfrm>
+          <a:prstGeom prst="rect">
+            <a:avLst/>
+          </a:prstGeom>
+        </p:spPr>
+      </p:pic>
+      <p:sp>
+        <p:nvSpPr>
+          <p:cNvPr id="8" name="TextBox 7">
+            <a:extLst>
+              <a:ext uri="{FF2B5EF4-FFF2-40B4-BE49-F238E27FC236}">
+                <a16:creationId xmlns:a16="http://schemas.microsoft.com/office/drawing/2014/main" id="{EE2013ED-EF99-8EF1-B3B5-346B9EF78413}"/>
+              </a:ext>
+            </a:extLst>
+          </p:cNvPr>
+          <p:cNvSpPr txBox="1"/>
+          <p:nvPr/>
+        </p:nvSpPr>
+        <p:spPr>
+          <a:xfrm>
+            <a:off x="6096000" y="2488017"/>
+            <a:ext cx="5082417" cy="1200329"/>
+          </a:xfrm>
+          <a:prstGeom prst="rect">
+            <a:avLst/>
+          </a:prstGeom>
+          <a:noFill/>
+        </p:spPr>
+        <p:txBody>
+          <a:bodyPr wrap="square" rtlCol="0">
+            <a:spAutoFit/>
+          </a:bodyPr>
+          <a:lstStyle/>
+          <a:p>
+            <a:r>
+              <a:rPr lang="en-US" dirty="0"/>
+              <a:t>Definition: A </a:t>
+            </a:r>
+            <a:r>
+              <a:rPr lang="en-US" dirty="0">
+                <a:solidFill>
+                  <a:schemeClr val="accent2"/>
+                </a:solidFill>
+              </a:rPr>
+              <a:t>Callback Function </a:t>
+            </a:r>
+            <a:r>
+              <a:rPr lang="en-US" dirty="0"/>
+              <a:t>is a function that is passed as an argument to another function, and is meant to be called later, usually after an operation has completed</a:t>
+            </a:r>
+          </a:p>
+        </p:txBody>
+      </p:sp>
+    </p:spTree>
+    <p:extLst>
+      <p:ext uri="{BB962C8B-B14F-4D97-AF65-F5344CB8AC3E}">
+        <p14:creationId xmlns:p14="http://schemas.microsoft.com/office/powerpoint/2010/main" val="892247919"/>
+      </p:ext>
+    </p:extLst>
+  </p:cSld>
+  <p:clrMapOvr>
+    <a:masterClrMapping/>
+  </p:clrMapOvr>
+</p:sld>
+</file>
+
+<file path=ppt/slides/slide43.xml><?xml version="1.0" encoding="utf-8"?>
+<p:sld xmlns:a="http://schemas.openxmlformats.org/drawingml/2006/main" xmlns:r="http://schemas.openxmlformats.org/officeDocument/2006/relationships" xmlns:p="http://schemas.openxmlformats.org/presentationml/2006/main">
+  <p:cSld>
+    <p:spTree>
+      <p:nvGrpSpPr>
+        <p:cNvPr id="1" name=""/>
+        <p:cNvGrpSpPr/>
+        <p:nvPr/>
+      </p:nvGrpSpPr>
+      <p:grpSpPr>
+        <a:xfrm>
+          <a:off x="0" y="0"/>
+          <a:ext cx="0" cy="0"/>
+          <a:chOff x="0" y="0"/>
+          <a:chExt cx="0" cy="0"/>
+        </a:xfrm>
+      </p:grpSpPr>
+      <p:sp>
+        <p:nvSpPr>
+          <p:cNvPr id="2" name="Title 1">
+            <a:extLst>
+              <a:ext uri="{FF2B5EF4-FFF2-40B4-BE49-F238E27FC236}">
                 <a16:creationId xmlns:a16="http://schemas.microsoft.com/office/drawing/2014/main" id="{1067E964-4133-02A9-FACB-F8E3D24F9AE4}"/>
               </a:ext>
             </a:extLst>
@@ -11900,7 +12026,7 @@
 </p:sld>
 </file>
 
-<file path=ppt/slides/slide43.xml><?xml version="1.0" encoding="utf-8"?>
+<file path=ppt/slides/slide44.xml><?xml version="1.0" encoding="utf-8"?>
 <p:sld xmlns:a="http://schemas.openxmlformats.org/drawingml/2006/main" xmlns:r="http://schemas.openxmlformats.org/officeDocument/2006/relationships" xmlns:p="http://schemas.openxmlformats.org/presentationml/2006/main">
   <p:cSld>
     <p:spTree>
@@ -12054,182 +12180,6 @@
     <p:extLst>
       <p:ext uri="{BB962C8B-B14F-4D97-AF65-F5344CB8AC3E}">
         <p14:creationId xmlns:p14="http://schemas.microsoft.com/office/powerpoint/2010/main" val="1840732059"/>
-      </p:ext>
-    </p:extLst>
-  </p:cSld>
-  <p:clrMapOvr>
-    <a:masterClrMapping/>
-  </p:clrMapOvr>
-</p:sld>
-</file>
-
-<file path=ppt/slides/slide44.xml><?xml version="1.0" encoding="utf-8"?>
-<p:sld xmlns:a="http://schemas.openxmlformats.org/drawingml/2006/main" xmlns:r="http://schemas.openxmlformats.org/officeDocument/2006/relationships" xmlns:p="http://schemas.openxmlformats.org/presentationml/2006/main">
-  <p:cSld>
-    <p:spTree>
-      <p:nvGrpSpPr>
-        <p:cNvPr id="1" name=""/>
-        <p:cNvGrpSpPr/>
-        <p:nvPr/>
-      </p:nvGrpSpPr>
-      <p:grpSpPr>
-        <a:xfrm>
-          <a:off x="0" y="0"/>
-          <a:ext cx="0" cy="0"/>
-          <a:chOff x="0" y="0"/>
-          <a:chExt cx="0" cy="0"/>
-        </a:xfrm>
-      </p:grpSpPr>
-      <p:sp>
-        <p:nvSpPr>
-          <p:cNvPr id="2" name="Title 1">
-            <a:extLst>
-              <a:ext uri="{FF2B5EF4-FFF2-40B4-BE49-F238E27FC236}">
-                <a16:creationId xmlns:a16="http://schemas.microsoft.com/office/drawing/2014/main" id="{26171C56-81FF-ADD5-ED33-69CBA7F501E1}"/>
-              </a:ext>
-            </a:extLst>
-          </p:cNvPr>
-          <p:cNvSpPr>
-            <a:spLocks noGrp="1"/>
-          </p:cNvSpPr>
-          <p:nvPr>
-            <p:ph type="title"/>
-          </p:nvPr>
-        </p:nvSpPr>
-        <p:spPr/>
-        <p:txBody>
-          <a:bodyPr/>
-          <a:lstStyle/>
-          <a:p>
-            <a:r>
-              <a:rPr lang="en-US" dirty="0"/>
-              <a:t>Promises</a:t>
-            </a:r>
-          </a:p>
-        </p:txBody>
-      </p:sp>
-      <p:sp>
-        <p:nvSpPr>
-          <p:cNvPr id="3" name="Content Placeholder 2">
-            <a:extLst>
-              <a:ext uri="{FF2B5EF4-FFF2-40B4-BE49-F238E27FC236}">
-                <a16:creationId xmlns:a16="http://schemas.microsoft.com/office/drawing/2014/main" id="{E5E18E2C-36AF-F377-8D1D-3E626D602432}"/>
-              </a:ext>
-            </a:extLst>
-          </p:cNvPr>
-          <p:cNvSpPr>
-            <a:spLocks noGrp="1"/>
-          </p:cNvSpPr>
-          <p:nvPr>
-            <p:ph idx="1"/>
-          </p:nvPr>
-        </p:nvSpPr>
-        <p:spPr>
-          <a:xfrm>
-            <a:off x="581193" y="2180496"/>
-            <a:ext cx="5064695" cy="3678303"/>
-          </a:xfrm>
-        </p:spPr>
-        <p:txBody>
-          <a:bodyPr/>
-          <a:lstStyle/>
-          <a:p>
-            <a:r>
-              <a:rPr lang="en-US" dirty="0"/>
-              <a:t>Definition: A </a:t>
-            </a:r>
-            <a:r>
-              <a:rPr lang="en-US" dirty="0">
-                <a:solidFill>
-                  <a:schemeClr val="accent2"/>
-                </a:solidFill>
-              </a:rPr>
-              <a:t>Promise</a:t>
-            </a:r>
-            <a:r>
-              <a:rPr lang="en-US" dirty="0"/>
-              <a:t> is an object that represents the eventual result of an asynchronous operation</a:t>
-            </a:r>
-          </a:p>
-          <a:p>
-            <a:pPr lvl="1"/>
-            <a:r>
-              <a:rPr lang="en-US" dirty="0"/>
-              <a:t>These allow us to handle success and failures of these operations in a cleaner way</a:t>
-            </a:r>
-          </a:p>
-          <a:p>
-            <a:r>
-              <a:rPr lang="en-US" dirty="0"/>
-              <a:t>Promises may be pending, fulfilled, or rejected </a:t>
-            </a:r>
-          </a:p>
-        </p:txBody>
-      </p:sp>
-      <p:pic>
-        <p:nvPicPr>
-          <p:cNvPr id="5" name="Picture 4">
-            <a:extLst>
-              <a:ext uri="{FF2B5EF4-FFF2-40B4-BE49-F238E27FC236}">
-                <a16:creationId xmlns:a16="http://schemas.microsoft.com/office/drawing/2014/main" id="{256F1220-E7EF-87AD-5102-B6A733A223A2}"/>
-              </a:ext>
-            </a:extLst>
-          </p:cNvPr>
-          <p:cNvPicPr>
-            <a:picLocks noChangeAspect="1"/>
-          </p:cNvPicPr>
-          <p:nvPr/>
-        </p:nvPicPr>
-        <p:blipFill>
-          <a:blip r:embed="rId2"/>
-          <a:stretch>
-            <a:fillRect/>
-          </a:stretch>
-        </p:blipFill>
-        <p:spPr>
-          <a:xfrm>
-            <a:off x="6934701" y="2390630"/>
-            <a:ext cx="3915321" cy="2076740"/>
-          </a:xfrm>
-          <a:prstGeom prst="rect">
-            <a:avLst/>
-          </a:prstGeom>
-        </p:spPr>
-      </p:pic>
-      <p:pic>
-        <p:nvPicPr>
-          <p:cNvPr id="7" name="Picture 6">
-            <a:extLst>
-              <a:ext uri="{FF2B5EF4-FFF2-40B4-BE49-F238E27FC236}">
-                <a16:creationId xmlns:a16="http://schemas.microsoft.com/office/drawing/2014/main" id="{2C3C9B61-3AED-0529-9936-DA6E10B1FD8D}"/>
-              </a:ext>
-            </a:extLst>
-          </p:cNvPr>
-          <p:cNvPicPr>
-            <a:picLocks noChangeAspect="1"/>
-          </p:cNvPicPr>
-          <p:nvPr/>
-        </p:nvPicPr>
-        <p:blipFill>
-          <a:blip r:embed="rId3"/>
-          <a:stretch>
-            <a:fillRect/>
-          </a:stretch>
-        </p:blipFill>
-        <p:spPr>
-          <a:xfrm>
-            <a:off x="6963279" y="4646423"/>
-            <a:ext cx="3858163" cy="1648055"/>
-          </a:xfrm>
-          <a:prstGeom prst="rect">
-            <a:avLst/>
-          </a:prstGeom>
-        </p:spPr>
-      </p:pic>
-    </p:spTree>
-    <p:extLst>
-      <p:ext uri="{BB962C8B-B14F-4D97-AF65-F5344CB8AC3E}">
-        <p14:creationId xmlns:p14="http://schemas.microsoft.com/office/powerpoint/2010/main" val="2670149110"/>
       </p:ext>
     </p:extLst>
   </p:cSld>
@@ -12261,7 +12211,7 @@
           <p:cNvPr id="2" name="Title 1">
             <a:extLst>
               <a:ext uri="{FF2B5EF4-FFF2-40B4-BE49-F238E27FC236}">
-                <a16:creationId xmlns:a16="http://schemas.microsoft.com/office/drawing/2014/main" id="{F1B440AE-88C9-68B2-DC9C-638EB2101EE1}"/>
+                <a16:creationId xmlns:a16="http://schemas.microsoft.com/office/drawing/2014/main" id="{26171C56-81FF-ADD5-ED33-69CBA7F501E1}"/>
               </a:ext>
             </a:extLst>
           </p:cNvPr>
@@ -12279,7 +12229,7 @@
           <a:p>
             <a:r>
               <a:rPr lang="en-US" dirty="0"/>
-              <a:t>The Fetch API</a:t>
+              <a:t>Promises</a:t>
             </a:r>
           </a:p>
         </p:txBody>
@@ -12289,7 +12239,7 @@
           <p:cNvPr id="3" name="Content Placeholder 2">
             <a:extLst>
               <a:ext uri="{FF2B5EF4-FFF2-40B4-BE49-F238E27FC236}">
-                <a16:creationId xmlns:a16="http://schemas.microsoft.com/office/drawing/2014/main" id="{F0B5BA18-E500-0580-04E6-4A387C79BE3C}"/>
+                <a16:creationId xmlns:a16="http://schemas.microsoft.com/office/drawing/2014/main" id="{E5E18E2C-36AF-F377-8D1D-3E626D602432}"/>
               </a:ext>
             </a:extLst>
           </p:cNvPr>
@@ -12303,7 +12253,7 @@
         <p:spPr>
           <a:xfrm>
             <a:off x="581193" y="2180496"/>
-            <a:ext cx="5287980" cy="3678303"/>
+            <a:ext cx="5064695" cy="3678303"/>
           </a:xfrm>
         </p:spPr>
         <p:txBody>
@@ -12312,7 +12262,7 @@
           <a:p>
             <a:r>
               <a:rPr lang="en-US" dirty="0"/>
-              <a:t>Definition: The </a:t>
+              <a:t>Definition: A </a:t>
             </a:r>
             <a:r>
               <a:rPr lang="en-US" dirty="0">
@@ -12320,25 +12270,24 @@
                   <a:schemeClr val="accent2"/>
                 </a:solidFill>
               </a:rPr>
-              <a:t>Fetch API </a:t>
-            </a:r>
-            <a:r>
-              <a:rPr lang="en-US" dirty="0"/>
-              <a:t>is a modern JavaScript interface for making HTTP requests to servers</a:t>
+              <a:t>Promise</a:t>
+            </a:r>
+            <a:r>
+              <a:rPr lang="en-US" dirty="0"/>
+              <a:t> is an object that represents the eventual result of an asynchronous operation</a:t>
             </a:r>
           </a:p>
           <a:p>
             <a:pPr lvl="1"/>
             <a:r>
               <a:rPr lang="en-US" dirty="0"/>
-              <a:t>Let's us send and retrieve data asynchronously </a:t>
-            </a:r>
-          </a:p>
-          <a:p>
-            <a:pPr lvl="1"/>
-            <a:r>
-              <a:rPr lang="en-US" dirty="0"/>
-              <a:t>Uses promises</a:t>
+              <a:t>These allow us to handle success and failures of these operations in a cleaner way</a:t>
+            </a:r>
+          </a:p>
+          <a:p>
+            <a:r>
+              <a:rPr lang="en-US" dirty="0"/>
+              <a:t>Promises may be pending, fulfilled, or rejected </a:t>
             </a:r>
           </a:p>
         </p:txBody>
@@ -12348,7 +12297,7 @@
           <p:cNvPr id="5" name="Picture 4">
             <a:extLst>
               <a:ext uri="{FF2B5EF4-FFF2-40B4-BE49-F238E27FC236}">
-                <a16:creationId xmlns:a16="http://schemas.microsoft.com/office/drawing/2014/main" id="{A7E74090-258F-2F40-4DD4-3ECE50D05BF2}"/>
+                <a16:creationId xmlns:a16="http://schemas.microsoft.com/office/drawing/2014/main" id="{256F1220-E7EF-87AD-5102-B6A733A223A2}"/>
               </a:ext>
             </a:extLst>
           </p:cNvPr>
@@ -12365,8 +12314,38 @@
         </p:blipFill>
         <p:spPr>
           <a:xfrm>
-            <a:off x="6322829" y="2180496"/>
-            <a:ext cx="5056955" cy="4124611"/>
+            <a:off x="6934701" y="2390630"/>
+            <a:ext cx="3915321" cy="2076740"/>
+          </a:xfrm>
+          <a:prstGeom prst="rect">
+            <a:avLst/>
+          </a:prstGeom>
+        </p:spPr>
+      </p:pic>
+      <p:pic>
+        <p:nvPicPr>
+          <p:cNvPr id="7" name="Picture 6">
+            <a:extLst>
+              <a:ext uri="{FF2B5EF4-FFF2-40B4-BE49-F238E27FC236}">
+                <a16:creationId xmlns:a16="http://schemas.microsoft.com/office/drawing/2014/main" id="{2C3C9B61-3AED-0529-9936-DA6E10B1FD8D}"/>
+              </a:ext>
+            </a:extLst>
+          </p:cNvPr>
+          <p:cNvPicPr>
+            <a:picLocks noChangeAspect="1"/>
+          </p:cNvPicPr>
+          <p:nvPr/>
+        </p:nvPicPr>
+        <p:blipFill>
+          <a:blip r:embed="rId3"/>
+          <a:stretch>
+            <a:fillRect/>
+          </a:stretch>
+        </p:blipFill>
+        <p:spPr>
+          <a:xfrm>
+            <a:off x="6963279" y="4646423"/>
+            <a:ext cx="3858163" cy="1648055"/>
           </a:xfrm>
           <a:prstGeom prst="rect">
             <a:avLst/>
@@ -12376,7 +12355,7 @@
     </p:spTree>
     <p:extLst>
       <p:ext uri="{BB962C8B-B14F-4D97-AF65-F5344CB8AC3E}">
-        <p14:creationId xmlns:p14="http://schemas.microsoft.com/office/powerpoint/2010/main" val="1620391189"/>
+        <p14:creationId xmlns:p14="http://schemas.microsoft.com/office/powerpoint/2010/main" val="2670149110"/>
       </p:ext>
     </p:extLst>
   </p:cSld>
@@ -12408,6 +12387,153 @@
           <p:cNvPr id="2" name="Title 1">
             <a:extLst>
               <a:ext uri="{FF2B5EF4-FFF2-40B4-BE49-F238E27FC236}">
+                <a16:creationId xmlns:a16="http://schemas.microsoft.com/office/drawing/2014/main" id="{F1B440AE-88C9-68B2-DC9C-638EB2101EE1}"/>
+              </a:ext>
+            </a:extLst>
+          </p:cNvPr>
+          <p:cNvSpPr>
+            <a:spLocks noGrp="1"/>
+          </p:cNvSpPr>
+          <p:nvPr>
+            <p:ph type="title"/>
+          </p:nvPr>
+        </p:nvSpPr>
+        <p:spPr/>
+        <p:txBody>
+          <a:bodyPr/>
+          <a:lstStyle/>
+          <a:p>
+            <a:r>
+              <a:rPr lang="en-US" dirty="0"/>
+              <a:t>The Fetch API</a:t>
+            </a:r>
+          </a:p>
+        </p:txBody>
+      </p:sp>
+      <p:sp>
+        <p:nvSpPr>
+          <p:cNvPr id="3" name="Content Placeholder 2">
+            <a:extLst>
+              <a:ext uri="{FF2B5EF4-FFF2-40B4-BE49-F238E27FC236}">
+                <a16:creationId xmlns:a16="http://schemas.microsoft.com/office/drawing/2014/main" id="{F0B5BA18-E500-0580-04E6-4A387C79BE3C}"/>
+              </a:ext>
+            </a:extLst>
+          </p:cNvPr>
+          <p:cNvSpPr>
+            <a:spLocks noGrp="1"/>
+          </p:cNvSpPr>
+          <p:nvPr>
+            <p:ph idx="1"/>
+          </p:nvPr>
+        </p:nvSpPr>
+        <p:spPr>
+          <a:xfrm>
+            <a:off x="581193" y="2180496"/>
+            <a:ext cx="5287980" cy="3678303"/>
+          </a:xfrm>
+        </p:spPr>
+        <p:txBody>
+          <a:bodyPr/>
+          <a:lstStyle/>
+          <a:p>
+            <a:r>
+              <a:rPr lang="en-US" dirty="0"/>
+              <a:t>Definition: The </a:t>
+            </a:r>
+            <a:r>
+              <a:rPr lang="en-US" dirty="0">
+                <a:solidFill>
+                  <a:schemeClr val="accent2"/>
+                </a:solidFill>
+              </a:rPr>
+              <a:t>Fetch API </a:t>
+            </a:r>
+            <a:r>
+              <a:rPr lang="en-US" dirty="0"/>
+              <a:t>is a modern JavaScript interface for making HTTP requests to servers</a:t>
+            </a:r>
+          </a:p>
+          <a:p>
+            <a:pPr lvl="1"/>
+            <a:r>
+              <a:rPr lang="en-US" dirty="0"/>
+              <a:t>Let's us send and retrieve data asynchronously </a:t>
+            </a:r>
+          </a:p>
+          <a:p>
+            <a:pPr lvl="1"/>
+            <a:r>
+              <a:rPr lang="en-US" dirty="0"/>
+              <a:t>Uses promises</a:t>
+            </a:r>
+          </a:p>
+        </p:txBody>
+      </p:sp>
+      <p:pic>
+        <p:nvPicPr>
+          <p:cNvPr id="5" name="Picture 4">
+            <a:extLst>
+              <a:ext uri="{FF2B5EF4-FFF2-40B4-BE49-F238E27FC236}">
+                <a16:creationId xmlns:a16="http://schemas.microsoft.com/office/drawing/2014/main" id="{A7E74090-258F-2F40-4DD4-3ECE50D05BF2}"/>
+              </a:ext>
+            </a:extLst>
+          </p:cNvPr>
+          <p:cNvPicPr>
+            <a:picLocks noChangeAspect="1"/>
+          </p:cNvPicPr>
+          <p:nvPr/>
+        </p:nvPicPr>
+        <p:blipFill>
+          <a:blip r:embed="rId2"/>
+          <a:stretch>
+            <a:fillRect/>
+          </a:stretch>
+        </p:blipFill>
+        <p:spPr>
+          <a:xfrm>
+            <a:off x="6322829" y="2180496"/>
+            <a:ext cx="5056955" cy="4124611"/>
+          </a:xfrm>
+          <a:prstGeom prst="rect">
+            <a:avLst/>
+          </a:prstGeom>
+        </p:spPr>
+      </p:pic>
+    </p:spTree>
+    <p:extLst>
+      <p:ext uri="{BB962C8B-B14F-4D97-AF65-F5344CB8AC3E}">
+        <p14:creationId xmlns:p14="http://schemas.microsoft.com/office/powerpoint/2010/main" val="1620391189"/>
+      </p:ext>
+    </p:extLst>
+  </p:cSld>
+  <p:clrMapOvr>
+    <a:masterClrMapping/>
+  </p:clrMapOvr>
+</p:sld>
+</file>
+
+<file path=ppt/slides/slide47.xml><?xml version="1.0" encoding="utf-8"?>
+<p:sld xmlns:a="http://schemas.openxmlformats.org/drawingml/2006/main" xmlns:r="http://schemas.openxmlformats.org/officeDocument/2006/relationships" xmlns:p="http://schemas.openxmlformats.org/presentationml/2006/main">
+  <p:cSld>
+    <p:spTree>
+      <p:nvGrpSpPr>
+        <p:cNvPr id="1" name=""/>
+        <p:cNvGrpSpPr/>
+        <p:nvPr/>
+      </p:nvGrpSpPr>
+      <p:grpSpPr>
+        <a:xfrm>
+          <a:off x="0" y="0"/>
+          <a:ext cx="0" cy="0"/>
+          <a:chOff x="0" y="0"/>
+          <a:chExt cx="0" cy="0"/>
+        </a:xfrm>
+      </p:grpSpPr>
+      <p:sp>
+        <p:nvSpPr>
+          <p:cNvPr id="2" name="Title 1">
+            <a:extLst>
+              <a:ext uri="{FF2B5EF4-FFF2-40B4-BE49-F238E27FC236}">
                 <a16:creationId xmlns:a16="http://schemas.microsoft.com/office/drawing/2014/main" id="{30EB790B-1FB1-F813-608E-DE8AB0B7CE0B}"/>
               </a:ext>
             </a:extLst>
@@ -12517,7 +12643,7 @@
 </p:sld>
 </file>
 
-<file path=ppt/slides/slide47.xml><?xml version="1.0" encoding="utf-8"?>
+<file path=ppt/slides/slide48.xml><?xml version="1.0" encoding="utf-8"?>
 <p:sld xmlns:a="http://schemas.openxmlformats.org/drawingml/2006/main" xmlns:r="http://schemas.openxmlformats.org/officeDocument/2006/relationships" xmlns:p="http://schemas.openxmlformats.org/presentationml/2006/main">
   <p:cSld>
     <p:spTree>
